--- a/Windy_操作マニュアル.pptx
+++ b/Windy_操作マニュアル.pptx
@@ -5,18 +5,18 @@
     <p:sldMasterId id="2147483648" r:id="rId1"/>
   </p:sldMasterIdLst>
   <p:sldIdLst>
-    <p:sldId id="256" r:id="rId2"/>
-    <p:sldId id="257" r:id="rId3"/>
-    <p:sldId id="258" r:id="rId4"/>
-    <p:sldId id="259" r:id="rId5"/>
-    <p:sldId id="260" r:id="rId6"/>
-    <p:sldId id="261" r:id="rId7"/>
-    <p:sldId id="262" r:id="rId8"/>
-    <p:sldId id="263" r:id="rId9"/>
-    <p:sldId id="264" r:id="rId10"/>
-    <p:sldId id="265" r:id="rId11"/>
+    <p:sldId id="256" r:id="rId7"/>
+    <p:sldId id="257" r:id="rId8"/>
+    <p:sldId id="258" r:id="rId9"/>
+    <p:sldId id="259" r:id="rId10"/>
+    <p:sldId id="260" r:id="rId11"/>
+    <p:sldId id="261" r:id="rId12"/>
+    <p:sldId id="262" r:id="rId13"/>
+    <p:sldId id="263" r:id="rId14"/>
+    <p:sldId id="264" r:id="rId15"/>
+    <p:sldId id="265" r:id="rId16"/>
   </p:sldIdLst>
-  <p:sldSz cx="12188825" cy="6858000"/>
+  <p:sldSz cx="12188952" cy="6858000" type="screen4x3"/>
   <p:notesSz cx="6858000" cy="9144000"/>
   <p:defaultTextStyle>
     <a:defPPr>
@@ -113,22 +113,6 @@
       </a:defRPr>
     </a:lvl9pPr>
   </p:defaultTextStyle>
-  <p:extLst>
-    <p:ext uri="{EFAFB233-063F-42B5-8137-9DF3F51BA10A}">
-      <p15:sldGuideLst xmlns:p15="http://schemas.microsoft.com/office/powerpoint/2012/main">
-        <p15:guide id="1" orient="horz" pos="2160">
-          <p15:clr>
-            <a:srgbClr val="A4A3A4"/>
-          </p15:clr>
-        </p15:guide>
-        <p15:guide id="2" pos="2880">
-          <p15:clr>
-            <a:srgbClr val="A4A3A4"/>
-          </p15:clr>
-        </p15:guide>
-      </p15:sldGuideLst>
-    </p:ext>
-  </p:extLst>
 </p:presentation>
 </file>
 
@@ -170,9 +154,10 @@
           <a:lstStyle/>
           <a:p>
             <a:r>
-              <a:rPr lang="en-US"/>
+              <a:rPr lang="en-US" smtClean="0"/>
               <a:t>Click to edit Master title style</a:t>
             </a:r>
+            <a:endParaRPr lang="en-US"/>
           </a:p>
         </p:txBody>
       </p:sp>
@@ -288,9 +273,10 @@
           </a:lstStyle>
           <a:p>
             <a:r>
-              <a:rPr lang="en-US"/>
+              <a:rPr lang="en-US" smtClean="0"/>
               <a:t>Click to edit Master subtitle style</a:t>
             </a:r>
+            <a:endParaRPr lang="en-US"/>
           </a:p>
         </p:txBody>
       </p:sp>
@@ -311,7 +297,7 @@
           <a:p>
             <a:fld id="{5BCAD085-E8A6-8845-BD4E-CB4CCA059FC4}" type="datetimeFigureOut">
               <a:rPr lang="en-US" smtClean="0"/>
-              <a:t>6/5/26</a:t>
+              <a:t>1/27/13</a:t>
             </a:fld>
             <a:endParaRPr lang="en-US"/>
           </a:p>
@@ -405,9 +391,10 @@
           <a:lstStyle/>
           <a:p>
             <a:r>
-              <a:rPr lang="en-US"/>
+              <a:rPr lang="en-US" smtClean="0"/>
               <a:t>Click to edit Master title style</a:t>
             </a:r>
+            <a:endParaRPr lang="en-US"/>
           </a:p>
         </p:txBody>
       </p:sp>
@@ -428,37 +415,38 @@
           <a:p>
             <a:pPr lvl="0"/>
             <a:r>
-              <a:rPr lang="en-US"/>
+              <a:rPr lang="en-US" smtClean="0"/>
               <a:t>Click to edit Master text styles</a:t>
             </a:r>
           </a:p>
           <a:p>
             <a:pPr lvl="1"/>
             <a:r>
-              <a:rPr lang="en-US"/>
+              <a:rPr lang="en-US" smtClean="0"/>
               <a:t>Second level</a:t>
             </a:r>
           </a:p>
           <a:p>
             <a:pPr lvl="2"/>
             <a:r>
-              <a:rPr lang="en-US"/>
+              <a:rPr lang="en-US" smtClean="0"/>
               <a:t>Third level</a:t>
             </a:r>
           </a:p>
           <a:p>
             <a:pPr lvl="3"/>
             <a:r>
-              <a:rPr lang="en-US"/>
+              <a:rPr lang="en-US" smtClean="0"/>
               <a:t>Fourth level</a:t>
             </a:r>
           </a:p>
           <a:p>
             <a:pPr lvl="4"/>
             <a:r>
-              <a:rPr lang="en-US"/>
+              <a:rPr lang="en-US" smtClean="0"/>
               <a:t>Fifth level</a:t>
             </a:r>
+            <a:endParaRPr lang="en-US"/>
           </a:p>
         </p:txBody>
       </p:sp>
@@ -479,7 +467,7 @@
           <a:p>
             <a:fld id="{5BCAD085-E8A6-8845-BD4E-CB4CCA059FC4}" type="datetimeFigureOut">
               <a:rPr lang="en-US" smtClean="0"/>
-              <a:t>6/5/26</a:t>
+              <a:t>1/27/13</a:t>
             </a:fld>
             <a:endParaRPr lang="en-US"/>
           </a:p>
@@ -578,9 +566,10 @@
           <a:lstStyle/>
           <a:p>
             <a:r>
-              <a:rPr lang="en-US"/>
+              <a:rPr lang="en-US" smtClean="0"/>
               <a:t>Click to edit Master title style</a:t>
             </a:r>
+            <a:endParaRPr lang="en-US"/>
           </a:p>
         </p:txBody>
       </p:sp>
@@ -606,37 +595,38 @@
           <a:p>
             <a:pPr lvl="0"/>
             <a:r>
-              <a:rPr lang="en-US"/>
+              <a:rPr lang="en-US" smtClean="0"/>
               <a:t>Click to edit Master text styles</a:t>
             </a:r>
           </a:p>
           <a:p>
             <a:pPr lvl="1"/>
             <a:r>
-              <a:rPr lang="en-US"/>
+              <a:rPr lang="en-US" smtClean="0"/>
               <a:t>Second level</a:t>
             </a:r>
           </a:p>
           <a:p>
             <a:pPr lvl="2"/>
             <a:r>
-              <a:rPr lang="en-US"/>
+              <a:rPr lang="en-US" smtClean="0"/>
               <a:t>Third level</a:t>
             </a:r>
           </a:p>
           <a:p>
             <a:pPr lvl="3"/>
             <a:r>
-              <a:rPr lang="en-US"/>
+              <a:rPr lang="en-US" smtClean="0"/>
               <a:t>Fourth level</a:t>
             </a:r>
           </a:p>
           <a:p>
             <a:pPr lvl="4"/>
             <a:r>
-              <a:rPr lang="en-US"/>
+              <a:rPr lang="en-US" smtClean="0"/>
               <a:t>Fifth level</a:t>
             </a:r>
+            <a:endParaRPr lang="en-US"/>
           </a:p>
         </p:txBody>
       </p:sp>
@@ -657,7 +647,7 @@
           <a:p>
             <a:fld id="{5BCAD085-E8A6-8845-BD4E-CB4CCA059FC4}" type="datetimeFigureOut">
               <a:rPr lang="en-US" smtClean="0"/>
-              <a:t>6/5/26</a:t>
+              <a:t>1/27/13</a:t>
             </a:fld>
             <a:endParaRPr lang="en-US"/>
           </a:p>
@@ -751,9 +741,10 @@
           <a:lstStyle/>
           <a:p>
             <a:r>
-              <a:rPr lang="en-US"/>
+              <a:rPr lang="en-US" smtClean="0"/>
               <a:t>Click to edit Master title style</a:t>
             </a:r>
+            <a:endParaRPr lang="en-US"/>
           </a:p>
         </p:txBody>
       </p:sp>
@@ -774,37 +765,38 @@
           <a:p>
             <a:pPr lvl="0"/>
             <a:r>
-              <a:rPr lang="en-US"/>
+              <a:rPr lang="en-US" smtClean="0"/>
               <a:t>Click to edit Master text styles</a:t>
             </a:r>
           </a:p>
           <a:p>
             <a:pPr lvl="1"/>
             <a:r>
-              <a:rPr lang="en-US"/>
+              <a:rPr lang="en-US" smtClean="0"/>
               <a:t>Second level</a:t>
             </a:r>
           </a:p>
           <a:p>
             <a:pPr lvl="2"/>
             <a:r>
-              <a:rPr lang="en-US"/>
+              <a:rPr lang="en-US" smtClean="0"/>
               <a:t>Third level</a:t>
             </a:r>
           </a:p>
           <a:p>
             <a:pPr lvl="3"/>
             <a:r>
-              <a:rPr lang="en-US"/>
+              <a:rPr lang="en-US" smtClean="0"/>
               <a:t>Fourth level</a:t>
             </a:r>
           </a:p>
           <a:p>
             <a:pPr lvl="4"/>
             <a:r>
-              <a:rPr lang="en-US"/>
+              <a:rPr lang="en-US" smtClean="0"/>
               <a:t>Fifth level</a:t>
             </a:r>
+            <a:endParaRPr lang="en-US"/>
           </a:p>
         </p:txBody>
       </p:sp>
@@ -825,7 +817,7 @@
           <a:p>
             <a:fld id="{5BCAD085-E8A6-8845-BD4E-CB4CCA059FC4}" type="datetimeFigureOut">
               <a:rPr lang="en-US" smtClean="0"/>
-              <a:t>6/5/26</a:t>
+              <a:t>1/27/13</a:t>
             </a:fld>
             <a:endParaRPr lang="en-US"/>
           </a:p>
@@ -928,9 +920,10 @@
           </a:lstStyle>
           <a:p>
             <a:r>
-              <a:rPr lang="en-US"/>
+              <a:rPr lang="en-US" smtClean="0"/>
               <a:t>Click to edit Master title style</a:t>
             </a:r>
+            <a:endParaRPr lang="en-US"/>
           </a:p>
         </p:txBody>
       </p:sp>
@@ -1047,7 +1040,7 @@
           <a:p>
             <a:pPr lvl="0"/>
             <a:r>
-              <a:rPr lang="en-US"/>
+              <a:rPr lang="en-US" smtClean="0"/>
               <a:t>Click to edit Master text styles</a:t>
             </a:r>
           </a:p>
@@ -1070,7 +1063,7 @@
           <a:p>
             <a:fld id="{5BCAD085-E8A6-8845-BD4E-CB4CCA059FC4}" type="datetimeFigureOut">
               <a:rPr lang="en-US" smtClean="0"/>
-              <a:t>6/5/26</a:t>
+              <a:t>1/27/13</a:t>
             </a:fld>
             <a:endParaRPr lang="en-US"/>
           </a:p>
@@ -1164,9 +1157,10 @@
           <a:lstStyle/>
           <a:p>
             <a:r>
-              <a:rPr lang="en-US"/>
+              <a:rPr lang="en-US" smtClean="0"/>
               <a:t>Click to edit Master title style</a:t>
             </a:r>
+            <a:endParaRPr lang="en-US"/>
           </a:p>
         </p:txBody>
       </p:sp>
@@ -1220,37 +1214,38 @@
           <a:p>
             <a:pPr lvl="0"/>
             <a:r>
-              <a:rPr lang="en-US"/>
+              <a:rPr lang="en-US" smtClean="0"/>
               <a:t>Click to edit Master text styles</a:t>
             </a:r>
           </a:p>
           <a:p>
             <a:pPr lvl="1"/>
             <a:r>
-              <a:rPr lang="en-US"/>
+              <a:rPr lang="en-US" smtClean="0"/>
               <a:t>Second level</a:t>
             </a:r>
           </a:p>
           <a:p>
             <a:pPr lvl="2"/>
             <a:r>
-              <a:rPr lang="en-US"/>
+              <a:rPr lang="en-US" smtClean="0"/>
               <a:t>Third level</a:t>
             </a:r>
           </a:p>
           <a:p>
             <a:pPr lvl="3"/>
             <a:r>
-              <a:rPr lang="en-US"/>
+              <a:rPr lang="en-US" smtClean="0"/>
               <a:t>Fourth level</a:t>
             </a:r>
           </a:p>
           <a:p>
             <a:pPr lvl="4"/>
             <a:r>
-              <a:rPr lang="en-US"/>
+              <a:rPr lang="en-US" smtClean="0"/>
               <a:t>Fifth level</a:t>
             </a:r>
+            <a:endParaRPr lang="en-US"/>
           </a:p>
         </p:txBody>
       </p:sp>
@@ -1304,37 +1299,38 @@
           <a:p>
             <a:pPr lvl="0"/>
             <a:r>
-              <a:rPr lang="en-US"/>
+              <a:rPr lang="en-US" smtClean="0"/>
               <a:t>Click to edit Master text styles</a:t>
             </a:r>
           </a:p>
           <a:p>
             <a:pPr lvl="1"/>
             <a:r>
-              <a:rPr lang="en-US"/>
+              <a:rPr lang="en-US" smtClean="0"/>
               <a:t>Second level</a:t>
             </a:r>
           </a:p>
           <a:p>
             <a:pPr lvl="2"/>
             <a:r>
-              <a:rPr lang="en-US"/>
+              <a:rPr lang="en-US" smtClean="0"/>
               <a:t>Third level</a:t>
             </a:r>
           </a:p>
           <a:p>
             <a:pPr lvl="3"/>
             <a:r>
-              <a:rPr lang="en-US"/>
+              <a:rPr lang="en-US" smtClean="0"/>
               <a:t>Fourth level</a:t>
             </a:r>
           </a:p>
           <a:p>
             <a:pPr lvl="4"/>
             <a:r>
-              <a:rPr lang="en-US"/>
+              <a:rPr lang="en-US" smtClean="0"/>
               <a:t>Fifth level</a:t>
             </a:r>
+            <a:endParaRPr lang="en-US"/>
           </a:p>
         </p:txBody>
       </p:sp>
@@ -1355,7 +1351,7 @@
           <a:p>
             <a:fld id="{5BCAD085-E8A6-8845-BD4E-CB4CCA059FC4}" type="datetimeFigureOut">
               <a:rPr lang="en-US" smtClean="0"/>
-              <a:t>6/5/26</a:t>
+              <a:t>1/27/13</a:t>
             </a:fld>
             <a:endParaRPr lang="en-US"/>
           </a:p>
@@ -1453,9 +1449,10 @@
           </a:lstStyle>
           <a:p>
             <a:r>
-              <a:rPr lang="en-US"/>
+              <a:rPr lang="en-US" smtClean="0"/>
               <a:t>Click to edit Master title style</a:t>
             </a:r>
+            <a:endParaRPr lang="en-US"/>
           </a:p>
         </p:txBody>
       </p:sp>
@@ -1518,7 +1515,7 @@
           <a:p>
             <a:pPr lvl="0"/>
             <a:r>
-              <a:rPr lang="en-US"/>
+              <a:rPr lang="en-US" smtClean="0"/>
               <a:t>Click to edit Master text styles</a:t>
             </a:r>
           </a:p>
@@ -1574,37 +1571,38 @@
           <a:p>
             <a:pPr lvl="0"/>
             <a:r>
-              <a:rPr lang="en-US"/>
+              <a:rPr lang="en-US" smtClean="0"/>
               <a:t>Click to edit Master text styles</a:t>
             </a:r>
           </a:p>
           <a:p>
             <a:pPr lvl="1"/>
             <a:r>
-              <a:rPr lang="en-US"/>
+              <a:rPr lang="en-US" smtClean="0"/>
               <a:t>Second level</a:t>
             </a:r>
           </a:p>
           <a:p>
             <a:pPr lvl="2"/>
             <a:r>
-              <a:rPr lang="en-US"/>
+              <a:rPr lang="en-US" smtClean="0"/>
               <a:t>Third level</a:t>
             </a:r>
           </a:p>
           <a:p>
             <a:pPr lvl="3"/>
             <a:r>
-              <a:rPr lang="en-US"/>
+              <a:rPr lang="en-US" smtClean="0"/>
               <a:t>Fourth level</a:t>
             </a:r>
           </a:p>
           <a:p>
             <a:pPr lvl="4"/>
             <a:r>
-              <a:rPr lang="en-US"/>
+              <a:rPr lang="en-US" smtClean="0"/>
               <a:t>Fifth level</a:t>
             </a:r>
+            <a:endParaRPr lang="en-US"/>
           </a:p>
         </p:txBody>
       </p:sp>
@@ -1667,7 +1665,7 @@
           <a:p>
             <a:pPr lvl="0"/>
             <a:r>
-              <a:rPr lang="en-US"/>
+              <a:rPr lang="en-US" smtClean="0"/>
               <a:t>Click to edit Master text styles</a:t>
             </a:r>
           </a:p>
@@ -1723,37 +1721,38 @@
           <a:p>
             <a:pPr lvl="0"/>
             <a:r>
-              <a:rPr lang="en-US"/>
+              <a:rPr lang="en-US" smtClean="0"/>
               <a:t>Click to edit Master text styles</a:t>
             </a:r>
           </a:p>
           <a:p>
             <a:pPr lvl="1"/>
             <a:r>
-              <a:rPr lang="en-US"/>
+              <a:rPr lang="en-US" smtClean="0"/>
               <a:t>Second level</a:t>
             </a:r>
           </a:p>
           <a:p>
             <a:pPr lvl="2"/>
             <a:r>
-              <a:rPr lang="en-US"/>
+              <a:rPr lang="en-US" smtClean="0"/>
               <a:t>Third level</a:t>
             </a:r>
           </a:p>
           <a:p>
             <a:pPr lvl="3"/>
             <a:r>
-              <a:rPr lang="en-US"/>
+              <a:rPr lang="en-US" smtClean="0"/>
               <a:t>Fourth level</a:t>
             </a:r>
           </a:p>
           <a:p>
             <a:pPr lvl="4"/>
             <a:r>
-              <a:rPr lang="en-US"/>
+              <a:rPr lang="en-US" smtClean="0"/>
               <a:t>Fifth level</a:t>
             </a:r>
+            <a:endParaRPr lang="en-US"/>
           </a:p>
         </p:txBody>
       </p:sp>
@@ -1774,7 +1773,7 @@
           <a:p>
             <a:fld id="{5BCAD085-E8A6-8845-BD4E-CB4CCA059FC4}" type="datetimeFigureOut">
               <a:rPr lang="en-US" smtClean="0"/>
-              <a:t>6/5/26</a:t>
+              <a:t>1/27/13</a:t>
             </a:fld>
             <a:endParaRPr lang="en-US"/>
           </a:p>
@@ -1868,9 +1867,10 @@
           <a:lstStyle/>
           <a:p>
             <a:r>
-              <a:rPr lang="en-US"/>
+              <a:rPr lang="en-US" smtClean="0"/>
               <a:t>Click to edit Master title style</a:t>
             </a:r>
+            <a:endParaRPr lang="en-US"/>
           </a:p>
         </p:txBody>
       </p:sp>
@@ -1891,7 +1891,7 @@
           <a:p>
             <a:fld id="{5BCAD085-E8A6-8845-BD4E-CB4CCA059FC4}" type="datetimeFigureOut">
               <a:rPr lang="en-US" smtClean="0"/>
-              <a:t>6/5/26</a:t>
+              <a:t>1/27/13</a:t>
             </a:fld>
             <a:endParaRPr lang="en-US"/>
           </a:p>
@@ -1986,7 +1986,7 @@
           <a:p>
             <a:fld id="{5BCAD085-E8A6-8845-BD4E-CB4CCA059FC4}" type="datetimeFigureOut">
               <a:rPr lang="en-US" smtClean="0"/>
-              <a:t>6/5/26</a:t>
+              <a:t>1/27/13</a:t>
             </a:fld>
             <a:endParaRPr lang="en-US"/>
           </a:p>
@@ -2089,9 +2089,10 @@
           </a:lstStyle>
           <a:p>
             <a:r>
-              <a:rPr lang="en-US"/>
+              <a:rPr lang="en-US" smtClean="0"/>
               <a:t>Click to edit Master title style</a:t>
             </a:r>
+            <a:endParaRPr lang="en-US"/>
           </a:p>
         </p:txBody>
       </p:sp>
@@ -2145,37 +2146,38 @@
           <a:p>
             <a:pPr lvl="0"/>
             <a:r>
-              <a:rPr lang="en-US"/>
+              <a:rPr lang="en-US" smtClean="0"/>
               <a:t>Click to edit Master text styles</a:t>
             </a:r>
           </a:p>
           <a:p>
             <a:pPr lvl="1"/>
             <a:r>
-              <a:rPr lang="en-US"/>
+              <a:rPr lang="en-US" smtClean="0"/>
               <a:t>Second level</a:t>
             </a:r>
           </a:p>
           <a:p>
             <a:pPr lvl="2"/>
             <a:r>
-              <a:rPr lang="en-US"/>
+              <a:rPr lang="en-US" smtClean="0"/>
               <a:t>Third level</a:t>
             </a:r>
           </a:p>
           <a:p>
             <a:pPr lvl="3"/>
             <a:r>
-              <a:rPr lang="en-US"/>
+              <a:rPr lang="en-US" smtClean="0"/>
               <a:t>Fourth level</a:t>
             </a:r>
           </a:p>
           <a:p>
             <a:pPr lvl="4"/>
             <a:r>
-              <a:rPr lang="en-US"/>
+              <a:rPr lang="en-US" smtClean="0"/>
               <a:t>Fifth level</a:t>
             </a:r>
+            <a:endParaRPr lang="en-US"/>
           </a:p>
         </p:txBody>
       </p:sp>
@@ -2238,7 +2240,7 @@
           <a:p>
             <a:pPr lvl="0"/>
             <a:r>
-              <a:rPr lang="en-US"/>
+              <a:rPr lang="en-US" smtClean="0"/>
               <a:t>Click to edit Master text styles</a:t>
             </a:r>
           </a:p>
@@ -2261,7 +2263,7 @@
           <a:p>
             <a:fld id="{5BCAD085-E8A6-8845-BD4E-CB4CCA059FC4}" type="datetimeFigureOut">
               <a:rPr lang="en-US" smtClean="0"/>
-              <a:t>6/5/26</a:t>
+              <a:t>1/27/13</a:t>
             </a:fld>
             <a:endParaRPr lang="en-US"/>
           </a:p>
@@ -2364,9 +2366,10 @@
           </a:lstStyle>
           <a:p>
             <a:r>
-              <a:rPr lang="en-US"/>
+              <a:rPr lang="en-US" smtClean="0"/>
               <a:t>Click to edit Master title style</a:t>
             </a:r>
+            <a:endParaRPr lang="en-US"/>
           </a:p>
         </p:txBody>
       </p:sp>
@@ -2490,7 +2493,7 @@
           <a:p>
             <a:pPr lvl="0"/>
             <a:r>
-              <a:rPr lang="en-US"/>
+              <a:rPr lang="en-US" smtClean="0"/>
               <a:t>Click to edit Master text styles</a:t>
             </a:r>
           </a:p>
@@ -2513,7 +2516,7 @@
           <a:p>
             <a:fld id="{5BCAD085-E8A6-8845-BD4E-CB4CCA059FC4}" type="datetimeFigureOut">
               <a:rPr lang="en-US" smtClean="0"/>
-              <a:t>6/5/26</a:t>
+              <a:t>1/27/13</a:t>
             </a:fld>
             <a:endParaRPr lang="en-US"/>
           </a:p>
@@ -2622,9 +2625,10 @@
           <a:lstStyle/>
           <a:p>
             <a:r>
-              <a:rPr lang="en-US"/>
+              <a:rPr lang="en-US" smtClean="0"/>
               <a:t>Click to edit Master title style</a:t>
             </a:r>
+            <a:endParaRPr lang="en-US"/>
           </a:p>
         </p:txBody>
       </p:sp>
@@ -2655,37 +2659,38 @@
           <a:p>
             <a:pPr lvl="0"/>
             <a:r>
-              <a:rPr lang="en-US"/>
+              <a:rPr lang="en-US" smtClean="0"/>
               <a:t>Click to edit Master text styles</a:t>
             </a:r>
           </a:p>
           <a:p>
             <a:pPr lvl="1"/>
             <a:r>
-              <a:rPr lang="en-US"/>
+              <a:rPr lang="en-US" smtClean="0"/>
               <a:t>Second level</a:t>
             </a:r>
           </a:p>
           <a:p>
             <a:pPr lvl="2"/>
             <a:r>
-              <a:rPr lang="en-US"/>
+              <a:rPr lang="en-US" smtClean="0"/>
               <a:t>Third level</a:t>
             </a:r>
           </a:p>
           <a:p>
             <a:pPr lvl="3"/>
             <a:r>
-              <a:rPr lang="en-US"/>
+              <a:rPr lang="en-US" smtClean="0"/>
               <a:t>Fourth level</a:t>
             </a:r>
           </a:p>
           <a:p>
             <a:pPr lvl="4"/>
             <a:r>
-              <a:rPr lang="en-US"/>
+              <a:rPr lang="en-US" smtClean="0"/>
               <a:t>Fifth level</a:t>
             </a:r>
+            <a:endParaRPr lang="en-US"/>
           </a:p>
         </p:txBody>
       </p:sp>
@@ -2724,7 +2729,7 @@
           <a:p>
             <a:fld id="{5BCAD085-E8A6-8845-BD4E-CB4CCA059FC4}" type="datetimeFigureOut">
               <a:rPr lang="en-US" smtClean="0"/>
-              <a:t>6/5/26</a:t>
+              <a:t>1/27/13</a:t>
             </a:fld>
             <a:endParaRPr lang="en-US"/>
           </a:p>
@@ -3083,7 +3088,7 @@
 </file>
 
 <file path=ppt/slides/slide1.xml><?xml version="1.0" encoding="utf-8"?>
-<p:sld xmlns:a="http://schemas.openxmlformats.org/drawingml/2006/main" xmlns:r="http://schemas.openxmlformats.org/officeDocument/2006/relationships" xmlns:p="http://schemas.openxmlformats.org/presentationml/2006/main">
+<p:sld xmlns:a="http://schemas.openxmlformats.org/drawingml/2006/main" xmlns:p="http://schemas.openxmlformats.org/presentationml/2006/main" xmlns:r="http://schemas.openxmlformats.org/officeDocument/2006/relationships">
   <p:cSld>
     <p:spTree>
       <p:nvGrpSpPr>
@@ -3091,14 +3096,7 @@
         <p:cNvGrpSpPr/>
         <p:nvPr/>
       </p:nvGrpSpPr>
-      <p:grpSpPr>
-        <a:xfrm>
-          <a:off x="0" y="0"/>
-          <a:ext cx="0" cy="0"/>
-          <a:chOff x="0" y="0"/>
-          <a:chExt cx="0" cy="0"/>
-        </a:xfrm>
-      </p:grpSpPr>
+      <p:grpSpPr/>
       <p:sp>
         <p:nvSpPr>
           <p:cNvPr id="2" name="Rectangle 1"/>
@@ -3139,7 +3137,6 @@
           <a:lstStyle/>
           <a:p>
             <a:pPr algn="ctr"/>
-            <a:endParaRPr/>
           </a:p>
         </p:txBody>
       </p:sp>
@@ -3183,7 +3180,6 @@
           <a:lstStyle/>
           <a:p>
             <a:pPr algn="ctr"/>
-            <a:endParaRPr/>
           </a:p>
         </p:txBody>
       </p:sp>
@@ -3296,7 +3292,6 @@
           <a:lstStyle/>
           <a:p>
             <a:pPr algn="ctr"/>
-            <a:endParaRPr/>
           </a:p>
         </p:txBody>
       </p:sp>
@@ -3377,7 +3372,7 @@
 </file>
 
 <file path=ppt/slides/slide10.xml><?xml version="1.0" encoding="utf-8"?>
-<p:sld xmlns:a="http://schemas.openxmlformats.org/drawingml/2006/main" xmlns:r="http://schemas.openxmlformats.org/officeDocument/2006/relationships" xmlns:p="http://schemas.openxmlformats.org/presentationml/2006/main">
+<p:sld xmlns:a="http://schemas.openxmlformats.org/drawingml/2006/main" xmlns:p="http://schemas.openxmlformats.org/presentationml/2006/main" xmlns:r="http://schemas.openxmlformats.org/officeDocument/2006/relationships">
   <p:cSld>
     <p:spTree>
       <p:nvGrpSpPr>
@@ -3385,14 +3380,7 @@
         <p:cNvGrpSpPr/>
         <p:nvPr/>
       </p:nvGrpSpPr>
-      <p:grpSpPr>
-        <a:xfrm>
-          <a:off x="0" y="0"/>
-          <a:ext cx="0" cy="0"/>
-          <a:chOff x="0" y="0"/>
-          <a:chExt cx="0" cy="0"/>
-        </a:xfrm>
-      </p:grpSpPr>
+      <p:grpSpPr/>
       <p:sp>
         <p:nvSpPr>
           <p:cNvPr id="2" name="Rectangle 1"/>
@@ -3433,7 +3421,6 @@
           <a:lstStyle/>
           <a:p>
             <a:pPr algn="ctr"/>
-            <a:endParaRPr/>
           </a:p>
         </p:txBody>
       </p:sp>
@@ -3545,7 +3532,6 @@
           <a:lstStyle/>
           <a:p>
             <a:pPr algn="ctr"/>
-            <a:endParaRPr/>
           </a:p>
         </p:txBody>
       </p:sp>
@@ -3591,7 +3577,6 @@
           <a:lstStyle/>
           <a:p>
             <a:pPr algn="ctr"/>
-            <a:endParaRPr/>
           </a:p>
         </p:txBody>
       </p:sp>
@@ -3767,7 +3752,22 @@
                   <a:srgbClr val="1A1A2E"/>
                 </a:solidFill>
               </a:rPr>
-              <a:t>7a. 無風フェーズ → 電圧オフセット計測の要否 [y/N] → ブロワー停止確認 → Enter</a:t>
+              <a:t>7a. 無風フェーズ → ブロワー停止確認 → Enter</a:t>
+            </a:r>
+          </a:p>
+          <a:p>
+            <a:pPr>
+              <a:spcBef>
+                <a:spcPts val="200"/>
+              </a:spcBef>
+            </a:pPr>
+            <a:r>
+              <a:rPr sz="1200">
+                <a:solidFill>
+                  <a:srgbClr val="1A1A2E"/>
+                </a:solidFill>
+              </a:rPr>
+              <a:t>    （Pofst 直前のみ電圧オフセットが自動計測される、操作不要）</a:t>
             </a:r>
           </a:p>
           <a:p>
@@ -3829,7 +3829,6 @@
           <a:lstStyle/>
           <a:p>
             <a:pPr algn="ctr"/>
-            <a:endParaRPr/>
           </a:p>
         </p:txBody>
       </p:sp>
@@ -4020,7 +4019,6 @@
           <a:lstStyle/>
           <a:p>
             <a:pPr algn="ctr"/>
-            <a:endParaRPr/>
           </a:p>
         </p:txBody>
       </p:sp>
@@ -4067,7 +4065,7 @@
 </file>
 
 <file path=ppt/slides/slide2.xml><?xml version="1.0" encoding="utf-8"?>
-<p:sld xmlns:a="http://schemas.openxmlformats.org/drawingml/2006/main" xmlns:r="http://schemas.openxmlformats.org/officeDocument/2006/relationships" xmlns:p="http://schemas.openxmlformats.org/presentationml/2006/main">
+<p:sld xmlns:a="http://schemas.openxmlformats.org/drawingml/2006/main" xmlns:p="http://schemas.openxmlformats.org/presentationml/2006/main" xmlns:r="http://schemas.openxmlformats.org/officeDocument/2006/relationships">
   <p:cSld>
     <p:spTree>
       <p:nvGrpSpPr>
@@ -4075,14 +4073,7 @@
         <p:cNvGrpSpPr/>
         <p:nvPr/>
       </p:nvGrpSpPr>
-      <p:grpSpPr>
-        <a:xfrm>
-          <a:off x="0" y="0"/>
-          <a:ext cx="0" cy="0"/>
-          <a:chOff x="0" y="0"/>
-          <a:chExt cx="0" cy="0"/>
-        </a:xfrm>
-      </p:grpSpPr>
+      <p:grpSpPr/>
       <p:sp>
         <p:nvSpPr>
           <p:cNvPr id="2" name="Rectangle 1"/>
@@ -4123,7 +4114,6 @@
           <a:lstStyle/>
           <a:p>
             <a:pPr algn="ctr"/>
-            <a:endParaRPr/>
           </a:p>
         </p:txBody>
       </p:sp>
@@ -4235,7 +4225,6 @@
           <a:lstStyle/>
           <a:p>
             <a:pPr algn="ctr"/>
-            <a:endParaRPr/>
           </a:p>
         </p:txBody>
       </p:sp>
@@ -4281,7 +4270,6 @@
           <a:lstStyle/>
           <a:p>
             <a:pPr algn="ctr"/>
-            <a:endParaRPr/>
           </a:p>
         </p:txBody>
       </p:sp>
@@ -4325,7 +4313,6 @@
           <a:lstStyle/>
           <a:p>
             <a:pPr algn="ctr"/>
-            <a:endParaRPr/>
           </a:p>
         </p:txBody>
       </p:sp>
@@ -4508,7 +4495,6 @@
           <a:lstStyle/>
           <a:p>
             <a:pPr algn="ctr"/>
-            <a:endParaRPr/>
           </a:p>
         </p:txBody>
       </p:sp>
@@ -4552,7 +4538,6 @@
           <a:lstStyle/>
           <a:p>
             <a:pPr algn="ctr"/>
-            <a:endParaRPr/>
           </a:p>
         </p:txBody>
       </p:sp>
@@ -4735,7 +4720,6 @@
           <a:lstStyle/>
           <a:p>
             <a:pPr algn="ctr"/>
-            <a:endParaRPr/>
           </a:p>
         </p:txBody>
       </p:sp>
@@ -4779,7 +4763,6 @@
           <a:lstStyle/>
           <a:p>
             <a:pPr algn="ctr"/>
-            <a:endParaRPr/>
           </a:p>
         </p:txBody>
       </p:sp>
@@ -4962,7 +4945,6 @@
           <a:lstStyle/>
           <a:p>
             <a:pPr algn="ctr"/>
-            <a:endParaRPr/>
           </a:p>
         </p:txBody>
       </p:sp>
@@ -5006,7 +4988,6 @@
           <a:lstStyle/>
           <a:p>
             <a:pPr algn="ctr"/>
-            <a:endParaRPr/>
           </a:p>
         </p:txBody>
       </p:sp>
@@ -5189,7 +5170,6 @@
           <a:lstStyle/>
           <a:p>
             <a:pPr algn="ctr"/>
-            <a:endParaRPr/>
           </a:p>
         </p:txBody>
       </p:sp>
@@ -5233,7 +5213,6 @@
           <a:lstStyle/>
           <a:p>
             <a:pPr algn="ctr"/>
-            <a:endParaRPr/>
           </a:p>
         </p:txBody>
       </p:sp>
@@ -5382,7 +5361,6 @@
           <a:lstStyle/>
           <a:p>
             <a:pPr algn="ctr"/>
-            <a:endParaRPr/>
           </a:p>
         </p:txBody>
       </p:sp>
@@ -5462,7 +5440,6 @@
           <a:lstStyle/>
           <a:p>
             <a:pPr algn="ctr"/>
-            <a:endParaRPr/>
           </a:p>
         </p:txBody>
       </p:sp>
@@ -5474,8 +5451,8 @@
         </p:nvSpPr>
         <p:spPr>
           <a:xfrm>
-            <a:off x="2103120" y="3246120"/>
-            <a:ext cx="1920240" cy="261610"/>
+            <a:off x="2103120" y="3273552"/>
+            <a:ext cx="1600200" cy="256032"/>
           </a:xfrm>
           <a:prstGeom prst="rect">
             <a:avLst/>
@@ -5490,26 +5467,13 @@
           <a:p>
             <a:pPr algn="l"/>
             <a:r>
-              <a:rPr sz="1100" b="1" i="0" dirty="0">
+              <a:rPr sz="1100" b="1" i="0">
                 <a:solidFill>
                   <a:srgbClr val="2E6EB4"/>
                 </a:solidFill>
               </a:rPr>
-              <a:t>  ⚙ </a:t>
-            </a:r>
-            <a:r>
-              <a:rPr sz="1100" b="1" i="0" dirty="0" err="1">
-                <a:solidFill>
-                  <a:srgbClr val="2E6EB4"/>
-                </a:solidFill>
-              </a:rPr>
-              <a:t>プログラム自動実行</a:t>
-            </a:r>
-            <a:endParaRPr sz="1100" b="1" i="0" dirty="0">
-              <a:solidFill>
-                <a:srgbClr val="2E6EB4"/>
-              </a:solidFill>
-            </a:endParaRPr>
+              <a:t>  ⚙ プログラム自動実行</a:t>
+            </a:r>
           </a:p>
         </p:txBody>
       </p:sp>
@@ -5555,7 +5519,6 @@
           <a:lstStyle/>
           <a:p>
             <a:pPr algn="ctr"/>
-            <a:endParaRPr/>
           </a:p>
         </p:txBody>
       </p:sp>
@@ -6248,7 +6211,7 @@
 </file>
 
 <file path=ppt/slides/slide3.xml><?xml version="1.0" encoding="utf-8"?>
-<p:sld xmlns:a="http://schemas.openxmlformats.org/drawingml/2006/main" xmlns:r="http://schemas.openxmlformats.org/officeDocument/2006/relationships" xmlns:p="http://schemas.openxmlformats.org/presentationml/2006/main">
+<p:sld xmlns:a="http://schemas.openxmlformats.org/drawingml/2006/main" xmlns:p="http://schemas.openxmlformats.org/presentationml/2006/main" xmlns:r="http://schemas.openxmlformats.org/officeDocument/2006/relationships">
   <p:cSld>
     <p:spTree>
       <p:nvGrpSpPr>
@@ -6256,14 +6219,7 @@
         <p:cNvGrpSpPr/>
         <p:nvPr/>
       </p:nvGrpSpPr>
-      <p:grpSpPr>
-        <a:xfrm>
-          <a:off x="0" y="0"/>
-          <a:ext cx="0" cy="0"/>
-          <a:chOff x="0" y="0"/>
-          <a:chExt cx="0" cy="0"/>
-        </a:xfrm>
-      </p:grpSpPr>
+      <p:grpSpPr/>
       <p:sp>
         <p:nvSpPr>
           <p:cNvPr id="2" name="Rectangle 1"/>
@@ -6304,7 +6260,6 @@
           <a:lstStyle/>
           <a:p>
             <a:pPr algn="ctr"/>
-            <a:endParaRPr/>
           </a:p>
         </p:txBody>
       </p:sp>
@@ -6416,7 +6371,6 @@
           <a:lstStyle/>
           <a:p>
             <a:pPr algn="ctr"/>
-            <a:endParaRPr/>
           </a:p>
         </p:txBody>
       </p:sp>
@@ -6460,7 +6414,6 @@
           <a:lstStyle/>
           <a:p>
             <a:pPr algn="ctr"/>
-            <a:endParaRPr/>
           </a:p>
         </p:txBody>
       </p:sp>
@@ -6540,7 +6493,6 @@
           <a:lstStyle/>
           <a:p>
             <a:pPr algn="ctr"/>
-            <a:endParaRPr/>
           </a:p>
         </p:txBody>
       </p:sp>
@@ -6611,7 +6563,7 @@
                   <a:srgbClr val="1A1A2E"/>
                 </a:solidFill>
               </a:rPr>
-              <a:t>output_dir   : データ保存先のルートフォルダ</a:t>
+              <a:t>output_dir    : データ保存先のルートフォルダ</a:t>
             </a:r>
           </a:p>
           <a:p>
@@ -6626,7 +6578,7 @@
                   <a:srgbClr val="1A1A2E"/>
                 </a:solidFill>
               </a:rPr>
-              <a:t>               例) "C:/Users/xxx/WindyData"</a:t>
+              <a:t>                例) "C:/Users/xxx/WindyData"</a:t>
             </a:r>
           </a:p>
           <a:p>
@@ -6686,7 +6638,7 @@
                   <a:srgbClr val="1A1A2E"/>
                 </a:solidFill>
               </a:rPr>
-              <a:t>python_exe    : Python の実行ファイルパス</a:t>
+              <a:t>python_exe    : 32bit Python（計測用）のパス</a:t>
             </a:r>
           </a:p>
           <a:p>
@@ -6695,11 +6647,29 @@
                 <a:spcPts val="200"/>
               </a:spcBef>
             </a:pPr>
-            <a:endParaRPr sz="1200">
-              <a:solidFill>
-                <a:srgbClr val="1A1A2E"/>
-              </a:solidFill>
-            </a:endParaRPr>
+            <a:r>
+              <a:rPr sz="1200">
+                <a:solidFill>
+                  <a:srgbClr val="1A1A2E"/>
+                </a:solidFill>
+              </a:rPr>
+              <a:t>python_exe_64 : 64bit Python（後処理用）のパス</a:t>
+            </a:r>
+          </a:p>
+          <a:p>
+            <a:pPr>
+              <a:spcBef>
+                <a:spcPts val="200"/>
+              </a:spcBef>
+            </a:pPr>
+            <a:r>
+              <a:rPr sz="1200">
+                <a:solidFill>
+                  <a:srgbClr val="1A1A2E"/>
+                </a:solidFill>
+              </a:rPr>
+              <a:t/>
+            </a:r>
           </a:p>
           <a:p>
             <a:pPr>
@@ -6760,7 +6730,6 @@
           <a:lstStyle/>
           <a:p>
             <a:pPr algn="ctr"/>
-            <a:endParaRPr/>
           </a:p>
         </p:txBody>
       </p:sp>
@@ -6855,11 +6824,14 @@
                 <a:spcPts val="200"/>
               </a:spcBef>
             </a:pPr>
-            <a:endParaRPr sz="1200">
-              <a:solidFill>
-                <a:srgbClr val="1A1A2E"/>
-              </a:solidFill>
-            </a:endParaRPr>
+            <a:r>
+              <a:rPr sz="1200">
+                <a:solidFill>
+                  <a:srgbClr val="1A1A2E"/>
+                </a:solidFill>
+              </a:rPr>
+              <a:t/>
+            </a:r>
           </a:p>
           <a:p>
             <a:pPr>
@@ -6897,11 +6869,14 @@
                 <a:spcPts val="200"/>
               </a:spcBef>
             </a:pPr>
-            <a:endParaRPr sz="1200">
-              <a:solidFill>
-                <a:srgbClr val="1A1A2E"/>
-              </a:solidFill>
-            </a:endParaRPr>
+            <a:r>
+              <a:rPr sz="1200">
+                <a:solidFill>
+                  <a:srgbClr val="1A1A2E"/>
+                </a:solidFill>
+              </a:rPr>
+              <a:t/>
+            </a:r>
           </a:p>
           <a:p>
             <a:pPr>
@@ -6977,7 +6952,6 @@
           <a:lstStyle/>
           <a:p>
             <a:pPr algn="ctr"/>
-            <a:endParaRPr/>
           </a:p>
         </p:txBody>
       </p:sp>
@@ -7043,100 +7017,12 @@
               </a:spcBef>
             </a:pPr>
             <a:r>
-              <a:rPr sz="1200" dirty="0" err="1">
+              <a:rPr sz="1200">
                 <a:solidFill>
                   <a:srgbClr val="1A1A2E"/>
                 </a:solidFill>
               </a:rPr>
-              <a:t>config.json</a:t>
-            </a:r>
-            <a:r>
-              <a:rPr sz="1200" dirty="0">
-                <a:solidFill>
-                  <a:srgbClr val="1A1A2E"/>
-                </a:solidFill>
-              </a:rPr>
-              <a:t> </a:t>
-            </a:r>
-            <a:r>
-              <a:rPr sz="1200" dirty="0" err="1">
-                <a:solidFill>
-                  <a:srgbClr val="1A1A2E"/>
-                </a:solidFill>
-              </a:rPr>
-              <a:t>の</a:t>
-            </a:r>
-            <a:r>
-              <a:rPr sz="1200" dirty="0">
-                <a:solidFill>
-                  <a:srgbClr val="1A1A2E"/>
-                </a:solidFill>
-              </a:rPr>
-              <a:t> </a:t>
-            </a:r>
-            <a:r>
-              <a:rPr sz="1200" dirty="0" err="1">
-                <a:solidFill>
-                  <a:srgbClr val="1A1A2E"/>
-                </a:solidFill>
-              </a:rPr>
-              <a:t>output_dir</a:t>
-            </a:r>
-            <a:r>
-              <a:rPr sz="1200" dirty="0">
-                <a:solidFill>
-                  <a:srgbClr val="1A1A2E"/>
-                </a:solidFill>
-              </a:rPr>
-              <a:t> </a:t>
-            </a:r>
-            <a:r>
-              <a:rPr sz="1200" dirty="0" err="1">
-                <a:solidFill>
-                  <a:srgbClr val="1A1A2E"/>
-                </a:solidFill>
-              </a:rPr>
-              <a:t>は</a:t>
-            </a:r>
-            <a:r>
-              <a:rPr sz="1200" dirty="0">
-                <a:solidFill>
-                  <a:srgbClr val="1A1A2E"/>
-                </a:solidFill>
-              </a:rPr>
-              <a:t> "</a:t>
-            </a:r>
-            <a:r>
-              <a:rPr sz="1200" dirty="0" err="1">
-                <a:solidFill>
-                  <a:srgbClr val="1A1A2E"/>
-                </a:solidFill>
-              </a:rPr>
-              <a:t>WindyData</a:t>
-            </a:r>
-            <a:r>
-              <a:rPr sz="1200" dirty="0">
-                <a:solidFill>
-                  <a:srgbClr val="1A1A2E"/>
-                </a:solidFill>
-              </a:rPr>
-              <a:t>" </a:t>
-            </a:r>
-            <a:r>
-              <a:rPr sz="1200" dirty="0" err="1">
-                <a:solidFill>
-                  <a:srgbClr val="1A1A2E"/>
-                </a:solidFill>
-              </a:rPr>
-              <a:t>のルートフォルダを指定（日付サブフォルダは含めない</a:t>
-            </a:r>
-            <a:r>
-              <a:rPr sz="1200" dirty="0">
-                <a:solidFill>
-                  <a:srgbClr val="1A1A2E"/>
-                </a:solidFill>
-              </a:rPr>
-              <a:t>）</a:t>
+              <a:t>config.json の output_dir は "WindyData" のルートフォルダを指定（日付サブフォルダは含めない）</a:t>
             </a:r>
           </a:p>
           <a:p>
@@ -7146,18 +7032,13 @@
               </a:spcBef>
             </a:pPr>
             <a:r>
-              <a:rPr sz="1200" dirty="0" err="1">
+              <a:rPr sz="1200">
                 <a:solidFill>
                   <a:srgbClr val="1A1A2E"/>
                 </a:solidFill>
               </a:rPr>
               <a:t>実験ごとに自動でサブフォルダが作成されます</a:t>
             </a:r>
-            <a:endParaRPr sz="1200" dirty="0">
-              <a:solidFill>
-                <a:srgbClr val="1A1A2E"/>
-              </a:solidFill>
-            </a:endParaRPr>
           </a:p>
         </p:txBody>
       </p:sp>
@@ -7170,7 +7051,7 @@
 </file>
 
 <file path=ppt/slides/slide4.xml><?xml version="1.0" encoding="utf-8"?>
-<p:sld xmlns:a="http://schemas.openxmlformats.org/drawingml/2006/main" xmlns:r="http://schemas.openxmlformats.org/officeDocument/2006/relationships" xmlns:p="http://schemas.openxmlformats.org/presentationml/2006/main">
+<p:sld xmlns:a="http://schemas.openxmlformats.org/drawingml/2006/main" xmlns:p="http://schemas.openxmlformats.org/presentationml/2006/main" xmlns:r="http://schemas.openxmlformats.org/officeDocument/2006/relationships">
   <p:cSld>
     <p:spTree>
       <p:nvGrpSpPr>
@@ -7178,14 +7059,7 @@
         <p:cNvGrpSpPr/>
         <p:nvPr/>
       </p:nvGrpSpPr>
-      <p:grpSpPr>
-        <a:xfrm>
-          <a:off x="0" y="0"/>
-          <a:ext cx="0" cy="0"/>
-          <a:chOff x="0" y="0"/>
-          <a:chExt cx="0" cy="0"/>
-        </a:xfrm>
-      </p:grpSpPr>
+      <p:grpSpPr/>
       <p:sp>
         <p:nvSpPr>
           <p:cNvPr id="2" name="Rectangle 1"/>
@@ -7226,7 +7100,6 @@
           <a:lstStyle/>
           <a:p>
             <a:pPr algn="ctr"/>
-            <a:endParaRPr/>
           </a:p>
         </p:txBody>
       </p:sp>
@@ -7338,7 +7211,6 @@
           <a:lstStyle/>
           <a:p>
             <a:pPr algn="ctr"/>
-            <a:endParaRPr/>
           </a:p>
         </p:txBody>
       </p:sp>
@@ -7382,7 +7254,6 @@
           <a:lstStyle/>
           <a:p>
             <a:pPr algn="ctr"/>
-            <a:endParaRPr/>
           </a:p>
         </p:txBody>
       </p:sp>
@@ -7460,7 +7331,6 @@
           <a:lstStyle/>
           <a:p>
             <a:pPr algn="ctr"/>
-            <a:endParaRPr/>
           </a:p>
         </p:txBody>
       </p:sp>
@@ -7538,7 +7408,6 @@
           <a:lstStyle/>
           <a:p>
             <a:pPr algn="ctr"/>
-            <a:endParaRPr/>
           </a:p>
         </p:txBody>
       </p:sp>
@@ -7652,7 +7521,6 @@
           <a:lstStyle/>
           <a:p>
             <a:pPr algn="ctr"/>
-            <a:endParaRPr/>
           </a:p>
         </p:txBody>
       </p:sp>
@@ -7766,7 +7634,6 @@
           <a:lstStyle/>
           <a:p>
             <a:pPr algn="ctr"/>
-            <a:endParaRPr/>
           </a:p>
         </p:txBody>
       </p:sp>
@@ -7912,7 +7779,6 @@
           <a:lstStyle/>
           <a:p>
             <a:pPr algn="ctr"/>
-            <a:endParaRPr/>
           </a:p>
         </p:txBody>
       </p:sp>
@@ -8026,7 +7892,6 @@
           <a:lstStyle/>
           <a:p>
             <a:pPr algn="ctr"/>
-            <a:endParaRPr/>
           </a:p>
         </p:txBody>
       </p:sp>
@@ -8142,7 +8007,6 @@
           <a:lstStyle/>
           <a:p>
             <a:pPr algn="ctr"/>
-            <a:endParaRPr/>
           </a:p>
         </p:txBody>
       </p:sp>
@@ -8288,7 +8152,6 @@
           <a:lstStyle/>
           <a:p>
             <a:pPr algn="ctr"/>
-            <a:endParaRPr/>
           </a:p>
         </p:txBody>
       </p:sp>
@@ -8402,7 +8265,6 @@
           <a:lstStyle/>
           <a:p>
             <a:pPr algn="ctr"/>
-            <a:endParaRPr/>
           </a:p>
         </p:txBody>
       </p:sp>
@@ -8516,7 +8378,6 @@
           <a:lstStyle/>
           <a:p>
             <a:pPr algn="ctr"/>
-            <a:endParaRPr/>
           </a:p>
         </p:txBody>
       </p:sp>
@@ -8662,7 +8523,6 @@
           <a:lstStyle/>
           <a:p>
             <a:pPr algn="ctr"/>
-            <a:endParaRPr/>
           </a:p>
         </p:txBody>
       </p:sp>
@@ -8776,7 +8636,6 @@
           <a:lstStyle/>
           <a:p>
             <a:pPr algn="ctr"/>
-            <a:endParaRPr/>
           </a:p>
         </p:txBody>
       </p:sp>
@@ -8890,7 +8749,6 @@
           <a:lstStyle/>
           <a:p>
             <a:pPr algn="ctr"/>
-            <a:endParaRPr/>
           </a:p>
         </p:txBody>
       </p:sp>
@@ -9005,7 +8863,7 @@
 </file>
 
 <file path=ppt/slides/slide5.xml><?xml version="1.0" encoding="utf-8"?>
-<p:sld xmlns:a="http://schemas.openxmlformats.org/drawingml/2006/main" xmlns:r="http://schemas.openxmlformats.org/officeDocument/2006/relationships" xmlns:p="http://schemas.openxmlformats.org/presentationml/2006/main">
+<p:sld xmlns:a="http://schemas.openxmlformats.org/drawingml/2006/main" xmlns:p="http://schemas.openxmlformats.org/presentationml/2006/main" xmlns:r="http://schemas.openxmlformats.org/officeDocument/2006/relationships">
   <p:cSld>
     <p:spTree>
       <p:nvGrpSpPr>
@@ -9013,14 +8871,7 @@
         <p:cNvGrpSpPr/>
         <p:nvPr/>
       </p:nvGrpSpPr>
-      <p:grpSpPr>
-        <a:xfrm>
-          <a:off x="0" y="0"/>
-          <a:ext cx="0" cy="0"/>
-          <a:chOff x="0" y="0"/>
-          <a:chExt cx="0" cy="0"/>
-        </a:xfrm>
-      </p:grpSpPr>
+      <p:grpSpPr/>
       <p:sp>
         <p:nvSpPr>
           <p:cNvPr id="2" name="Rectangle 1"/>
@@ -9061,7 +8912,6 @@
           <a:lstStyle/>
           <a:p>
             <a:pPr algn="ctr"/>
-            <a:endParaRPr/>
           </a:p>
         </p:txBody>
       </p:sp>
@@ -9173,7 +9023,6 @@
           <a:lstStyle/>
           <a:p>
             <a:pPr algn="ctr"/>
-            <a:endParaRPr/>
           </a:p>
         </p:txBody>
       </p:sp>
@@ -9217,7 +9066,6 @@
           <a:lstStyle/>
           <a:p>
             <a:pPr algn="ctr"/>
-            <a:endParaRPr/>
           </a:p>
         </p:txBody>
       </p:sp>
@@ -9297,7 +9145,6 @@
           <a:lstStyle/>
           <a:p>
             <a:pPr algn="ctr"/>
-            <a:endParaRPr/>
           </a:p>
         </p:txBody>
       </p:sp>
@@ -9475,7 +9322,6 @@
           <a:lstStyle/>
           <a:p>
             <a:pPr algn="ctr"/>
-            <a:endParaRPr/>
           </a:p>
         </p:txBody>
       </p:sp>
@@ -9534,9 +9380,7 @@
             <a:spAutoFit/>
           </a:bodyPr>
           <a:lstStyle/>
-          <a:p>
-            <a:endParaRPr/>
-          </a:p>
+          <a:p/>
         </p:txBody>
       </p:sp>
       <p:sp>
@@ -9888,7 +9732,7 @@
 </file>
 
 <file path=ppt/slides/slide6.xml><?xml version="1.0" encoding="utf-8"?>
-<p:sld xmlns:a="http://schemas.openxmlformats.org/drawingml/2006/main" xmlns:r="http://schemas.openxmlformats.org/officeDocument/2006/relationships" xmlns:p="http://schemas.openxmlformats.org/presentationml/2006/main">
+<p:sld xmlns:a="http://schemas.openxmlformats.org/drawingml/2006/main" xmlns:p="http://schemas.openxmlformats.org/presentationml/2006/main" xmlns:r="http://schemas.openxmlformats.org/officeDocument/2006/relationships">
   <p:cSld>
     <p:spTree>
       <p:nvGrpSpPr>
@@ -9896,14 +9740,7 @@
         <p:cNvGrpSpPr/>
         <p:nvPr/>
       </p:nvGrpSpPr>
-      <p:grpSpPr>
-        <a:xfrm>
-          <a:off x="0" y="0"/>
-          <a:ext cx="0" cy="0"/>
-          <a:chOff x="0" y="0"/>
-          <a:chExt cx="0" cy="0"/>
-        </a:xfrm>
-      </p:grpSpPr>
+      <p:grpSpPr/>
       <p:sp>
         <p:nvSpPr>
           <p:cNvPr id="2" name="Rectangle 1"/>
@@ -9944,7 +9781,6 @@
           <a:lstStyle/>
           <a:p>
             <a:pPr algn="ctr"/>
-            <a:endParaRPr/>
           </a:p>
         </p:txBody>
       </p:sp>
@@ -10056,7 +9892,6 @@
           <a:lstStyle/>
           <a:p>
             <a:pPr algn="ctr"/>
-            <a:endParaRPr/>
           </a:p>
         </p:txBody>
       </p:sp>
@@ -10100,7 +9935,6 @@
           <a:lstStyle/>
           <a:p>
             <a:pPr algn="ctr"/>
-            <a:endParaRPr/>
           </a:p>
         </p:txBody>
       </p:sp>
@@ -10180,7 +10014,6 @@
           <a:lstStyle/>
           <a:p>
             <a:pPr algn="ctr"/>
-            <a:endParaRPr/>
           </a:p>
         </p:txBody>
       </p:sp>
@@ -10239,9 +10072,7 @@
             <a:spAutoFit/>
           </a:bodyPr>
           <a:lstStyle/>
-          <a:p>
-            <a:endParaRPr/>
-          </a:p>
+          <a:p/>
         </p:txBody>
       </p:sp>
       <p:sp>
@@ -10284,7 +10115,6 @@
           <a:lstStyle/>
           <a:p>
             <a:pPr algn="ctr"/>
-            <a:endParaRPr/>
           </a:p>
         </p:txBody>
       </p:sp>
@@ -10351,7 +10181,7 @@
                   <a:srgbClr val="1A376C"/>
                 </a:solidFill>
               </a:rPr>
-              <a:t>電圧オフセット計測の確認</a:t>
+              <a:t>ブロワー停止の確認</a:t>
             </a:r>
           </a:p>
         </p:txBody>
@@ -10365,155 +10195,6 @@
         <p:spPr>
           <a:xfrm>
             <a:off x="548640" y="1636776"/>
-            <a:ext cx="5029200" cy="1828800"/>
-          </a:xfrm>
-          <a:prstGeom prst="rect">
-            <a:avLst/>
-          </a:prstGeom>
-          <a:noFill/>
-        </p:spPr>
-        <p:txBody>
-          <a:bodyPr wrap="square">
-            <a:spAutoFit/>
-          </a:bodyPr>
-          <a:lstStyle/>
-          <a:p>
-            <a:pPr algn="l"/>
-            <a:r>
-              <a:rPr sz="1100" b="0" i="0">
-                <a:solidFill>
-                  <a:srgbClr val="1A1A2E"/>
-                </a:solidFill>
-              </a:rPr>
-              <a:t>「差圧センサの電圧オフセットを
-今計測しますか？ [y/N]: 」
-→ y を入力：5秒間の無風電圧を自動計測
-→ N を入力：config.json の設定値を使用</a:t>
-            </a:r>
-          </a:p>
-        </p:txBody>
-      </p:sp>
-      <p:sp>
-        <p:nvSpPr>
-          <p:cNvPr id="15" name="Rectangle 14"/>
-          <p:cNvSpPr/>
-          <p:nvPr/>
-        </p:nvSpPr>
-        <p:spPr>
-          <a:xfrm>
-            <a:off x="502920" y="3584448"/>
-            <a:ext cx="640080" cy="256032"/>
-          </a:xfrm>
-          <a:prstGeom prst="rect">
-            <a:avLst/>
-          </a:prstGeom>
-          <a:solidFill>
-            <a:srgbClr val="217A3C"/>
-          </a:solidFill>
-          <a:ln>
-            <a:noFill/>
-          </a:ln>
-        </p:spPr>
-        <p:style>
-          <a:lnRef idx="1">
-            <a:schemeClr val="accent1"/>
-          </a:lnRef>
-          <a:fillRef idx="3">
-            <a:schemeClr val="accent1"/>
-          </a:fillRef>
-          <a:effectRef idx="2">
-            <a:schemeClr val="accent1"/>
-          </a:effectRef>
-          <a:fontRef idx="minor">
-            <a:schemeClr val="lt1"/>
-          </a:fontRef>
-        </p:style>
-        <p:txBody>
-          <a:bodyPr rtlCol="0" anchor="ctr"/>
-          <a:lstStyle/>
-          <a:p>
-            <a:pPr algn="ctr"/>
-            <a:endParaRPr/>
-          </a:p>
-        </p:txBody>
-      </p:sp>
-      <p:sp>
-        <p:nvSpPr>
-          <p:cNvPr id="16" name="TextBox 15"/>
-          <p:cNvSpPr txBox="1"/>
-          <p:nvPr/>
-        </p:nvSpPr>
-        <p:spPr>
-          <a:xfrm>
-            <a:off x="502920" y="3584448"/>
-            <a:ext cx="640080" cy="256032"/>
-          </a:xfrm>
-          <a:prstGeom prst="rect">
-            <a:avLst/>
-          </a:prstGeom>
-          <a:noFill/>
-        </p:spPr>
-        <p:txBody>
-          <a:bodyPr wrap="square">
-            <a:spAutoFit/>
-          </a:bodyPr>
-          <a:lstStyle/>
-          <a:p>
-            <a:pPr algn="ctr"/>
-            <a:r>
-              <a:rPr sz="1000" b="1" i="0">
-                <a:solidFill>
-                  <a:srgbClr val="FFFFFF"/>
-                </a:solidFill>
-              </a:rPr>
-              <a:t>Step 2</a:t>
-            </a:r>
-          </a:p>
-        </p:txBody>
-      </p:sp>
-      <p:sp>
-        <p:nvSpPr>
-          <p:cNvPr id="17" name="TextBox 16"/>
-          <p:cNvSpPr txBox="1"/>
-          <p:nvPr/>
-        </p:nvSpPr>
-        <p:spPr>
-          <a:xfrm>
-            <a:off x="1188720" y="3584448"/>
-            <a:ext cx="4389120" cy="256032"/>
-          </a:xfrm>
-          <a:prstGeom prst="rect">
-            <a:avLst/>
-          </a:prstGeom>
-          <a:noFill/>
-        </p:spPr>
-        <p:txBody>
-          <a:bodyPr wrap="square">
-            <a:spAutoFit/>
-          </a:bodyPr>
-          <a:lstStyle/>
-          <a:p>
-            <a:pPr algn="l"/>
-            <a:r>
-              <a:rPr sz="1200" b="1" i="0">
-                <a:solidFill>
-                  <a:srgbClr val="1A376C"/>
-                </a:solidFill>
-              </a:rPr>
-              <a:t>ブロワー停止の確認</a:t>
-            </a:r>
-          </a:p>
-        </p:txBody>
-      </p:sp>
-      <p:sp>
-        <p:nvSpPr>
-          <p:cNvPr id="18" name="TextBox 17"/>
-          <p:cNvSpPr txBox="1"/>
-          <p:nvPr/>
-        </p:nvSpPr>
-        <p:spPr>
-          <a:xfrm>
-            <a:off x="548640" y="3877056"/>
             <a:ext cx="5029200" cy="1828800"/>
           </a:xfrm>
           <a:prstGeom prst="rect">
@@ -10537,14 +10218,17 @@
               <a:t>「ブロワーが停止していることを
 確認してください。
 Enter を押してください: 」
-→ ブロワー停止を確認して Enter</a:t>
-            </a:r>
-          </a:p>
-        </p:txBody>
-      </p:sp>
-      <p:sp>
-        <p:nvSpPr>
-          <p:cNvPr id="19" name="Rectangle 18"/>
+→ ブロワー停止を確認して Enter
+※ Pofst の直前にのみ、差圧センサの
+   電圧オフセットが自動計測されます
+   （ユーザー操作不要）</a:t>
+            </a:r>
+          </a:p>
+        </p:txBody>
+      </p:sp>
+      <p:sp>
+        <p:nvSpPr>
+          <p:cNvPr id="15" name="Rectangle 14"/>
           <p:cNvSpPr/>
           <p:nvPr/>
         </p:nvSpPr>
@@ -10584,13 +10268,12 @@
           <a:lstStyle/>
           <a:p>
             <a:pPr algn="ctr"/>
-            <a:endParaRPr/>
-          </a:p>
-        </p:txBody>
-      </p:sp>
-      <p:sp>
-        <p:nvSpPr>
-          <p:cNvPr id="20" name="TextBox 19"/>
+          </a:p>
+        </p:txBody>
+      </p:sp>
+      <p:sp>
+        <p:nvSpPr>
+          <p:cNvPr id="16" name="TextBox 15"/>
           <p:cNvSpPr txBox="1"/>
           <p:nvPr/>
         </p:nvSpPr>
@@ -10624,7 +10307,7 @@
       </p:sp>
       <p:sp>
         <p:nvSpPr>
-          <p:cNvPr id="21" name="TextBox 20"/>
+          <p:cNvPr id="17" name="TextBox 16"/>
           <p:cNvSpPr txBox="1"/>
           <p:nvPr/>
         </p:nvSpPr>
@@ -10643,14 +10326,12 @@
             <a:spAutoFit/>
           </a:bodyPr>
           <a:lstStyle/>
-          <a:p>
-            <a:endParaRPr/>
-          </a:p>
-        </p:txBody>
-      </p:sp>
-      <p:sp>
-        <p:nvSpPr>
-          <p:cNvPr id="22" name="Rectangle 21"/>
+          <a:p/>
+        </p:txBody>
+      </p:sp>
+      <p:sp>
+        <p:nvSpPr>
+          <p:cNvPr id="18" name="Rectangle 17"/>
           <p:cNvSpPr/>
           <p:nvPr/>
         </p:nvSpPr>
@@ -10688,13 +10369,12 @@
           <a:lstStyle/>
           <a:p>
             <a:pPr algn="ctr"/>
-            <a:endParaRPr/>
-          </a:p>
-        </p:txBody>
-      </p:sp>
-      <p:sp>
-        <p:nvSpPr>
-          <p:cNvPr id="23" name="TextBox 22"/>
+          </a:p>
+        </p:txBody>
+      </p:sp>
+      <p:sp>
+        <p:nvSpPr>
+          <p:cNvPr id="19" name="TextBox 18"/>
           <p:cNvSpPr txBox="1"/>
           <p:nvPr/>
         </p:nvSpPr>
@@ -10728,7 +10408,7 @@
       </p:sp>
       <p:sp>
         <p:nvSpPr>
-          <p:cNvPr id="24" name="TextBox 23"/>
+          <p:cNvPr id="20" name="TextBox 19"/>
           <p:cNvSpPr txBox="1"/>
           <p:nvPr/>
         </p:nvSpPr>
@@ -10762,7 +10442,7 @@
       </p:sp>
       <p:sp>
         <p:nvSpPr>
-          <p:cNvPr id="25" name="TextBox 24"/>
+          <p:cNvPr id="21" name="TextBox 20"/>
           <p:cNvSpPr txBox="1"/>
           <p:nvPr/>
         </p:nvSpPr>
@@ -10801,14 +10481,14 @@
       </p:sp>
       <p:sp>
         <p:nvSpPr>
-          <p:cNvPr id="26" name="Rectangle 25"/>
+          <p:cNvPr id="22" name="Rectangle 21"/>
           <p:cNvSpPr/>
           <p:nvPr/>
         </p:nvSpPr>
         <p:spPr>
           <a:xfrm>
-            <a:off x="365760" y="6135624"/>
-            <a:ext cx="11430000" cy="667512"/>
+            <a:off x="365760" y="6263640"/>
+            <a:ext cx="11430000" cy="713232"/>
           </a:xfrm>
           <a:prstGeom prst="rect">
             <a:avLst/>
@@ -10841,19 +10521,18 @@
           <a:lstStyle/>
           <a:p>
             <a:pPr algn="ctr"/>
-            <a:endParaRPr/>
-          </a:p>
-        </p:txBody>
-      </p:sp>
-      <p:sp>
-        <p:nvSpPr>
-          <p:cNvPr id="27" name="TextBox 26"/>
-          <p:cNvSpPr txBox="1"/>
-          <p:nvPr/>
-        </p:nvSpPr>
-        <p:spPr>
-          <a:xfrm>
-            <a:off x="457200" y="6167628"/>
+          </a:p>
+        </p:txBody>
+      </p:sp>
+      <p:sp>
+        <p:nvSpPr>
+          <p:cNvPr id="23" name="TextBox 22"/>
+          <p:cNvSpPr txBox="1"/>
+          <p:nvPr/>
+        </p:nvSpPr>
+        <p:spPr>
+          <a:xfrm>
+            <a:off x="457200" y="6309360"/>
             <a:ext cx="11247120" cy="256032"/>
           </a:xfrm>
           <a:prstGeom prst="rect">
@@ -10869,41 +10548,25 @@
           <a:p>
             <a:pPr algn="l"/>
             <a:r>
-              <a:rPr sz="1100" b="1" i="0" dirty="0">
+              <a:rPr sz="1100" b="1" i="0">
                 <a:solidFill>
                   <a:srgbClr val="D96D00"/>
                 </a:solidFill>
               </a:rPr>
-              <a:t>⚠  </a:t>
-            </a:r>
-            <a:r>
-              <a:rPr sz="1100" b="1" i="0" dirty="0" err="1">
-                <a:solidFill>
-                  <a:srgbClr val="D96D00"/>
-                </a:solidFill>
-              </a:rPr>
-              <a:t>有風フェーズのブロワー操作は</a:t>
-            </a:r>
-            <a:r>
-              <a:rPr sz="1100" b="1" i="0" dirty="0">
-                <a:solidFill>
-                  <a:srgbClr val="D96D00"/>
-                </a:solidFill>
-              </a:rPr>
-              <a:t> 1回だけ（Pdata開始前のみ）</a:t>
-            </a:r>
-          </a:p>
-        </p:txBody>
-      </p:sp>
-      <p:sp>
-        <p:nvSpPr>
-          <p:cNvPr id="28" name="TextBox 27"/>
-          <p:cNvSpPr txBox="1"/>
-          <p:nvPr/>
-        </p:nvSpPr>
-        <p:spPr>
-          <a:xfrm>
-            <a:off x="502920" y="6400800"/>
+              <a:t>⚠  有風フェーズのブロワー操作は 1回だけ（Pdata開始前のみ）</a:t>
+            </a:r>
+          </a:p>
+        </p:txBody>
+      </p:sp>
+      <p:sp>
+        <p:nvSpPr>
+          <p:cNvPr id="24" name="TextBox 23"/>
+          <p:cNvSpPr txBox="1"/>
+          <p:nvPr/>
+        </p:nvSpPr>
+        <p:spPr>
+          <a:xfrm>
+            <a:off x="502920" y="6556248"/>
             <a:ext cx="11155680" cy="347472"/>
           </a:xfrm>
           <a:prstGeom prst="rect">
@@ -10923,28 +10586,12 @@
               </a:spcBef>
             </a:pPr>
             <a:r>
-              <a:rPr sz="1100" dirty="0">
+              <a:rPr sz="1100">
                 <a:solidFill>
                   <a:srgbClr val="1A1A2E"/>
                 </a:solidFill>
               </a:rPr>
-              <a:t>Mdata </a:t>
-            </a:r>
-            <a:r>
-              <a:rPr sz="1100" dirty="0" err="1">
-                <a:solidFill>
-                  <a:srgbClr val="1A1A2E"/>
-                </a:solidFill>
-              </a:rPr>
-              <a:t>はそのまま風を出し続けた状態で自動継続されます</a:t>
-            </a:r>
-            <a:r>
-              <a:rPr sz="1100" dirty="0">
-                <a:solidFill>
-                  <a:srgbClr val="1A1A2E"/>
-                </a:solidFill>
-              </a:rPr>
-              <a:t>。</a:t>
+              <a:t>Mdata はそのまま風を出し続けた状態で自動継続されます。</a:t>
             </a:r>
           </a:p>
           <a:p>
@@ -10954,28 +10601,12 @@
               </a:spcBef>
             </a:pPr>
             <a:r>
-              <a:rPr sz="1100" dirty="0">
+              <a:rPr sz="1100">
                 <a:solidFill>
                   <a:srgbClr val="1A1A2E"/>
                 </a:solidFill>
               </a:rPr>
-              <a:t>Mdata </a:t>
-            </a:r>
-            <a:r>
-              <a:rPr sz="1100" dirty="0" err="1">
-                <a:solidFill>
-                  <a:srgbClr val="1A1A2E"/>
-                </a:solidFill>
-              </a:rPr>
-              <a:t>終了後のブロワー停止はユーザーが手動で行ってください</a:t>
-            </a:r>
-            <a:r>
-              <a:rPr sz="1100" dirty="0">
-                <a:solidFill>
-                  <a:srgbClr val="1A1A2E"/>
-                </a:solidFill>
-              </a:rPr>
-              <a:t>。</a:t>
+              <a:t>Mdata 終了後のブロワー停止はユーザーが手動で行ってください。</a:t>
             </a:r>
           </a:p>
         </p:txBody>
@@ -10989,7 +10620,7 @@
 </file>
 
 <file path=ppt/slides/slide7.xml><?xml version="1.0" encoding="utf-8"?>
-<p:sld xmlns:a="http://schemas.openxmlformats.org/drawingml/2006/main" xmlns:r="http://schemas.openxmlformats.org/officeDocument/2006/relationships" xmlns:p="http://schemas.openxmlformats.org/presentationml/2006/main">
+<p:sld xmlns:a="http://schemas.openxmlformats.org/drawingml/2006/main" xmlns:p="http://schemas.openxmlformats.org/presentationml/2006/main" xmlns:r="http://schemas.openxmlformats.org/officeDocument/2006/relationships">
   <p:cSld>
     <p:spTree>
       <p:nvGrpSpPr>
@@ -10997,14 +10628,7 @@
         <p:cNvGrpSpPr/>
         <p:nvPr/>
       </p:nvGrpSpPr>
-      <p:grpSpPr>
-        <a:xfrm>
-          <a:off x="0" y="0"/>
-          <a:ext cx="0" cy="0"/>
-          <a:chOff x="0" y="0"/>
-          <a:chExt cx="0" cy="0"/>
-        </a:xfrm>
-      </p:grpSpPr>
+      <p:grpSpPr/>
       <p:sp>
         <p:nvSpPr>
           <p:cNvPr id="2" name="Rectangle 1"/>
@@ -11045,7 +10669,6 @@
           <a:lstStyle/>
           <a:p>
             <a:pPr algn="ctr"/>
-            <a:endParaRPr/>
           </a:p>
         </p:txBody>
       </p:sp>
@@ -11157,7 +10780,6 @@
           <a:lstStyle/>
           <a:p>
             <a:pPr algn="ctr"/>
-            <a:endParaRPr/>
           </a:p>
         </p:txBody>
       </p:sp>
@@ -11201,7 +10823,6 @@
           <a:lstStyle/>
           <a:p>
             <a:pPr algn="ctr"/>
-            <a:endParaRPr/>
           </a:p>
         </p:txBody>
       </p:sp>
@@ -11281,7 +10902,6 @@
           <a:lstStyle/>
           <a:p>
             <a:pPr algn="ctr"/>
-            <a:endParaRPr/>
           </a:p>
         </p:txBody>
       </p:sp>
@@ -11325,7 +10945,6 @@
           <a:lstStyle/>
           <a:p>
             <a:pPr algn="ctr"/>
-            <a:endParaRPr/>
           </a:p>
         </p:txBody>
       </p:sp>
@@ -11508,7 +11127,6 @@
           <a:lstStyle/>
           <a:p>
             <a:pPr algn="ctr"/>
-            <a:endParaRPr/>
           </a:p>
         </p:txBody>
       </p:sp>
@@ -11552,7 +11170,6 @@
           <a:lstStyle/>
           <a:p>
             <a:pPr algn="ctr"/>
-            <a:endParaRPr/>
           </a:p>
         </p:txBody>
       </p:sp>
@@ -11735,7 +11352,6 @@
           <a:lstStyle/>
           <a:p>
             <a:pPr algn="ctr"/>
-            <a:endParaRPr/>
           </a:p>
         </p:txBody>
       </p:sp>
@@ -11779,7 +11395,6 @@
           <a:lstStyle/>
           <a:p>
             <a:pPr algn="ctr"/>
-            <a:endParaRPr/>
           </a:p>
         </p:txBody>
       </p:sp>
@@ -11963,7 +11578,6 @@
           <a:lstStyle/>
           <a:p>
             <a:pPr algn="ctr"/>
-            <a:endParaRPr/>
           </a:p>
         </p:txBody>
       </p:sp>
@@ -12007,7 +11621,6 @@
           <a:lstStyle/>
           <a:p>
             <a:pPr algn="ctr"/>
-            <a:endParaRPr/>
           </a:p>
         </p:txBody>
       </p:sp>
@@ -12191,7 +11804,6 @@
           <a:lstStyle/>
           <a:p>
             <a:pPr algn="ctr"/>
-            <a:endParaRPr/>
           </a:p>
         </p:txBody>
       </p:sp>
@@ -12235,7 +11847,6 @@
           <a:lstStyle/>
           <a:p>
             <a:pPr algn="ctr"/>
-            <a:endParaRPr/>
           </a:p>
         </p:txBody>
       </p:sp>
@@ -12385,7 +11996,6 @@
           <a:lstStyle/>
           <a:p>
             <a:pPr algn="ctr"/>
-            <a:endParaRPr/>
           </a:p>
         </p:txBody>
       </p:sp>
@@ -12516,7 +12126,7 @@
                   <a:srgbClr val="1A1A2E"/>
                 </a:solidFill>
               </a:rPr>
-              <a:t>・「一時停止」ボタン（クリックで計測を一時停止・再開できる）</a:t>
+              <a:t>・「一時停止」ボタン → 押すと「再開」「停止」の2ボタンが現れる</a:t>
             </a:r>
           </a:p>
         </p:txBody>
@@ -12530,7 +12140,7 @@
 </file>
 
 <file path=ppt/slides/slide8.xml><?xml version="1.0" encoding="utf-8"?>
-<p:sld xmlns:a="http://schemas.openxmlformats.org/drawingml/2006/main" xmlns:r="http://schemas.openxmlformats.org/officeDocument/2006/relationships" xmlns:p="http://schemas.openxmlformats.org/presentationml/2006/main">
+<p:sld xmlns:a="http://schemas.openxmlformats.org/drawingml/2006/main" xmlns:p="http://schemas.openxmlformats.org/presentationml/2006/main" xmlns:r="http://schemas.openxmlformats.org/officeDocument/2006/relationships">
   <p:cSld>
     <p:spTree>
       <p:nvGrpSpPr>
@@ -12538,14 +12148,7 @@
         <p:cNvGrpSpPr/>
         <p:nvPr/>
       </p:nvGrpSpPr>
-      <p:grpSpPr>
-        <a:xfrm>
-          <a:off x="0" y="0"/>
-          <a:ext cx="0" cy="0"/>
-          <a:chOff x="0" y="0"/>
-          <a:chExt cx="0" cy="0"/>
-        </a:xfrm>
-      </p:grpSpPr>
+      <p:grpSpPr/>
       <p:sp>
         <p:nvSpPr>
           <p:cNvPr id="2" name="Rectangle 1"/>
@@ -12586,7 +12189,6 @@
           <a:lstStyle/>
           <a:p>
             <a:pPr algn="ctr"/>
-            <a:endParaRPr/>
           </a:p>
         </p:txBody>
       </p:sp>
@@ -12698,7 +12300,6 @@
           <a:lstStyle/>
           <a:p>
             <a:pPr algn="ctr"/>
-            <a:endParaRPr/>
           </a:p>
         </p:txBody>
       </p:sp>
@@ -12742,7 +12343,6 @@
           <a:lstStyle/>
           <a:p>
             <a:pPr algn="ctr"/>
-            <a:endParaRPr/>
           </a:p>
         </p:txBody>
       </p:sp>
@@ -12788,8 +12388,8 @@
         </p:nvSpPr>
         <p:spPr>
           <a:xfrm>
-            <a:off x="365760" y="822960"/>
-            <a:ext cx="11430000" cy="1143000"/>
+            <a:off x="365760" y="960120"/>
+            <a:ext cx="11430000" cy="1005840"/>
           </a:xfrm>
           <a:prstGeom prst="rect">
             <a:avLst/>
@@ -12822,7 +12422,6 @@
           <a:lstStyle/>
           <a:p>
             <a:pPr algn="ctr"/>
-            <a:endParaRPr/>
           </a:p>
         </p:txBody>
       </p:sp>
@@ -12834,7 +12433,7 @@
         </p:nvSpPr>
         <p:spPr>
           <a:xfrm>
-            <a:off x="548640" y="877824"/>
+            <a:off x="548640" y="987552"/>
             <a:ext cx="10972800" cy="320040"/>
           </a:xfrm>
           <a:prstGeom prst="rect">
@@ -12850,28 +12449,12 @@
           <a:p>
             <a:pPr algn="l"/>
             <a:r>
-              <a:rPr sz="1200" b="1" i="0" dirty="0">
+              <a:rPr sz="1200" b="1" i="0">
                 <a:solidFill>
                   <a:srgbClr val="C0392B"/>
                 </a:solidFill>
               </a:rPr>
-              <a:t>⚠  </a:t>
-            </a:r>
-            <a:r>
-              <a:rPr sz="1200" b="1" i="0" dirty="0" err="1">
-                <a:solidFill>
-                  <a:srgbClr val="C0392B"/>
-                </a:solidFill>
-              </a:rPr>
-              <a:t>エラー発生時にプログラムが表示するメッセージ（例</a:t>
-            </a:r>
-            <a:r>
-              <a:rPr sz="1200" b="1" i="0" dirty="0">
-                <a:solidFill>
-                  <a:srgbClr val="C0392B"/>
-                </a:solidFill>
-              </a:rPr>
-              <a:t>）</a:t>
+              <a:t>⚠  エラー発生時 または「停止」ボタン押下時にプログラムが表示するメッセージ（例）</a:t>
             </a:r>
           </a:p>
         </p:txBody>
@@ -12884,7 +12467,7 @@
         </p:nvSpPr>
         <p:spPr>
           <a:xfrm>
-            <a:off x="564494" y="1037844"/>
+            <a:off x="548640" y="1298448"/>
             <a:ext cx="10972800" cy="594360"/>
           </a:xfrm>
           <a:prstGeom prst="rect">
@@ -12900,206 +12483,17 @@
           <a:p>
             <a:pPr algn="l"/>
             <a:r>
-              <a:rPr sz="1050" b="0" i="0" dirty="0">
+              <a:rPr sz="1050" b="0" i="0">
                 <a:solidFill>
                   <a:srgbClr val="1A1A2E"/>
                 </a:solidFill>
               </a:rPr>
               <a:t>════════════════════════════════════════
-  [</a:t>
-            </a:r>
-            <a:r>
-              <a:rPr sz="1050" b="0" i="0" dirty="0" err="1">
-                <a:solidFill>
-                  <a:srgbClr val="1A1A2E"/>
-                </a:solidFill>
-              </a:rPr>
-              <a:t>エラ</a:t>
-            </a:r>
-            <a:r>
-              <a:rPr sz="1050" b="0" i="0" dirty="0">
-                <a:solidFill>
-                  <a:srgbClr val="1A1A2E"/>
-                </a:solidFill>
-              </a:rPr>
-              <a:t>ー] </a:t>
-            </a:r>
-            <a:r>
-              <a:rPr sz="1050" b="0" i="0" dirty="0" err="1">
-                <a:solidFill>
-                  <a:srgbClr val="1A1A2E"/>
-                </a:solidFill>
-              </a:rPr>
-              <a:t>計測点</a:t>
-            </a:r>
-            <a:r>
-              <a:rPr sz="1050" b="0" i="0" dirty="0">
-                <a:solidFill>
-                  <a:srgbClr val="1A1A2E"/>
-                </a:solidFill>
-              </a:rPr>
-              <a:t> 5/61 </a:t>
-            </a:r>
-            <a:r>
-              <a:rPr sz="1050" b="0" i="0" dirty="0" err="1">
-                <a:solidFill>
-                  <a:srgbClr val="1A1A2E"/>
-                </a:solidFill>
-              </a:rPr>
-              <a:t>でエラーが発生しました</a:t>
-            </a:r>
-            <a:r>
-              <a:rPr sz="1050" b="0" i="0" dirty="0">
-                <a:solidFill>
-                  <a:srgbClr val="1A1A2E"/>
-                </a:solidFill>
-              </a:rPr>
-              <a:t>
-  </a:t>
-            </a:r>
-            <a:r>
-              <a:rPr sz="1050" b="0" i="0" dirty="0" err="1">
-                <a:solidFill>
-                  <a:srgbClr val="1A1A2E"/>
-                </a:solidFill>
-              </a:rPr>
-              <a:t>フェーズ</a:t>
-            </a:r>
-            <a:r>
-              <a:rPr sz="1050" b="0" i="0" dirty="0">
-                <a:solidFill>
-                  <a:srgbClr val="1A1A2E"/>
-                </a:solidFill>
-              </a:rPr>
-              <a:t>: </a:t>
-            </a:r>
-            <a:r>
-              <a:rPr sz="1050" b="0" i="0" dirty="0" err="1">
-                <a:solidFill>
-                  <a:srgbClr val="1A1A2E"/>
-                </a:solidFill>
-              </a:rPr>
-              <a:t>Pdata</a:t>
-            </a:r>
-            <a:r>
-              <a:rPr sz="1050" b="0" i="0" dirty="0">
-                <a:solidFill>
-                  <a:srgbClr val="1A1A2E"/>
-                </a:solidFill>
-              </a:rPr>
-              <a:t>  </a:t>
-            </a:r>
-            <a:r>
-              <a:rPr sz="1050" b="0" i="0" dirty="0" err="1">
-                <a:solidFill>
-                  <a:srgbClr val="1A1A2E"/>
-                </a:solidFill>
-              </a:rPr>
-              <a:t>内容</a:t>
-            </a:r>
-            <a:r>
-              <a:rPr sz="1050" b="0" i="0" dirty="0">
-                <a:solidFill>
-                  <a:srgbClr val="1A1A2E"/>
-                </a:solidFill>
-              </a:rPr>
-              <a:t>: Timeout reading from serial port
+  [エラー] 計測点 5/61 でエラーが発生しました
+  フェーズ: Pdata  内容: Timeout reading from serial port
 ════════════════════════════════════════
-</a:t>
-            </a:r>
-            <a:r>
-              <a:rPr sz="1050" b="0" i="0" dirty="0" err="1">
-                <a:solidFill>
-                  <a:srgbClr val="1A1A2E"/>
-                </a:solidFill>
-              </a:rPr>
-              <a:t>どうしますか</a:t>
-            </a:r>
-            <a:r>
-              <a:rPr sz="1050" b="0" i="0" dirty="0">
-                <a:solidFill>
-                  <a:srgbClr val="1A1A2E"/>
-                </a:solidFill>
-              </a:rPr>
-              <a:t>？  R: </a:t>
-            </a:r>
-            <a:r>
-              <a:rPr sz="1050" b="0" i="0" dirty="0" err="1">
-                <a:solidFill>
-                  <a:srgbClr val="1A1A2E"/>
-                </a:solidFill>
-              </a:rPr>
-              <a:t>再試行</a:t>
-            </a:r>
-            <a:r>
-              <a:rPr sz="1050" b="0" i="0" dirty="0">
-                <a:solidFill>
-                  <a:srgbClr val="1A1A2E"/>
-                </a:solidFill>
-              </a:rPr>
-              <a:t>  S: </a:t>
-            </a:r>
-            <a:r>
-              <a:rPr sz="1050" b="0" i="0" dirty="0" err="1">
-                <a:solidFill>
-                  <a:srgbClr val="1A1A2E"/>
-                </a:solidFill>
-              </a:rPr>
-              <a:t>スキップ</a:t>
-            </a:r>
-            <a:r>
-              <a:rPr sz="1050" b="0" i="0" dirty="0">
-                <a:solidFill>
-                  <a:srgbClr val="1A1A2E"/>
-                </a:solidFill>
-              </a:rPr>
-              <a:t>  P: </a:t>
-            </a:r>
-            <a:r>
-              <a:rPr sz="1050" b="0" i="0" dirty="0" err="1">
-                <a:solidFill>
-                  <a:srgbClr val="1A1A2E"/>
-                </a:solidFill>
-              </a:rPr>
-              <a:t>フェーズ再開</a:t>
-            </a:r>
-            <a:r>
-              <a:rPr sz="1050" b="0" i="0" dirty="0">
-                <a:solidFill>
-                  <a:srgbClr val="1A1A2E"/>
-                </a:solidFill>
-              </a:rPr>
-              <a:t>  C: </a:t>
-            </a:r>
-            <a:r>
-              <a:rPr sz="1050" b="0" i="0" dirty="0" err="1">
-                <a:solidFill>
-                  <a:srgbClr val="1A1A2E"/>
-                </a:solidFill>
-              </a:rPr>
-              <a:t>フェーズ選択</a:t>
-            </a:r>
-            <a:r>
-              <a:rPr sz="1050" b="0" i="0" dirty="0">
-                <a:solidFill>
-                  <a:srgbClr val="1A1A2E"/>
-                </a:solidFill>
-              </a:rPr>
-              <a:t>  Q: </a:t>
-            </a:r>
-            <a:r>
-              <a:rPr sz="1050" b="0" i="0" dirty="0" err="1">
-                <a:solidFill>
-                  <a:srgbClr val="1A1A2E"/>
-                </a:solidFill>
-              </a:rPr>
-              <a:t>終了</a:t>
-            </a:r>
-            <a:endParaRPr sz="1050" b="0" i="0" dirty="0">
-              <a:solidFill>
-                <a:srgbClr val="1A1A2E"/>
-              </a:solidFill>
-            </a:endParaRPr>
+どうしますか？  R: 再試行  S: スキップ  P: フェーズ再開  C: フェーズ選択  Q: 終了</a:t>
+            </a:r>
           </a:p>
         </p:txBody>
       </p:sp>
@@ -13145,7 +12539,6 @@
           <a:lstStyle/>
           <a:p>
             <a:pPr algn="ctr"/>
-            <a:endParaRPr/>
           </a:p>
         </p:txBody>
       </p:sp>
@@ -13189,7 +12582,6 @@
           <a:lstStyle/>
           <a:p>
             <a:pPr algn="ctr"/>
-            <a:endParaRPr/>
           </a:p>
         </p:txBody>
       </p:sp>
@@ -13338,7 +12730,6 @@
           <a:lstStyle/>
           <a:p>
             <a:pPr algn="ctr"/>
-            <a:endParaRPr/>
           </a:p>
         </p:txBody>
       </p:sp>
@@ -13382,7 +12773,6 @@
           <a:lstStyle/>
           <a:p>
             <a:pPr algn="ctr"/>
-            <a:endParaRPr/>
           </a:p>
         </p:txBody>
       </p:sp>
@@ -13531,7 +12921,6 @@
           <a:lstStyle/>
           <a:p>
             <a:pPr algn="ctr"/>
-            <a:endParaRPr/>
           </a:p>
         </p:txBody>
       </p:sp>
@@ -13575,7 +12964,6 @@
           <a:lstStyle/>
           <a:p>
             <a:pPr algn="ctr"/>
-            <a:endParaRPr/>
           </a:p>
         </p:txBody>
       </p:sp>
@@ -13725,7 +13113,6 @@
           <a:lstStyle/>
           <a:p>
             <a:pPr algn="ctr"/>
-            <a:endParaRPr/>
           </a:p>
         </p:txBody>
       </p:sp>
@@ -13769,7 +13156,6 @@
           <a:lstStyle/>
           <a:p>
             <a:pPr algn="ctr"/>
-            <a:endParaRPr/>
           </a:p>
         </p:txBody>
       </p:sp>
@@ -13919,7 +13305,6 @@
           <a:lstStyle/>
           <a:p>
             <a:pPr algn="ctr"/>
-            <a:endParaRPr/>
           </a:p>
         </p:txBody>
       </p:sp>
@@ -13963,7 +13348,6 @@
           <a:lstStyle/>
           <a:p>
             <a:pPr algn="ctr"/>
-            <a:endParaRPr/>
           </a:p>
         </p:txBody>
       </p:sp>
@@ -14112,7 +13496,6 @@
           <a:lstStyle/>
           <a:p>
             <a:pPr algn="ctr"/>
-            <a:endParaRPr/>
           </a:p>
         </p:txBody>
       </p:sp>
@@ -14212,7 +13595,7 @@
 </file>
 
 <file path=ppt/slides/slide9.xml><?xml version="1.0" encoding="utf-8"?>
-<p:sld xmlns:a="http://schemas.openxmlformats.org/drawingml/2006/main" xmlns:r="http://schemas.openxmlformats.org/officeDocument/2006/relationships" xmlns:p="http://schemas.openxmlformats.org/presentationml/2006/main">
+<p:sld xmlns:a="http://schemas.openxmlformats.org/drawingml/2006/main" xmlns:p="http://schemas.openxmlformats.org/presentationml/2006/main" xmlns:r="http://schemas.openxmlformats.org/officeDocument/2006/relationships">
   <p:cSld>
     <p:spTree>
       <p:nvGrpSpPr>
@@ -14220,14 +13603,7 @@
         <p:cNvGrpSpPr/>
         <p:nvPr/>
       </p:nvGrpSpPr>
-      <p:grpSpPr>
-        <a:xfrm>
-          <a:off x="0" y="0"/>
-          <a:ext cx="0" cy="0"/>
-          <a:chOff x="0" y="0"/>
-          <a:chExt cx="0" cy="0"/>
-        </a:xfrm>
-      </p:grpSpPr>
+      <p:grpSpPr/>
       <p:sp>
         <p:nvSpPr>
           <p:cNvPr id="2" name="Rectangle 1"/>
@@ -14268,7 +13644,6 @@
           <a:lstStyle/>
           <a:p>
             <a:pPr algn="ctr"/>
-            <a:endParaRPr/>
           </a:p>
         </p:txBody>
       </p:sp>
@@ -14380,7 +13755,6 @@
           <a:lstStyle/>
           <a:p>
             <a:pPr algn="ctr"/>
-            <a:endParaRPr/>
           </a:p>
         </p:txBody>
       </p:sp>
@@ -14424,7 +13798,6 @@
           <a:lstStyle/>
           <a:p>
             <a:pPr algn="ctr"/>
-            <a:endParaRPr/>
           </a:p>
         </p:txBody>
       </p:sp>
@@ -14471,7 +13844,7 @@
         <p:spPr>
           <a:xfrm>
             <a:off x="365760" y="960120"/>
-            <a:ext cx="11430000" cy="1307592"/>
+            <a:ext cx="11430000" cy="1828800"/>
           </a:xfrm>
           <a:prstGeom prst="rect">
             <a:avLst/>
@@ -14504,7 +13877,6 @@
           <a:lstStyle/>
           <a:p>
             <a:pPr algn="ctr"/>
-            <a:endParaRPr/>
           </a:p>
         </p:txBody>
       </p:sp>
@@ -14570,82 +13942,13 @@
               </a:spcBef>
             </a:pPr>
             <a:r>
-              <a:rPr sz="1300" dirty="0" err="1">
+              <a:rPr sz="1300">
                 <a:solidFill>
                   <a:srgbClr val="1A1A2E"/>
                 </a:solidFill>
               </a:rPr>
-              <a:t>差圧電圧サマリ</a:t>
-            </a:r>
-            <a:r>
-              <a:rPr sz="1300" dirty="0">
-                <a:solidFill>
-                  <a:srgbClr val="1A1A2E"/>
-                </a:solidFill>
-              </a:rPr>
-              <a:t>ー（</a:t>
-            </a:r>
-            <a:r>
-              <a:rPr sz="1300" dirty="0" err="1">
-                <a:solidFill>
-                  <a:srgbClr val="1A1A2E"/>
-                </a:solidFill>
-              </a:rPr>
-              <a:t>Pdata</a:t>
-            </a:r>
-            <a:r>
-              <a:rPr sz="1300" dirty="0">
-                <a:solidFill>
-                  <a:srgbClr val="1A1A2E"/>
-                </a:solidFill>
-              </a:rPr>
-              <a:t> / </a:t>
-            </a:r>
-            <a:r>
-              <a:rPr sz="1300" dirty="0" err="1">
-                <a:solidFill>
-                  <a:srgbClr val="1A1A2E"/>
-                </a:solidFill>
-              </a:rPr>
-              <a:t>Mdata</a:t>
-            </a:r>
-            <a:r>
-              <a:rPr sz="1300" dirty="0">
-                <a:solidFill>
-                  <a:srgbClr val="1A1A2E"/>
-                </a:solidFill>
-              </a:rPr>
-              <a:t> </a:t>
-            </a:r>
-            <a:r>
-              <a:rPr sz="1300" dirty="0" err="1">
-                <a:solidFill>
-                  <a:srgbClr val="1A1A2E"/>
-                </a:solidFill>
-              </a:rPr>
-              <a:t>の</a:t>
-            </a:r>
-            <a:r>
-              <a:rPr sz="1300" dirty="0">
-                <a:solidFill>
-                  <a:srgbClr val="1A1A2E"/>
-                </a:solidFill>
-              </a:rPr>
-              <a:t> </a:t>
-            </a:r>
-            <a:r>
-              <a:rPr sz="1300" dirty="0" err="1">
-                <a:solidFill>
-                  <a:srgbClr val="1A1A2E"/>
-                </a:solidFill>
-              </a:rPr>
-              <a:t>volt_summary.csv）を読み込む</a:t>
-            </a:r>
-            <a:endParaRPr sz="1300" dirty="0">
-              <a:solidFill>
-                <a:srgbClr val="1A1A2E"/>
-              </a:solidFill>
-            </a:endParaRPr>
+              <a:t>【初回のみ】post_process/venv/ に 64bit Python 仮想環境を自動作成</a:t>
+            </a:r>
           </a:p>
           <a:p>
             <a:pPr>
@@ -14654,34 +13957,13 @@
               </a:spcBef>
             </a:pPr>
             <a:r>
-              <a:rPr sz="1300" dirty="0" err="1">
+              <a:rPr sz="1300">
                 <a:solidFill>
                   <a:srgbClr val="1A1A2E"/>
                 </a:solidFill>
               </a:rPr>
-              <a:t>experiment_log.json</a:t>
-            </a:r>
-            <a:r>
-              <a:rPr sz="1300" dirty="0">
-                <a:solidFill>
-                  <a:srgbClr val="1A1A2E"/>
-                </a:solidFill>
-              </a:rPr>
-              <a:t> </a:t>
-            </a:r>
-            <a:r>
-              <a:rPr sz="1300" dirty="0" err="1">
-                <a:solidFill>
-                  <a:srgbClr val="1A1A2E"/>
-                </a:solidFill>
-              </a:rPr>
-              <a:t>から気温・気圧・校正定数を取得</a:t>
-            </a:r>
-            <a:endParaRPr sz="1300" dirty="0">
-              <a:solidFill>
-                <a:srgbClr val="1A1A2E"/>
-              </a:solidFill>
-            </a:endParaRPr>
+              <a:t>          requirements.txt から pandas / numpy / scipy 等を pip install</a:t>
+            </a:r>
           </a:p>
           <a:p>
             <a:pPr>
@@ -14690,66 +13972,13 @@
               </a:spcBef>
             </a:pPr>
             <a:r>
-              <a:rPr sz="1300" dirty="0" err="1">
+              <a:rPr sz="1300">
                 <a:solidFill>
                   <a:srgbClr val="1A1A2E"/>
                 </a:solidFill>
               </a:rPr>
-              <a:t>各計測点の差圧電圧</a:t>
-            </a:r>
-            <a:r>
-              <a:rPr sz="1300" dirty="0">
-                <a:solidFill>
-                  <a:srgbClr val="1A1A2E"/>
-                </a:solidFill>
-              </a:rPr>
-              <a:t> → </a:t>
-            </a:r>
-            <a:r>
-              <a:rPr sz="1300" dirty="0" err="1">
-                <a:solidFill>
-                  <a:srgbClr val="1A1A2E"/>
-                </a:solidFill>
-              </a:rPr>
-              <a:t>動圧水柱高さ</a:t>
-            </a:r>
-            <a:r>
-              <a:rPr sz="1300" dirty="0">
-                <a:solidFill>
-                  <a:srgbClr val="1A1A2E"/>
-                </a:solidFill>
-              </a:rPr>
-              <a:t> → </a:t>
-            </a:r>
-            <a:r>
-              <a:rPr sz="1300" dirty="0" err="1">
-                <a:solidFill>
-                  <a:srgbClr val="1A1A2E"/>
-                </a:solidFill>
-              </a:rPr>
-              <a:t>風速</a:t>
-            </a:r>
-            <a:r>
-              <a:rPr sz="1300" dirty="0">
-                <a:solidFill>
-                  <a:srgbClr val="1A1A2E"/>
-                </a:solidFill>
-              </a:rPr>
-              <a:t> U [m/s] </a:t>
-            </a:r>
-            <a:r>
-              <a:rPr sz="1300" dirty="0" err="1">
-                <a:solidFill>
-                  <a:srgbClr val="1A1A2E"/>
-                </a:solidFill>
-              </a:rPr>
-              <a:t>を計算</a:t>
-            </a:r>
-            <a:endParaRPr sz="1300" dirty="0">
-              <a:solidFill>
-                <a:srgbClr val="1A1A2E"/>
-              </a:solidFill>
-            </a:endParaRPr>
+              <a:t>差圧電圧サマリー（Pdata / Mdata の volt_summary.csv）を読み込む</a:t>
+            </a:r>
           </a:p>
           <a:p>
             <a:pPr>
@@ -14758,34 +13987,43 @@
               </a:spcBef>
             </a:pPr>
             <a:r>
-              <a:rPr sz="1300" dirty="0" err="1">
+              <a:rPr sz="1300">
                 <a:solidFill>
                   <a:srgbClr val="1A1A2E"/>
                 </a:solidFill>
               </a:rPr>
-              <a:t>windspeed.csv</a:t>
-            </a:r>
-            <a:r>
-              <a:rPr sz="1300" dirty="0">
+              <a:t>experiment_log.json から気温・気圧・校正定数を取得</a:t>
+            </a:r>
+          </a:p>
+          <a:p>
+            <a:pPr>
+              <a:spcBef>
+                <a:spcPts val="200"/>
+              </a:spcBef>
+            </a:pPr>
+            <a:r>
+              <a:rPr sz="1300">
                 <a:solidFill>
                   <a:srgbClr val="1A1A2E"/>
                 </a:solidFill>
               </a:rPr>
-              <a:t> </a:t>
-            </a:r>
-            <a:r>
-              <a:rPr sz="1300" dirty="0" err="1">
+              <a:t>各計測点の差圧電圧 → 動圧水柱高さ → 風速 U [m/s] を計算</a:t>
+            </a:r>
+          </a:p>
+          <a:p>
+            <a:pPr>
+              <a:spcBef>
+                <a:spcPts val="200"/>
+              </a:spcBef>
+            </a:pPr>
+            <a:r>
+              <a:rPr sz="1300">
                 <a:solidFill>
                   <a:srgbClr val="1A1A2E"/>
                 </a:solidFill>
               </a:rPr>
-              <a:t>として実験フォルダに保存</a:t>
-            </a:r>
-            <a:endParaRPr sz="1300" dirty="0">
-              <a:solidFill>
-                <a:srgbClr val="1A1A2E"/>
-              </a:solidFill>
-            </a:endParaRPr>
+              <a:t>windspeed.csv として実験フォルダに保存</a:t>
+            </a:r>
           </a:p>
         </p:txBody>
       </p:sp>
@@ -14797,8 +14035,8 @@
         </p:nvSpPr>
         <p:spPr>
           <a:xfrm>
-            <a:off x="365760" y="2381299"/>
-            <a:ext cx="11430000" cy="1504901"/>
+            <a:off x="365760" y="2926080"/>
+            <a:ext cx="11430000" cy="1828800"/>
           </a:xfrm>
           <a:prstGeom prst="rect">
             <a:avLst/>
@@ -14831,7 +14069,6 @@
           <a:lstStyle/>
           <a:p>
             <a:pPr algn="ctr"/>
-            <a:endParaRPr/>
           </a:p>
         </p:txBody>
       </p:sp>
@@ -14843,7 +14080,7 @@
         </p:nvSpPr>
         <p:spPr>
           <a:xfrm>
-            <a:off x="457200" y="2459736"/>
+            <a:off x="457200" y="2971800"/>
             <a:ext cx="11247120" cy="256032"/>
           </a:xfrm>
           <a:prstGeom prst="rect">
@@ -14859,7 +14096,7 @@
           <a:p>
             <a:pPr algn="l"/>
             <a:r>
-              <a:rPr sz="1100" b="1" i="0" dirty="0">
+              <a:rPr sz="1100" b="1" i="0">
                 <a:solidFill>
                   <a:srgbClr val="2E6EB4"/>
                 </a:solidFill>
@@ -14877,7 +14114,7 @@
         </p:nvSpPr>
         <p:spPr>
           <a:xfrm>
-            <a:off x="502920" y="2807208"/>
+            <a:off x="502920" y="3218688"/>
             <a:ext cx="11155680" cy="1463040"/>
           </a:xfrm>
           <a:prstGeom prst="rect">
@@ -14897,66 +14134,13 @@
               </a:spcBef>
             </a:pPr>
             <a:r>
-              <a:rPr sz="1300" dirty="0" err="1">
+              <a:rPr sz="1300">
                 <a:solidFill>
                   <a:srgbClr val="1A1A2E"/>
                 </a:solidFill>
               </a:rPr>
-              <a:t>windspeed.csv</a:t>
-            </a:r>
-            <a:r>
-              <a:rPr sz="1300" dirty="0">
-                <a:solidFill>
-                  <a:srgbClr val="1A1A2E"/>
-                </a:solidFill>
-              </a:rPr>
-              <a:t> </a:t>
-            </a:r>
-            <a:r>
-              <a:rPr sz="1300" dirty="0" err="1">
-                <a:solidFill>
-                  <a:srgbClr val="1A1A2E"/>
-                </a:solidFill>
-              </a:rPr>
-              <a:t>と</a:t>
-            </a:r>
-            <a:r>
-              <a:rPr sz="1300" dirty="0">
-                <a:solidFill>
-                  <a:srgbClr val="1A1A2E"/>
-                </a:solidFill>
-              </a:rPr>
-              <a:t> data/ </a:t>
-            </a:r>
-            <a:r>
-              <a:rPr sz="1300" dirty="0" err="1">
-                <a:solidFill>
-                  <a:srgbClr val="1A1A2E"/>
-                </a:solidFill>
-              </a:rPr>
-              <a:t>内の</a:t>
-            </a:r>
-            <a:r>
-              <a:rPr sz="1300" dirty="0">
-                <a:solidFill>
-                  <a:srgbClr val="1A1A2E"/>
-                </a:solidFill>
-              </a:rPr>
-              <a:t> 6軸センサ CSV </a:t>
-            </a:r>
-            <a:r>
-              <a:rPr sz="1300" dirty="0" err="1">
-                <a:solidFill>
-                  <a:srgbClr val="1A1A2E"/>
-                </a:solidFill>
-              </a:rPr>
-              <a:t>を読み込む</a:t>
-            </a:r>
-            <a:endParaRPr sz="1300" dirty="0">
-              <a:solidFill>
-                <a:srgbClr val="1A1A2E"/>
-              </a:solidFill>
-            </a:endParaRPr>
+              <a:t>windspeed.csv と data/ 内の 6軸センサ CSV を読み込む</a:t>
+            </a:r>
           </a:p>
           <a:p>
             <a:pPr>
@@ -14965,50 +14149,13 @@
               </a:spcBef>
             </a:pPr>
             <a:r>
-              <a:rPr sz="1300" dirty="0" err="1">
+              <a:rPr sz="1300">
                 <a:solidFill>
                   <a:srgbClr val="1A1A2E"/>
                 </a:solidFill>
               </a:rPr>
-              <a:t>オフセット補正（Pofst</a:t>
-            </a:r>
-            <a:r>
-              <a:rPr sz="1300" dirty="0">
-                <a:solidFill>
-                  <a:srgbClr val="1A1A2E"/>
-                </a:solidFill>
-              </a:rPr>
-              <a:t> / </a:t>
-            </a:r>
-            <a:r>
-              <a:rPr sz="1300" dirty="0" err="1">
-                <a:solidFill>
-                  <a:srgbClr val="1A1A2E"/>
-                </a:solidFill>
-              </a:rPr>
-              <a:t>Mofst</a:t>
-            </a:r>
-            <a:r>
-              <a:rPr sz="1300" dirty="0">
-                <a:solidFill>
-                  <a:srgbClr val="1A1A2E"/>
-                </a:solidFill>
-              </a:rPr>
-              <a:t> </a:t>
-            </a:r>
-            <a:r>
-              <a:rPr sz="1300" dirty="0" err="1">
-                <a:solidFill>
-                  <a:srgbClr val="1A1A2E"/>
-                </a:solidFill>
-              </a:rPr>
-              <a:t>データを差し引き）を実施</a:t>
-            </a:r>
-            <a:endParaRPr sz="1300" dirty="0">
-              <a:solidFill>
-                <a:srgbClr val="1A1A2E"/>
-              </a:solidFill>
-            </a:endParaRPr>
+              <a:t>オフセット補正（Pofst / Mofst データを差し引き）を実施</a:t>
+            </a:r>
           </a:p>
           <a:p>
             <a:pPr>
@@ -15017,26 +14164,13 @@
               </a:spcBef>
             </a:pPr>
             <a:r>
-              <a:rPr sz="1300" dirty="0">
+              <a:rPr sz="1300">
                 <a:solidFill>
                   <a:srgbClr val="1A1A2E"/>
                 </a:solidFill>
               </a:rPr>
-              <a:t>Cl, Cd, Cm </a:t>
-            </a:r>
-            <a:r>
-              <a:rPr sz="1300" dirty="0" err="1">
-                <a:solidFill>
-                  <a:srgbClr val="1A1A2E"/>
-                </a:solidFill>
-              </a:rPr>
-              <a:t>などの空力係数を迎角ごとに計算</a:t>
-            </a:r>
-            <a:endParaRPr sz="1300" dirty="0">
-              <a:solidFill>
-                <a:srgbClr val="1A1A2E"/>
-              </a:solidFill>
-            </a:endParaRPr>
+              <a:t>Cl, Cd, Cm などの空力係数を迎角ごとに計算</a:t>
+            </a:r>
           </a:p>
           <a:p>
             <a:pPr>
@@ -15045,18 +14179,13 @@
               </a:spcBef>
             </a:pPr>
             <a:r>
-              <a:rPr sz="1300" dirty="0" err="1">
+              <a:rPr sz="1300">
                 <a:solidFill>
                   <a:srgbClr val="1A1A2E"/>
                 </a:solidFill>
               </a:rPr>
               <a:t>グラフ（PNG）を実験フォルダに自動保存</a:t>
             </a:r>
-            <a:endParaRPr sz="1300" dirty="0">
-              <a:solidFill>
-                <a:srgbClr val="1A1A2E"/>
-              </a:solidFill>
-            </a:endParaRPr>
           </a:p>
         </p:txBody>
       </p:sp>
@@ -15068,7 +14197,7 @@
         </p:nvSpPr>
         <p:spPr>
           <a:xfrm>
-            <a:off x="379412" y="4059936"/>
+            <a:off x="365760" y="4892040"/>
             <a:ext cx="11430000" cy="1508760"/>
           </a:xfrm>
           <a:prstGeom prst="rect">
@@ -15102,7 +14231,6 @@
           <a:lstStyle/>
           <a:p>
             <a:pPr algn="ctr"/>
-            <a:endParaRPr/>
           </a:p>
         </p:txBody>
       </p:sp>
@@ -15114,7 +14242,7 @@
         </p:nvSpPr>
         <p:spPr>
           <a:xfrm>
-            <a:off x="457200" y="4142232"/>
+            <a:off x="457200" y="4937760"/>
             <a:ext cx="11247120" cy="256032"/>
           </a:xfrm>
           <a:prstGeom prst="rect">
@@ -15130,26 +14258,13 @@
           <a:p>
             <a:pPr algn="l"/>
             <a:r>
-              <a:rPr sz="1100" b="1" i="0" dirty="0">
+              <a:rPr sz="1100" b="1" i="0">
                 <a:solidFill>
                   <a:srgbClr val="217A3C"/>
                 </a:solidFill>
               </a:rPr>
-              <a:t>👤 </a:t>
-            </a:r>
-            <a:r>
-              <a:rPr sz="1100" b="1" i="0" dirty="0" err="1">
-                <a:solidFill>
-                  <a:srgbClr val="217A3C"/>
-                </a:solidFill>
-              </a:rPr>
-              <a:t>後処理完了後にユーザーがすること</a:t>
-            </a:r>
-            <a:endParaRPr sz="1100" b="1" i="0" dirty="0">
-              <a:solidFill>
-                <a:srgbClr val="217A3C"/>
-              </a:solidFill>
-            </a:endParaRPr>
+              <a:t>👤 後処理完了後にユーザーがすること</a:t>
+            </a:r>
           </a:p>
         </p:txBody>
       </p:sp>
@@ -15161,7 +14276,7 @@
         </p:nvSpPr>
         <p:spPr>
           <a:xfrm>
-            <a:off x="548640" y="4544568"/>
+            <a:off x="502920" y="5184648"/>
             <a:ext cx="11155680" cy="1143000"/>
           </a:xfrm>
           <a:prstGeom prst="rect">
@@ -15181,106 +14296,13 @@
               </a:spcBef>
             </a:pPr>
             <a:r>
-              <a:rPr sz="1300" dirty="0">
+              <a:rPr sz="1300">
                 <a:solidFill>
                   <a:srgbClr val="1A1A2E"/>
                 </a:solidFill>
               </a:rPr>
-              <a:t>① </a:t>
-            </a:r>
-            <a:r>
-              <a:rPr sz="1300" dirty="0" err="1">
-                <a:solidFill>
-                  <a:srgbClr val="1A1A2E"/>
-                </a:solidFill>
-              </a:rPr>
-              <a:t>WindyData</a:t>
-            </a:r>
-            <a:r>
-              <a:rPr sz="1300" dirty="0">
-                <a:solidFill>
-                  <a:srgbClr val="1A1A2E"/>
-                </a:solidFill>
-              </a:rPr>
-              <a:t>/&lt;</a:t>
-            </a:r>
-            <a:r>
-              <a:rPr sz="1300" dirty="0" err="1">
-                <a:solidFill>
-                  <a:srgbClr val="1A1A2E"/>
-                </a:solidFill>
-              </a:rPr>
-              <a:t>実験フォルダ</a:t>
-            </a:r>
-            <a:r>
-              <a:rPr sz="1300" dirty="0">
-                <a:solidFill>
-                  <a:srgbClr val="1A1A2E"/>
-                </a:solidFill>
-              </a:rPr>
-              <a:t>&gt;/ </a:t>
-            </a:r>
-            <a:r>
-              <a:rPr sz="1300" dirty="0" err="1">
-                <a:solidFill>
-                  <a:srgbClr val="1A1A2E"/>
-                </a:solidFill>
-              </a:rPr>
-              <a:t>を開いて</a:t>
-            </a:r>
-            <a:r>
-              <a:rPr sz="1300" dirty="0">
-                <a:solidFill>
-                  <a:srgbClr val="1A1A2E"/>
-                </a:solidFill>
-              </a:rPr>
-              <a:t> </a:t>
-            </a:r>
-            <a:r>
-              <a:rPr sz="1300" dirty="0" err="1">
-                <a:solidFill>
-                  <a:srgbClr val="1A1A2E"/>
-                </a:solidFill>
-              </a:rPr>
-              <a:t>Cl.png</a:t>
-            </a:r>
-            <a:r>
-              <a:rPr sz="1300" dirty="0">
-                <a:solidFill>
-                  <a:srgbClr val="1A1A2E"/>
-                </a:solidFill>
-              </a:rPr>
-              <a:t> / </a:t>
-            </a:r>
-            <a:r>
-              <a:rPr sz="1300" dirty="0" err="1">
-                <a:solidFill>
-                  <a:srgbClr val="1A1A2E"/>
-                </a:solidFill>
-              </a:rPr>
-              <a:t>Cd.png</a:t>
-            </a:r>
-            <a:r>
-              <a:rPr sz="1300" dirty="0">
-                <a:solidFill>
-                  <a:srgbClr val="1A1A2E"/>
-                </a:solidFill>
-              </a:rPr>
-              <a:t> </a:t>
-            </a:r>
-            <a:r>
-              <a:rPr sz="1300" dirty="0" err="1">
-                <a:solidFill>
-                  <a:srgbClr val="1A1A2E"/>
-                </a:solidFill>
-              </a:rPr>
-              <a:t>などを確認</a:t>
-            </a:r>
-            <a:endParaRPr sz="1300" dirty="0">
-              <a:solidFill>
-                <a:srgbClr val="1A1A2E"/>
-              </a:solidFill>
-            </a:endParaRPr>
+              <a:t>① WindyData/&lt;実験フォルダ&gt;/ を開いて Cl.png / Cd.png などを確認</a:t>
+            </a:r>
           </a:p>
           <a:p>
             <a:pPr>
@@ -15289,28 +14311,12 @@
               </a:spcBef>
             </a:pPr>
             <a:r>
-              <a:rPr sz="1300" dirty="0">
+              <a:rPr sz="1300">
                 <a:solidFill>
                   <a:srgbClr val="1A1A2E"/>
                 </a:solidFill>
               </a:rPr>
-              <a:t>② </a:t>
-            </a:r>
-            <a:r>
-              <a:rPr sz="1300" dirty="0" err="1">
-                <a:solidFill>
-                  <a:srgbClr val="1A1A2E"/>
-                </a:solidFill>
-              </a:rPr>
-              <a:t>ブロワーを停止する（有風実験の場合</a:t>
-            </a:r>
-            <a:r>
-              <a:rPr sz="1300" dirty="0">
-                <a:solidFill>
-                  <a:srgbClr val="1A1A2E"/>
-                </a:solidFill>
-              </a:rPr>
-              <a:t>）</a:t>
+              <a:t>② ブロワーを停止する（有風実験の場合）</a:t>
             </a:r>
           </a:p>
           <a:p>
@@ -15320,26 +14326,13 @@
               </a:spcBef>
             </a:pPr>
             <a:r>
-              <a:rPr sz="1300" dirty="0">
+              <a:rPr sz="1300">
                 <a:solidFill>
                   <a:srgbClr val="1A1A2E"/>
                 </a:solidFill>
               </a:rPr>
-              <a:t>③ 迎角ステージは自動でホームポジション（0°）</a:t>
-            </a:r>
-            <a:r>
-              <a:rPr sz="1300" dirty="0" err="1">
-                <a:solidFill>
-                  <a:srgbClr val="1A1A2E"/>
-                </a:solidFill>
-              </a:rPr>
-              <a:t>に戻っています</a:t>
-            </a:r>
-            <a:endParaRPr sz="1300" dirty="0">
-              <a:solidFill>
-                <a:srgbClr val="1A1A2E"/>
-              </a:solidFill>
-            </a:endParaRPr>
+              <a:t>③ 迎角ステージは自動でホームポジション（0°）に戻っています</a:t>
+            </a:r>
           </a:p>
         </p:txBody>
       </p:sp>
@@ -15351,7 +14344,7 @@
         </p:nvSpPr>
         <p:spPr>
           <a:xfrm>
-            <a:off x="379412" y="5729725"/>
+            <a:off x="365760" y="6492240"/>
             <a:ext cx="11430000" cy="777240"/>
           </a:xfrm>
           <a:prstGeom prst="rect">
@@ -15385,7 +14378,6 @@
           <a:lstStyle/>
           <a:p>
             <a:pPr algn="ctr"/>
-            <a:endParaRPr/>
           </a:p>
         </p:txBody>
       </p:sp>
@@ -15397,7 +14389,7 @@
         </p:nvSpPr>
         <p:spPr>
           <a:xfrm>
-            <a:off x="457200" y="5728716"/>
+            <a:off x="457200" y="6537960"/>
             <a:ext cx="11247120" cy="256032"/>
           </a:xfrm>
           <a:prstGeom prst="rect">
@@ -15413,26 +14405,13 @@
           <a:p>
             <a:pPr algn="l"/>
             <a:r>
-              <a:rPr sz="1100" b="1" i="0" dirty="0">
+              <a:rPr sz="1100" b="1" i="0">
                 <a:solidFill>
                   <a:srgbClr val="D96D00"/>
                 </a:solidFill>
               </a:rPr>
-              <a:t>⚠  </a:t>
-            </a:r>
-            <a:r>
-              <a:rPr sz="1100" b="1" i="0" dirty="0" err="1">
-                <a:solidFill>
-                  <a:srgbClr val="D96D00"/>
-                </a:solidFill>
-              </a:rPr>
-              <a:t>後処理がスキップされるケース</a:t>
-            </a:r>
-            <a:endParaRPr sz="1100" b="1" i="0" dirty="0">
-              <a:solidFill>
-                <a:srgbClr val="D96D00"/>
-              </a:solidFill>
-            </a:endParaRPr>
+              <a:t>⚠  後処理がスキップされるケース</a:t>
+            </a:r>
           </a:p>
         </p:txBody>
       </p:sp>
@@ -15444,7 +14423,7 @@
         </p:nvSpPr>
         <p:spPr>
           <a:xfrm>
-            <a:off x="502920" y="6025896"/>
+            <a:off x="502920" y="6784848"/>
             <a:ext cx="11155680" cy="411480"/>
           </a:xfrm>
           <a:prstGeom prst="rect">
@@ -15464,42 +14443,13 @@
               </a:spcBef>
             </a:pPr>
             <a:r>
-              <a:rPr sz="1100" dirty="0">
+              <a:rPr sz="1100">
                 <a:solidFill>
                   <a:srgbClr val="1A1A2E"/>
                 </a:solidFill>
               </a:rPr>
-              <a:t>4フェーズのいずれか </a:t>
-            </a:r>
-            <a:r>
-              <a:rPr sz="1100" dirty="0" err="1">
-                <a:solidFill>
-                  <a:srgbClr val="1A1A2E"/>
-                </a:solidFill>
-              </a:rPr>
-              <a:t>volt_summary.csv</a:t>
-            </a:r>
-            <a:r>
-              <a:rPr sz="1100" dirty="0">
-                <a:solidFill>
-                  <a:srgbClr val="1A1A2E"/>
-                </a:solidFill>
-              </a:rPr>
-              <a:t> </a:t>
-            </a:r>
-            <a:r>
-              <a:rPr sz="1100" dirty="0" err="1">
-                <a:solidFill>
-                  <a:srgbClr val="1A1A2E"/>
-                </a:solidFill>
-              </a:rPr>
-              <a:t>が欠けている場合は後処理を自動スキップ</a:t>
-            </a:r>
-            <a:endParaRPr sz="1100" dirty="0">
-              <a:solidFill>
-                <a:srgbClr val="1A1A2E"/>
-              </a:solidFill>
-            </a:endParaRPr>
+              <a:t>4フェーズのいずれか volt_summary.csv が欠けている場合は後処理を自動スキップ</a:t>
+            </a:r>
           </a:p>
           <a:p>
             <a:pPr>
@@ -15508,26 +14458,13 @@
               </a:spcBef>
             </a:pPr>
             <a:r>
-              <a:rPr sz="1100" dirty="0">
+              <a:rPr sz="1100">
                 <a:solidFill>
                   <a:srgbClr val="1A1A2E"/>
                 </a:solidFill>
               </a:rPr>
-              <a:t>→ </a:t>
-            </a:r>
-            <a:r>
-              <a:rPr sz="1100" dirty="0" err="1">
-                <a:solidFill>
-                  <a:srgbClr val="1A1A2E"/>
-                </a:solidFill>
-              </a:rPr>
-              <a:t>欠けているフェーズを再実行するか、手動で後処理スクリプトを実行してください</a:t>
-            </a:r>
-            <a:endParaRPr sz="1100" dirty="0">
-              <a:solidFill>
-                <a:srgbClr val="1A1A2E"/>
-              </a:solidFill>
-            </a:endParaRPr>
+              <a:t>→ 欠けているフェーズを再実行するか、手動で後処理スクリプトを実行してください</a:t>
+            </a:r>
           </a:p>
         </p:txBody>
       </p:sp>

--- a/Windy_操作マニュアル.pptx
+++ b/Windy_操作マニュアル.pptx
@@ -5,18 +5,18 @@
     <p:sldMasterId id="2147483648" r:id="rId1"/>
   </p:sldMasterIdLst>
   <p:sldIdLst>
-    <p:sldId id="256" r:id="rId7"/>
-    <p:sldId id="257" r:id="rId8"/>
-    <p:sldId id="258" r:id="rId9"/>
-    <p:sldId id="259" r:id="rId10"/>
-    <p:sldId id="260" r:id="rId11"/>
-    <p:sldId id="261" r:id="rId12"/>
-    <p:sldId id="262" r:id="rId13"/>
-    <p:sldId id="263" r:id="rId14"/>
-    <p:sldId id="264" r:id="rId15"/>
-    <p:sldId id="265" r:id="rId16"/>
+    <p:sldId id="256" r:id="rId2"/>
+    <p:sldId id="257" r:id="rId3"/>
+    <p:sldId id="258" r:id="rId4"/>
+    <p:sldId id="259" r:id="rId5"/>
+    <p:sldId id="260" r:id="rId6"/>
+    <p:sldId id="261" r:id="rId7"/>
+    <p:sldId id="262" r:id="rId8"/>
+    <p:sldId id="263" r:id="rId9"/>
+    <p:sldId id="264" r:id="rId10"/>
+    <p:sldId id="265" r:id="rId11"/>
   </p:sldIdLst>
-  <p:sldSz cx="12188952" cy="6858000" type="screen4x3"/>
+  <p:sldSz cx="12188825" cy="6858000"/>
   <p:notesSz cx="6858000" cy="9144000"/>
   <p:defaultTextStyle>
     <a:defPPr>
@@ -113,6 +113,22 @@
       </a:defRPr>
     </a:lvl9pPr>
   </p:defaultTextStyle>
+  <p:extLst>
+    <p:ext uri="{EFAFB233-063F-42B5-8137-9DF3F51BA10A}">
+      <p15:sldGuideLst xmlns:p15="http://schemas.microsoft.com/office/powerpoint/2012/main">
+        <p15:guide id="1" orient="horz" pos="2160">
+          <p15:clr>
+            <a:srgbClr val="A4A3A4"/>
+          </p15:clr>
+        </p15:guide>
+        <p15:guide id="2" pos="2880">
+          <p15:clr>
+            <a:srgbClr val="A4A3A4"/>
+          </p15:clr>
+        </p15:guide>
+      </p15:sldGuideLst>
+    </p:ext>
+  </p:extLst>
 </p:presentation>
 </file>
 
@@ -154,10 +170,9 @@
           <a:lstStyle/>
           <a:p>
             <a:r>
-              <a:rPr lang="en-US" smtClean="0"/>
+              <a:rPr lang="en-US"/>
               <a:t>Click to edit Master title style</a:t>
             </a:r>
-            <a:endParaRPr lang="en-US"/>
           </a:p>
         </p:txBody>
       </p:sp>
@@ -273,10 +288,9 @@
           </a:lstStyle>
           <a:p>
             <a:r>
-              <a:rPr lang="en-US" smtClean="0"/>
+              <a:rPr lang="en-US"/>
               <a:t>Click to edit Master subtitle style</a:t>
             </a:r>
-            <a:endParaRPr lang="en-US"/>
           </a:p>
         </p:txBody>
       </p:sp>
@@ -297,7 +311,7 @@
           <a:p>
             <a:fld id="{5BCAD085-E8A6-8845-BD4E-CB4CCA059FC4}" type="datetimeFigureOut">
               <a:rPr lang="en-US" smtClean="0"/>
-              <a:t>1/27/13</a:t>
+              <a:t>6/5/26</a:t>
             </a:fld>
             <a:endParaRPr lang="en-US"/>
           </a:p>
@@ -391,10 +405,9 @@
           <a:lstStyle/>
           <a:p>
             <a:r>
-              <a:rPr lang="en-US" smtClean="0"/>
+              <a:rPr lang="en-US"/>
               <a:t>Click to edit Master title style</a:t>
             </a:r>
-            <a:endParaRPr lang="en-US"/>
           </a:p>
         </p:txBody>
       </p:sp>
@@ -415,38 +428,37 @@
           <a:p>
             <a:pPr lvl="0"/>
             <a:r>
-              <a:rPr lang="en-US" smtClean="0"/>
+              <a:rPr lang="en-US"/>
               <a:t>Click to edit Master text styles</a:t>
             </a:r>
           </a:p>
           <a:p>
             <a:pPr lvl="1"/>
             <a:r>
-              <a:rPr lang="en-US" smtClean="0"/>
+              <a:rPr lang="en-US"/>
               <a:t>Second level</a:t>
             </a:r>
           </a:p>
           <a:p>
             <a:pPr lvl="2"/>
             <a:r>
-              <a:rPr lang="en-US" smtClean="0"/>
+              <a:rPr lang="en-US"/>
               <a:t>Third level</a:t>
             </a:r>
           </a:p>
           <a:p>
             <a:pPr lvl="3"/>
             <a:r>
-              <a:rPr lang="en-US" smtClean="0"/>
+              <a:rPr lang="en-US"/>
               <a:t>Fourth level</a:t>
             </a:r>
           </a:p>
           <a:p>
             <a:pPr lvl="4"/>
             <a:r>
-              <a:rPr lang="en-US" smtClean="0"/>
+              <a:rPr lang="en-US"/>
               <a:t>Fifth level</a:t>
             </a:r>
-            <a:endParaRPr lang="en-US"/>
           </a:p>
         </p:txBody>
       </p:sp>
@@ -467,7 +479,7 @@
           <a:p>
             <a:fld id="{5BCAD085-E8A6-8845-BD4E-CB4CCA059FC4}" type="datetimeFigureOut">
               <a:rPr lang="en-US" smtClean="0"/>
-              <a:t>1/27/13</a:t>
+              <a:t>6/5/26</a:t>
             </a:fld>
             <a:endParaRPr lang="en-US"/>
           </a:p>
@@ -566,10 +578,9 @@
           <a:lstStyle/>
           <a:p>
             <a:r>
-              <a:rPr lang="en-US" smtClean="0"/>
+              <a:rPr lang="en-US"/>
               <a:t>Click to edit Master title style</a:t>
             </a:r>
-            <a:endParaRPr lang="en-US"/>
           </a:p>
         </p:txBody>
       </p:sp>
@@ -595,38 +606,37 @@
           <a:p>
             <a:pPr lvl="0"/>
             <a:r>
-              <a:rPr lang="en-US" smtClean="0"/>
+              <a:rPr lang="en-US"/>
               <a:t>Click to edit Master text styles</a:t>
             </a:r>
           </a:p>
           <a:p>
             <a:pPr lvl="1"/>
             <a:r>
-              <a:rPr lang="en-US" smtClean="0"/>
+              <a:rPr lang="en-US"/>
               <a:t>Second level</a:t>
             </a:r>
           </a:p>
           <a:p>
             <a:pPr lvl="2"/>
             <a:r>
-              <a:rPr lang="en-US" smtClean="0"/>
+              <a:rPr lang="en-US"/>
               <a:t>Third level</a:t>
             </a:r>
           </a:p>
           <a:p>
             <a:pPr lvl="3"/>
             <a:r>
-              <a:rPr lang="en-US" smtClean="0"/>
+              <a:rPr lang="en-US"/>
               <a:t>Fourth level</a:t>
             </a:r>
           </a:p>
           <a:p>
             <a:pPr lvl="4"/>
             <a:r>
-              <a:rPr lang="en-US" smtClean="0"/>
+              <a:rPr lang="en-US"/>
               <a:t>Fifth level</a:t>
             </a:r>
-            <a:endParaRPr lang="en-US"/>
           </a:p>
         </p:txBody>
       </p:sp>
@@ -647,7 +657,7 @@
           <a:p>
             <a:fld id="{5BCAD085-E8A6-8845-BD4E-CB4CCA059FC4}" type="datetimeFigureOut">
               <a:rPr lang="en-US" smtClean="0"/>
-              <a:t>1/27/13</a:t>
+              <a:t>6/5/26</a:t>
             </a:fld>
             <a:endParaRPr lang="en-US"/>
           </a:p>
@@ -741,10 +751,9 @@
           <a:lstStyle/>
           <a:p>
             <a:r>
-              <a:rPr lang="en-US" smtClean="0"/>
+              <a:rPr lang="en-US"/>
               <a:t>Click to edit Master title style</a:t>
             </a:r>
-            <a:endParaRPr lang="en-US"/>
           </a:p>
         </p:txBody>
       </p:sp>
@@ -765,38 +774,37 @@
           <a:p>
             <a:pPr lvl="0"/>
             <a:r>
-              <a:rPr lang="en-US" smtClean="0"/>
+              <a:rPr lang="en-US"/>
               <a:t>Click to edit Master text styles</a:t>
             </a:r>
           </a:p>
           <a:p>
             <a:pPr lvl="1"/>
             <a:r>
-              <a:rPr lang="en-US" smtClean="0"/>
+              <a:rPr lang="en-US"/>
               <a:t>Second level</a:t>
             </a:r>
           </a:p>
           <a:p>
             <a:pPr lvl="2"/>
             <a:r>
-              <a:rPr lang="en-US" smtClean="0"/>
+              <a:rPr lang="en-US"/>
               <a:t>Third level</a:t>
             </a:r>
           </a:p>
           <a:p>
             <a:pPr lvl="3"/>
             <a:r>
-              <a:rPr lang="en-US" smtClean="0"/>
+              <a:rPr lang="en-US"/>
               <a:t>Fourth level</a:t>
             </a:r>
           </a:p>
           <a:p>
             <a:pPr lvl="4"/>
             <a:r>
-              <a:rPr lang="en-US" smtClean="0"/>
+              <a:rPr lang="en-US"/>
               <a:t>Fifth level</a:t>
             </a:r>
-            <a:endParaRPr lang="en-US"/>
           </a:p>
         </p:txBody>
       </p:sp>
@@ -817,7 +825,7 @@
           <a:p>
             <a:fld id="{5BCAD085-E8A6-8845-BD4E-CB4CCA059FC4}" type="datetimeFigureOut">
               <a:rPr lang="en-US" smtClean="0"/>
-              <a:t>1/27/13</a:t>
+              <a:t>6/5/26</a:t>
             </a:fld>
             <a:endParaRPr lang="en-US"/>
           </a:p>
@@ -920,10 +928,9 @@
           </a:lstStyle>
           <a:p>
             <a:r>
-              <a:rPr lang="en-US" smtClean="0"/>
+              <a:rPr lang="en-US"/>
               <a:t>Click to edit Master title style</a:t>
             </a:r>
-            <a:endParaRPr lang="en-US"/>
           </a:p>
         </p:txBody>
       </p:sp>
@@ -1040,7 +1047,7 @@
           <a:p>
             <a:pPr lvl="0"/>
             <a:r>
-              <a:rPr lang="en-US" smtClean="0"/>
+              <a:rPr lang="en-US"/>
               <a:t>Click to edit Master text styles</a:t>
             </a:r>
           </a:p>
@@ -1063,7 +1070,7 @@
           <a:p>
             <a:fld id="{5BCAD085-E8A6-8845-BD4E-CB4CCA059FC4}" type="datetimeFigureOut">
               <a:rPr lang="en-US" smtClean="0"/>
-              <a:t>1/27/13</a:t>
+              <a:t>6/5/26</a:t>
             </a:fld>
             <a:endParaRPr lang="en-US"/>
           </a:p>
@@ -1157,10 +1164,9 @@
           <a:lstStyle/>
           <a:p>
             <a:r>
-              <a:rPr lang="en-US" smtClean="0"/>
+              <a:rPr lang="en-US"/>
               <a:t>Click to edit Master title style</a:t>
             </a:r>
-            <a:endParaRPr lang="en-US"/>
           </a:p>
         </p:txBody>
       </p:sp>
@@ -1214,38 +1220,37 @@
           <a:p>
             <a:pPr lvl="0"/>
             <a:r>
-              <a:rPr lang="en-US" smtClean="0"/>
+              <a:rPr lang="en-US"/>
               <a:t>Click to edit Master text styles</a:t>
             </a:r>
           </a:p>
           <a:p>
             <a:pPr lvl="1"/>
             <a:r>
-              <a:rPr lang="en-US" smtClean="0"/>
+              <a:rPr lang="en-US"/>
               <a:t>Second level</a:t>
             </a:r>
           </a:p>
           <a:p>
             <a:pPr lvl="2"/>
             <a:r>
-              <a:rPr lang="en-US" smtClean="0"/>
+              <a:rPr lang="en-US"/>
               <a:t>Third level</a:t>
             </a:r>
           </a:p>
           <a:p>
             <a:pPr lvl="3"/>
             <a:r>
-              <a:rPr lang="en-US" smtClean="0"/>
+              <a:rPr lang="en-US"/>
               <a:t>Fourth level</a:t>
             </a:r>
           </a:p>
           <a:p>
             <a:pPr lvl="4"/>
             <a:r>
-              <a:rPr lang="en-US" smtClean="0"/>
+              <a:rPr lang="en-US"/>
               <a:t>Fifth level</a:t>
             </a:r>
-            <a:endParaRPr lang="en-US"/>
           </a:p>
         </p:txBody>
       </p:sp>
@@ -1299,38 +1304,37 @@
           <a:p>
             <a:pPr lvl="0"/>
             <a:r>
-              <a:rPr lang="en-US" smtClean="0"/>
+              <a:rPr lang="en-US"/>
               <a:t>Click to edit Master text styles</a:t>
             </a:r>
           </a:p>
           <a:p>
             <a:pPr lvl="1"/>
             <a:r>
-              <a:rPr lang="en-US" smtClean="0"/>
+              <a:rPr lang="en-US"/>
               <a:t>Second level</a:t>
             </a:r>
           </a:p>
           <a:p>
             <a:pPr lvl="2"/>
             <a:r>
-              <a:rPr lang="en-US" smtClean="0"/>
+              <a:rPr lang="en-US"/>
               <a:t>Third level</a:t>
             </a:r>
           </a:p>
           <a:p>
             <a:pPr lvl="3"/>
             <a:r>
-              <a:rPr lang="en-US" smtClean="0"/>
+              <a:rPr lang="en-US"/>
               <a:t>Fourth level</a:t>
             </a:r>
           </a:p>
           <a:p>
             <a:pPr lvl="4"/>
             <a:r>
-              <a:rPr lang="en-US" smtClean="0"/>
+              <a:rPr lang="en-US"/>
               <a:t>Fifth level</a:t>
             </a:r>
-            <a:endParaRPr lang="en-US"/>
           </a:p>
         </p:txBody>
       </p:sp>
@@ -1351,7 +1355,7 @@
           <a:p>
             <a:fld id="{5BCAD085-E8A6-8845-BD4E-CB4CCA059FC4}" type="datetimeFigureOut">
               <a:rPr lang="en-US" smtClean="0"/>
-              <a:t>1/27/13</a:t>
+              <a:t>6/5/26</a:t>
             </a:fld>
             <a:endParaRPr lang="en-US"/>
           </a:p>
@@ -1449,10 +1453,9 @@
           </a:lstStyle>
           <a:p>
             <a:r>
-              <a:rPr lang="en-US" smtClean="0"/>
+              <a:rPr lang="en-US"/>
               <a:t>Click to edit Master title style</a:t>
             </a:r>
-            <a:endParaRPr lang="en-US"/>
           </a:p>
         </p:txBody>
       </p:sp>
@@ -1515,7 +1518,7 @@
           <a:p>
             <a:pPr lvl="0"/>
             <a:r>
-              <a:rPr lang="en-US" smtClean="0"/>
+              <a:rPr lang="en-US"/>
               <a:t>Click to edit Master text styles</a:t>
             </a:r>
           </a:p>
@@ -1571,38 +1574,37 @@
           <a:p>
             <a:pPr lvl="0"/>
             <a:r>
-              <a:rPr lang="en-US" smtClean="0"/>
+              <a:rPr lang="en-US"/>
               <a:t>Click to edit Master text styles</a:t>
             </a:r>
           </a:p>
           <a:p>
             <a:pPr lvl="1"/>
             <a:r>
-              <a:rPr lang="en-US" smtClean="0"/>
+              <a:rPr lang="en-US"/>
               <a:t>Second level</a:t>
             </a:r>
           </a:p>
           <a:p>
             <a:pPr lvl="2"/>
             <a:r>
-              <a:rPr lang="en-US" smtClean="0"/>
+              <a:rPr lang="en-US"/>
               <a:t>Third level</a:t>
             </a:r>
           </a:p>
           <a:p>
             <a:pPr lvl="3"/>
             <a:r>
-              <a:rPr lang="en-US" smtClean="0"/>
+              <a:rPr lang="en-US"/>
               <a:t>Fourth level</a:t>
             </a:r>
           </a:p>
           <a:p>
             <a:pPr lvl="4"/>
             <a:r>
-              <a:rPr lang="en-US" smtClean="0"/>
+              <a:rPr lang="en-US"/>
               <a:t>Fifth level</a:t>
             </a:r>
-            <a:endParaRPr lang="en-US"/>
           </a:p>
         </p:txBody>
       </p:sp>
@@ -1665,7 +1667,7 @@
           <a:p>
             <a:pPr lvl="0"/>
             <a:r>
-              <a:rPr lang="en-US" smtClean="0"/>
+              <a:rPr lang="en-US"/>
               <a:t>Click to edit Master text styles</a:t>
             </a:r>
           </a:p>
@@ -1721,38 +1723,37 @@
           <a:p>
             <a:pPr lvl="0"/>
             <a:r>
-              <a:rPr lang="en-US" smtClean="0"/>
+              <a:rPr lang="en-US"/>
               <a:t>Click to edit Master text styles</a:t>
             </a:r>
           </a:p>
           <a:p>
             <a:pPr lvl="1"/>
             <a:r>
-              <a:rPr lang="en-US" smtClean="0"/>
+              <a:rPr lang="en-US"/>
               <a:t>Second level</a:t>
             </a:r>
           </a:p>
           <a:p>
             <a:pPr lvl="2"/>
             <a:r>
-              <a:rPr lang="en-US" smtClean="0"/>
+              <a:rPr lang="en-US"/>
               <a:t>Third level</a:t>
             </a:r>
           </a:p>
           <a:p>
             <a:pPr lvl="3"/>
             <a:r>
-              <a:rPr lang="en-US" smtClean="0"/>
+              <a:rPr lang="en-US"/>
               <a:t>Fourth level</a:t>
             </a:r>
           </a:p>
           <a:p>
             <a:pPr lvl="4"/>
             <a:r>
-              <a:rPr lang="en-US" smtClean="0"/>
+              <a:rPr lang="en-US"/>
               <a:t>Fifth level</a:t>
             </a:r>
-            <a:endParaRPr lang="en-US"/>
           </a:p>
         </p:txBody>
       </p:sp>
@@ -1773,7 +1774,7 @@
           <a:p>
             <a:fld id="{5BCAD085-E8A6-8845-BD4E-CB4CCA059FC4}" type="datetimeFigureOut">
               <a:rPr lang="en-US" smtClean="0"/>
-              <a:t>1/27/13</a:t>
+              <a:t>6/5/26</a:t>
             </a:fld>
             <a:endParaRPr lang="en-US"/>
           </a:p>
@@ -1867,10 +1868,9 @@
           <a:lstStyle/>
           <a:p>
             <a:r>
-              <a:rPr lang="en-US" smtClean="0"/>
+              <a:rPr lang="en-US"/>
               <a:t>Click to edit Master title style</a:t>
             </a:r>
-            <a:endParaRPr lang="en-US"/>
           </a:p>
         </p:txBody>
       </p:sp>
@@ -1891,7 +1891,7 @@
           <a:p>
             <a:fld id="{5BCAD085-E8A6-8845-BD4E-CB4CCA059FC4}" type="datetimeFigureOut">
               <a:rPr lang="en-US" smtClean="0"/>
-              <a:t>1/27/13</a:t>
+              <a:t>6/5/26</a:t>
             </a:fld>
             <a:endParaRPr lang="en-US"/>
           </a:p>
@@ -1986,7 +1986,7 @@
           <a:p>
             <a:fld id="{5BCAD085-E8A6-8845-BD4E-CB4CCA059FC4}" type="datetimeFigureOut">
               <a:rPr lang="en-US" smtClean="0"/>
-              <a:t>1/27/13</a:t>
+              <a:t>6/5/26</a:t>
             </a:fld>
             <a:endParaRPr lang="en-US"/>
           </a:p>
@@ -2089,10 +2089,9 @@
           </a:lstStyle>
           <a:p>
             <a:r>
-              <a:rPr lang="en-US" smtClean="0"/>
+              <a:rPr lang="en-US"/>
               <a:t>Click to edit Master title style</a:t>
             </a:r>
-            <a:endParaRPr lang="en-US"/>
           </a:p>
         </p:txBody>
       </p:sp>
@@ -2146,38 +2145,37 @@
           <a:p>
             <a:pPr lvl="0"/>
             <a:r>
-              <a:rPr lang="en-US" smtClean="0"/>
+              <a:rPr lang="en-US"/>
               <a:t>Click to edit Master text styles</a:t>
             </a:r>
           </a:p>
           <a:p>
             <a:pPr lvl="1"/>
             <a:r>
-              <a:rPr lang="en-US" smtClean="0"/>
+              <a:rPr lang="en-US"/>
               <a:t>Second level</a:t>
             </a:r>
           </a:p>
           <a:p>
             <a:pPr lvl="2"/>
             <a:r>
-              <a:rPr lang="en-US" smtClean="0"/>
+              <a:rPr lang="en-US"/>
               <a:t>Third level</a:t>
             </a:r>
           </a:p>
           <a:p>
             <a:pPr lvl="3"/>
             <a:r>
-              <a:rPr lang="en-US" smtClean="0"/>
+              <a:rPr lang="en-US"/>
               <a:t>Fourth level</a:t>
             </a:r>
           </a:p>
           <a:p>
             <a:pPr lvl="4"/>
             <a:r>
-              <a:rPr lang="en-US" smtClean="0"/>
+              <a:rPr lang="en-US"/>
               <a:t>Fifth level</a:t>
             </a:r>
-            <a:endParaRPr lang="en-US"/>
           </a:p>
         </p:txBody>
       </p:sp>
@@ -2240,7 +2238,7 @@
           <a:p>
             <a:pPr lvl="0"/>
             <a:r>
-              <a:rPr lang="en-US" smtClean="0"/>
+              <a:rPr lang="en-US"/>
               <a:t>Click to edit Master text styles</a:t>
             </a:r>
           </a:p>
@@ -2263,7 +2261,7 @@
           <a:p>
             <a:fld id="{5BCAD085-E8A6-8845-BD4E-CB4CCA059FC4}" type="datetimeFigureOut">
               <a:rPr lang="en-US" smtClean="0"/>
-              <a:t>1/27/13</a:t>
+              <a:t>6/5/26</a:t>
             </a:fld>
             <a:endParaRPr lang="en-US"/>
           </a:p>
@@ -2366,10 +2364,9 @@
           </a:lstStyle>
           <a:p>
             <a:r>
-              <a:rPr lang="en-US" smtClean="0"/>
+              <a:rPr lang="en-US"/>
               <a:t>Click to edit Master title style</a:t>
             </a:r>
-            <a:endParaRPr lang="en-US"/>
           </a:p>
         </p:txBody>
       </p:sp>
@@ -2493,7 +2490,7 @@
           <a:p>
             <a:pPr lvl="0"/>
             <a:r>
-              <a:rPr lang="en-US" smtClean="0"/>
+              <a:rPr lang="en-US"/>
               <a:t>Click to edit Master text styles</a:t>
             </a:r>
           </a:p>
@@ -2516,7 +2513,7 @@
           <a:p>
             <a:fld id="{5BCAD085-E8A6-8845-BD4E-CB4CCA059FC4}" type="datetimeFigureOut">
               <a:rPr lang="en-US" smtClean="0"/>
-              <a:t>1/27/13</a:t>
+              <a:t>6/5/26</a:t>
             </a:fld>
             <a:endParaRPr lang="en-US"/>
           </a:p>
@@ -2625,10 +2622,9 @@
           <a:lstStyle/>
           <a:p>
             <a:r>
-              <a:rPr lang="en-US" smtClean="0"/>
+              <a:rPr lang="en-US"/>
               <a:t>Click to edit Master title style</a:t>
             </a:r>
-            <a:endParaRPr lang="en-US"/>
           </a:p>
         </p:txBody>
       </p:sp>
@@ -2659,38 +2655,37 @@
           <a:p>
             <a:pPr lvl="0"/>
             <a:r>
-              <a:rPr lang="en-US" smtClean="0"/>
+              <a:rPr lang="en-US"/>
               <a:t>Click to edit Master text styles</a:t>
             </a:r>
           </a:p>
           <a:p>
             <a:pPr lvl="1"/>
             <a:r>
-              <a:rPr lang="en-US" smtClean="0"/>
+              <a:rPr lang="en-US"/>
               <a:t>Second level</a:t>
             </a:r>
           </a:p>
           <a:p>
             <a:pPr lvl="2"/>
             <a:r>
-              <a:rPr lang="en-US" smtClean="0"/>
+              <a:rPr lang="en-US"/>
               <a:t>Third level</a:t>
             </a:r>
           </a:p>
           <a:p>
             <a:pPr lvl="3"/>
             <a:r>
-              <a:rPr lang="en-US" smtClean="0"/>
+              <a:rPr lang="en-US"/>
               <a:t>Fourth level</a:t>
             </a:r>
           </a:p>
           <a:p>
             <a:pPr lvl="4"/>
             <a:r>
-              <a:rPr lang="en-US" smtClean="0"/>
+              <a:rPr lang="en-US"/>
               <a:t>Fifth level</a:t>
             </a:r>
-            <a:endParaRPr lang="en-US"/>
           </a:p>
         </p:txBody>
       </p:sp>
@@ -2729,7 +2724,7 @@
           <a:p>
             <a:fld id="{5BCAD085-E8A6-8845-BD4E-CB4CCA059FC4}" type="datetimeFigureOut">
               <a:rPr lang="en-US" smtClean="0"/>
-              <a:t>1/27/13</a:t>
+              <a:t>6/5/26</a:t>
             </a:fld>
             <a:endParaRPr lang="en-US"/>
           </a:p>
@@ -3088,7 +3083,7 @@
 </file>
 
 <file path=ppt/slides/slide1.xml><?xml version="1.0" encoding="utf-8"?>
-<p:sld xmlns:a="http://schemas.openxmlformats.org/drawingml/2006/main" xmlns:p="http://schemas.openxmlformats.org/presentationml/2006/main" xmlns:r="http://schemas.openxmlformats.org/officeDocument/2006/relationships">
+<p:sld xmlns:a="http://schemas.openxmlformats.org/drawingml/2006/main" xmlns:r="http://schemas.openxmlformats.org/officeDocument/2006/relationships" xmlns:p="http://schemas.openxmlformats.org/presentationml/2006/main">
   <p:cSld>
     <p:spTree>
       <p:nvGrpSpPr>
@@ -3096,7 +3091,14 @@
         <p:cNvGrpSpPr/>
         <p:nvPr/>
       </p:nvGrpSpPr>
-      <p:grpSpPr/>
+      <p:grpSpPr>
+        <a:xfrm>
+          <a:off x="0" y="0"/>
+          <a:ext cx="0" cy="0"/>
+          <a:chOff x="0" y="0"/>
+          <a:chExt cx="0" cy="0"/>
+        </a:xfrm>
+      </p:grpSpPr>
       <p:sp>
         <p:nvSpPr>
           <p:cNvPr id="2" name="Rectangle 1"/>
@@ -3137,6 +3139,7 @@
           <a:lstStyle/>
           <a:p>
             <a:pPr algn="ctr"/>
+            <a:endParaRPr/>
           </a:p>
         </p:txBody>
       </p:sp>
@@ -3180,6 +3183,7 @@
           <a:lstStyle/>
           <a:p>
             <a:pPr algn="ctr"/>
+            <a:endParaRPr/>
           </a:p>
         </p:txBody>
       </p:sp>
@@ -3292,6 +3296,7 @@
           <a:lstStyle/>
           <a:p>
             <a:pPr algn="ctr"/>
+            <a:endParaRPr/>
           </a:p>
         </p:txBody>
       </p:sp>
@@ -3372,7 +3377,7 @@
 </file>
 
 <file path=ppt/slides/slide10.xml><?xml version="1.0" encoding="utf-8"?>
-<p:sld xmlns:a="http://schemas.openxmlformats.org/drawingml/2006/main" xmlns:p="http://schemas.openxmlformats.org/presentationml/2006/main" xmlns:r="http://schemas.openxmlformats.org/officeDocument/2006/relationships">
+<p:sld xmlns:a="http://schemas.openxmlformats.org/drawingml/2006/main" xmlns:r="http://schemas.openxmlformats.org/officeDocument/2006/relationships" xmlns:p="http://schemas.openxmlformats.org/presentationml/2006/main">
   <p:cSld>
     <p:spTree>
       <p:nvGrpSpPr>
@@ -3380,7 +3385,14 @@
         <p:cNvGrpSpPr/>
         <p:nvPr/>
       </p:nvGrpSpPr>
-      <p:grpSpPr/>
+      <p:grpSpPr>
+        <a:xfrm>
+          <a:off x="0" y="0"/>
+          <a:ext cx="0" cy="0"/>
+          <a:chOff x="0" y="0"/>
+          <a:chExt cx="0" cy="0"/>
+        </a:xfrm>
+      </p:grpSpPr>
       <p:sp>
         <p:nvSpPr>
           <p:cNvPr id="2" name="Rectangle 1"/>
@@ -3421,6 +3433,7 @@
           <a:lstStyle/>
           <a:p>
             <a:pPr algn="ctr"/>
+            <a:endParaRPr/>
           </a:p>
         </p:txBody>
       </p:sp>
@@ -3532,6 +3545,7 @@
           <a:lstStyle/>
           <a:p>
             <a:pPr algn="ctr"/>
+            <a:endParaRPr/>
           </a:p>
         </p:txBody>
       </p:sp>
@@ -3577,6 +3591,7 @@
           <a:lstStyle/>
           <a:p>
             <a:pPr algn="ctr"/>
+            <a:endParaRPr/>
           </a:p>
         </p:txBody>
       </p:sp>
@@ -3752,22 +3767,7 @@
                   <a:srgbClr val="1A1A2E"/>
                 </a:solidFill>
               </a:rPr>
-              <a:t>7a. 無風フェーズ → ブロワー停止確認 → Enter</a:t>
-            </a:r>
-          </a:p>
-          <a:p>
-            <a:pPr>
-              <a:spcBef>
-                <a:spcPts val="200"/>
-              </a:spcBef>
-            </a:pPr>
-            <a:r>
-              <a:rPr sz="1200">
-                <a:solidFill>
-                  <a:srgbClr val="1A1A2E"/>
-                </a:solidFill>
-              </a:rPr>
-              <a:t>    （Pofst 直前のみ電圧オフセットが自動計測される、操作不要）</a:t>
+              <a:t>7a. 無風フェーズ → 電圧オフセット計測の要否 [y/N] → ブロワー停止確認 → Enter</a:t>
             </a:r>
           </a:p>
           <a:p>
@@ -3829,6 +3829,7 @@
           <a:lstStyle/>
           <a:p>
             <a:pPr algn="ctr"/>
+            <a:endParaRPr/>
           </a:p>
         </p:txBody>
       </p:sp>
@@ -4019,6 +4020,7 @@
           <a:lstStyle/>
           <a:p>
             <a:pPr algn="ctr"/>
+            <a:endParaRPr/>
           </a:p>
         </p:txBody>
       </p:sp>
@@ -4065,7 +4067,7 @@
 </file>
 
 <file path=ppt/slides/slide2.xml><?xml version="1.0" encoding="utf-8"?>
-<p:sld xmlns:a="http://schemas.openxmlformats.org/drawingml/2006/main" xmlns:p="http://schemas.openxmlformats.org/presentationml/2006/main" xmlns:r="http://schemas.openxmlformats.org/officeDocument/2006/relationships">
+<p:sld xmlns:a="http://schemas.openxmlformats.org/drawingml/2006/main" xmlns:r="http://schemas.openxmlformats.org/officeDocument/2006/relationships" xmlns:p="http://schemas.openxmlformats.org/presentationml/2006/main">
   <p:cSld>
     <p:spTree>
       <p:nvGrpSpPr>
@@ -4073,7 +4075,14 @@
         <p:cNvGrpSpPr/>
         <p:nvPr/>
       </p:nvGrpSpPr>
-      <p:grpSpPr/>
+      <p:grpSpPr>
+        <a:xfrm>
+          <a:off x="0" y="0"/>
+          <a:ext cx="0" cy="0"/>
+          <a:chOff x="0" y="0"/>
+          <a:chExt cx="0" cy="0"/>
+        </a:xfrm>
+      </p:grpSpPr>
       <p:sp>
         <p:nvSpPr>
           <p:cNvPr id="2" name="Rectangle 1"/>
@@ -4114,6 +4123,7 @@
           <a:lstStyle/>
           <a:p>
             <a:pPr algn="ctr"/>
+            <a:endParaRPr/>
           </a:p>
         </p:txBody>
       </p:sp>
@@ -4225,6 +4235,7 @@
           <a:lstStyle/>
           <a:p>
             <a:pPr algn="ctr"/>
+            <a:endParaRPr/>
           </a:p>
         </p:txBody>
       </p:sp>
@@ -4270,6 +4281,7 @@
           <a:lstStyle/>
           <a:p>
             <a:pPr algn="ctr"/>
+            <a:endParaRPr/>
           </a:p>
         </p:txBody>
       </p:sp>
@@ -4313,6 +4325,7 @@
           <a:lstStyle/>
           <a:p>
             <a:pPr algn="ctr"/>
+            <a:endParaRPr/>
           </a:p>
         </p:txBody>
       </p:sp>
@@ -4495,6 +4508,7 @@
           <a:lstStyle/>
           <a:p>
             <a:pPr algn="ctr"/>
+            <a:endParaRPr/>
           </a:p>
         </p:txBody>
       </p:sp>
@@ -4538,6 +4552,7 @@
           <a:lstStyle/>
           <a:p>
             <a:pPr algn="ctr"/>
+            <a:endParaRPr/>
           </a:p>
         </p:txBody>
       </p:sp>
@@ -4720,6 +4735,7 @@
           <a:lstStyle/>
           <a:p>
             <a:pPr algn="ctr"/>
+            <a:endParaRPr/>
           </a:p>
         </p:txBody>
       </p:sp>
@@ -4763,6 +4779,7 @@
           <a:lstStyle/>
           <a:p>
             <a:pPr algn="ctr"/>
+            <a:endParaRPr/>
           </a:p>
         </p:txBody>
       </p:sp>
@@ -4945,6 +4962,7 @@
           <a:lstStyle/>
           <a:p>
             <a:pPr algn="ctr"/>
+            <a:endParaRPr/>
           </a:p>
         </p:txBody>
       </p:sp>
@@ -4988,6 +5006,7 @@
           <a:lstStyle/>
           <a:p>
             <a:pPr algn="ctr"/>
+            <a:endParaRPr/>
           </a:p>
         </p:txBody>
       </p:sp>
@@ -5170,6 +5189,7 @@
           <a:lstStyle/>
           <a:p>
             <a:pPr algn="ctr"/>
+            <a:endParaRPr/>
           </a:p>
         </p:txBody>
       </p:sp>
@@ -5213,6 +5233,7 @@
           <a:lstStyle/>
           <a:p>
             <a:pPr algn="ctr"/>
+            <a:endParaRPr/>
           </a:p>
         </p:txBody>
       </p:sp>
@@ -5361,6 +5382,7 @@
           <a:lstStyle/>
           <a:p>
             <a:pPr algn="ctr"/>
+            <a:endParaRPr/>
           </a:p>
         </p:txBody>
       </p:sp>
@@ -5440,6 +5462,7 @@
           <a:lstStyle/>
           <a:p>
             <a:pPr algn="ctr"/>
+            <a:endParaRPr/>
           </a:p>
         </p:txBody>
       </p:sp>
@@ -5451,8 +5474,8 @@
         </p:nvSpPr>
         <p:spPr>
           <a:xfrm>
-            <a:off x="2103120" y="3273552"/>
-            <a:ext cx="1600200" cy="256032"/>
+            <a:off x="2103120" y="3246120"/>
+            <a:ext cx="1920240" cy="261610"/>
           </a:xfrm>
           <a:prstGeom prst="rect">
             <a:avLst/>
@@ -5467,13 +5490,26 @@
           <a:p>
             <a:pPr algn="l"/>
             <a:r>
-              <a:rPr sz="1100" b="1" i="0">
+              <a:rPr sz="1100" b="1" i="0" dirty="0">
                 <a:solidFill>
                   <a:srgbClr val="2E6EB4"/>
                 </a:solidFill>
               </a:rPr>
-              <a:t>  ⚙ プログラム自動実行</a:t>
-            </a:r>
+              <a:t>  ⚙ </a:t>
+            </a:r>
+            <a:r>
+              <a:rPr sz="1100" b="1" i="0" dirty="0" err="1">
+                <a:solidFill>
+                  <a:srgbClr val="2E6EB4"/>
+                </a:solidFill>
+              </a:rPr>
+              <a:t>プログラム自動実行</a:t>
+            </a:r>
+            <a:endParaRPr sz="1100" b="1" i="0" dirty="0">
+              <a:solidFill>
+                <a:srgbClr val="2E6EB4"/>
+              </a:solidFill>
+            </a:endParaRPr>
           </a:p>
         </p:txBody>
       </p:sp>
@@ -5519,6 +5555,7 @@
           <a:lstStyle/>
           <a:p>
             <a:pPr algn="ctr"/>
+            <a:endParaRPr/>
           </a:p>
         </p:txBody>
       </p:sp>
@@ -6211,7 +6248,7 @@
 </file>
 
 <file path=ppt/slides/slide3.xml><?xml version="1.0" encoding="utf-8"?>
-<p:sld xmlns:a="http://schemas.openxmlformats.org/drawingml/2006/main" xmlns:p="http://schemas.openxmlformats.org/presentationml/2006/main" xmlns:r="http://schemas.openxmlformats.org/officeDocument/2006/relationships">
+<p:sld xmlns:a="http://schemas.openxmlformats.org/drawingml/2006/main" xmlns:r="http://schemas.openxmlformats.org/officeDocument/2006/relationships" xmlns:p="http://schemas.openxmlformats.org/presentationml/2006/main">
   <p:cSld>
     <p:spTree>
       <p:nvGrpSpPr>
@@ -6219,7 +6256,14 @@
         <p:cNvGrpSpPr/>
         <p:nvPr/>
       </p:nvGrpSpPr>
-      <p:grpSpPr/>
+      <p:grpSpPr>
+        <a:xfrm>
+          <a:off x="0" y="0"/>
+          <a:ext cx="0" cy="0"/>
+          <a:chOff x="0" y="0"/>
+          <a:chExt cx="0" cy="0"/>
+        </a:xfrm>
+      </p:grpSpPr>
       <p:sp>
         <p:nvSpPr>
           <p:cNvPr id="2" name="Rectangle 1"/>
@@ -6260,6 +6304,7 @@
           <a:lstStyle/>
           <a:p>
             <a:pPr algn="ctr"/>
+            <a:endParaRPr/>
           </a:p>
         </p:txBody>
       </p:sp>
@@ -6371,6 +6416,7 @@
           <a:lstStyle/>
           <a:p>
             <a:pPr algn="ctr"/>
+            <a:endParaRPr/>
           </a:p>
         </p:txBody>
       </p:sp>
@@ -6414,6 +6460,7 @@
           <a:lstStyle/>
           <a:p>
             <a:pPr algn="ctr"/>
+            <a:endParaRPr/>
           </a:p>
         </p:txBody>
       </p:sp>
@@ -6493,6 +6540,7 @@
           <a:lstStyle/>
           <a:p>
             <a:pPr algn="ctr"/>
+            <a:endParaRPr/>
           </a:p>
         </p:txBody>
       </p:sp>
@@ -6563,7 +6611,7 @@
                   <a:srgbClr val="1A1A2E"/>
                 </a:solidFill>
               </a:rPr>
-              <a:t>output_dir    : データ保存先のルートフォルダ</a:t>
+              <a:t>output_dir   : データ保存先のルートフォルダ</a:t>
             </a:r>
           </a:p>
           <a:p>
@@ -6578,7 +6626,7 @@
                   <a:srgbClr val="1A1A2E"/>
                 </a:solidFill>
               </a:rPr>
-              <a:t>                例) "C:/Users/xxx/WindyData"</a:t>
+              <a:t>               例) "C:/Users/xxx/WindyData"</a:t>
             </a:r>
           </a:p>
           <a:p>
@@ -6638,7 +6686,7 @@
                   <a:srgbClr val="1A1A2E"/>
                 </a:solidFill>
               </a:rPr>
-              <a:t>python_exe    : 32bit Python（計測用）のパス</a:t>
+              <a:t>python_exe    : Python の実行ファイルパス</a:t>
             </a:r>
           </a:p>
           <a:p>
@@ -6647,29 +6695,11 @@
                 <a:spcPts val="200"/>
               </a:spcBef>
             </a:pPr>
-            <a:r>
-              <a:rPr sz="1200">
-                <a:solidFill>
-                  <a:srgbClr val="1A1A2E"/>
-                </a:solidFill>
-              </a:rPr>
-              <a:t>python_exe_64 : 64bit Python（後処理用）のパス</a:t>
-            </a:r>
-          </a:p>
-          <a:p>
-            <a:pPr>
-              <a:spcBef>
-                <a:spcPts val="200"/>
-              </a:spcBef>
-            </a:pPr>
-            <a:r>
-              <a:rPr sz="1200">
-                <a:solidFill>
-                  <a:srgbClr val="1A1A2E"/>
-                </a:solidFill>
-              </a:rPr>
-              <a:t/>
-            </a:r>
+            <a:endParaRPr sz="1200">
+              <a:solidFill>
+                <a:srgbClr val="1A1A2E"/>
+              </a:solidFill>
+            </a:endParaRPr>
           </a:p>
           <a:p>
             <a:pPr>
@@ -6730,6 +6760,7 @@
           <a:lstStyle/>
           <a:p>
             <a:pPr algn="ctr"/>
+            <a:endParaRPr/>
           </a:p>
         </p:txBody>
       </p:sp>
@@ -6824,14 +6855,11 @@
                 <a:spcPts val="200"/>
               </a:spcBef>
             </a:pPr>
-            <a:r>
-              <a:rPr sz="1200">
-                <a:solidFill>
-                  <a:srgbClr val="1A1A2E"/>
-                </a:solidFill>
-              </a:rPr>
-              <a:t/>
-            </a:r>
+            <a:endParaRPr sz="1200">
+              <a:solidFill>
+                <a:srgbClr val="1A1A2E"/>
+              </a:solidFill>
+            </a:endParaRPr>
           </a:p>
           <a:p>
             <a:pPr>
@@ -6869,14 +6897,11 @@
                 <a:spcPts val="200"/>
               </a:spcBef>
             </a:pPr>
-            <a:r>
-              <a:rPr sz="1200">
-                <a:solidFill>
-                  <a:srgbClr val="1A1A2E"/>
-                </a:solidFill>
-              </a:rPr>
-              <a:t/>
-            </a:r>
+            <a:endParaRPr sz="1200">
+              <a:solidFill>
+                <a:srgbClr val="1A1A2E"/>
+              </a:solidFill>
+            </a:endParaRPr>
           </a:p>
           <a:p>
             <a:pPr>
@@ -6952,6 +6977,7 @@
           <a:lstStyle/>
           <a:p>
             <a:pPr algn="ctr"/>
+            <a:endParaRPr/>
           </a:p>
         </p:txBody>
       </p:sp>
@@ -7017,12 +7043,100 @@
               </a:spcBef>
             </a:pPr>
             <a:r>
-              <a:rPr sz="1200">
-                <a:solidFill>
-                  <a:srgbClr val="1A1A2E"/>
-                </a:solidFill>
-              </a:rPr>
-              <a:t>config.json の output_dir は "WindyData" のルートフォルダを指定（日付サブフォルダは含めない）</a:t>
+              <a:rPr sz="1200" dirty="0" err="1">
+                <a:solidFill>
+                  <a:srgbClr val="1A1A2E"/>
+                </a:solidFill>
+              </a:rPr>
+              <a:t>config.json</a:t>
+            </a:r>
+            <a:r>
+              <a:rPr sz="1200" dirty="0">
+                <a:solidFill>
+                  <a:srgbClr val="1A1A2E"/>
+                </a:solidFill>
+              </a:rPr>
+              <a:t> </a:t>
+            </a:r>
+            <a:r>
+              <a:rPr sz="1200" dirty="0" err="1">
+                <a:solidFill>
+                  <a:srgbClr val="1A1A2E"/>
+                </a:solidFill>
+              </a:rPr>
+              <a:t>の</a:t>
+            </a:r>
+            <a:r>
+              <a:rPr sz="1200" dirty="0">
+                <a:solidFill>
+                  <a:srgbClr val="1A1A2E"/>
+                </a:solidFill>
+              </a:rPr>
+              <a:t> </a:t>
+            </a:r>
+            <a:r>
+              <a:rPr sz="1200" dirty="0" err="1">
+                <a:solidFill>
+                  <a:srgbClr val="1A1A2E"/>
+                </a:solidFill>
+              </a:rPr>
+              <a:t>output_dir</a:t>
+            </a:r>
+            <a:r>
+              <a:rPr sz="1200" dirty="0">
+                <a:solidFill>
+                  <a:srgbClr val="1A1A2E"/>
+                </a:solidFill>
+              </a:rPr>
+              <a:t> </a:t>
+            </a:r>
+            <a:r>
+              <a:rPr sz="1200" dirty="0" err="1">
+                <a:solidFill>
+                  <a:srgbClr val="1A1A2E"/>
+                </a:solidFill>
+              </a:rPr>
+              <a:t>は</a:t>
+            </a:r>
+            <a:r>
+              <a:rPr sz="1200" dirty="0">
+                <a:solidFill>
+                  <a:srgbClr val="1A1A2E"/>
+                </a:solidFill>
+              </a:rPr>
+              <a:t> "</a:t>
+            </a:r>
+            <a:r>
+              <a:rPr sz="1200" dirty="0" err="1">
+                <a:solidFill>
+                  <a:srgbClr val="1A1A2E"/>
+                </a:solidFill>
+              </a:rPr>
+              <a:t>WindyData</a:t>
+            </a:r>
+            <a:r>
+              <a:rPr sz="1200" dirty="0">
+                <a:solidFill>
+                  <a:srgbClr val="1A1A2E"/>
+                </a:solidFill>
+              </a:rPr>
+              <a:t>" </a:t>
+            </a:r>
+            <a:r>
+              <a:rPr sz="1200" dirty="0" err="1">
+                <a:solidFill>
+                  <a:srgbClr val="1A1A2E"/>
+                </a:solidFill>
+              </a:rPr>
+              <a:t>のルートフォルダを指定（日付サブフォルダは含めない</a:t>
+            </a:r>
+            <a:r>
+              <a:rPr sz="1200" dirty="0">
+                <a:solidFill>
+                  <a:srgbClr val="1A1A2E"/>
+                </a:solidFill>
+              </a:rPr>
+              <a:t>）</a:t>
             </a:r>
           </a:p>
           <a:p>
@@ -7032,13 +7146,18 @@
               </a:spcBef>
             </a:pPr>
             <a:r>
-              <a:rPr sz="1200">
+              <a:rPr sz="1200" dirty="0" err="1">
                 <a:solidFill>
                   <a:srgbClr val="1A1A2E"/>
                 </a:solidFill>
               </a:rPr>
               <a:t>実験ごとに自動でサブフォルダが作成されます</a:t>
             </a:r>
+            <a:endParaRPr sz="1200" dirty="0">
+              <a:solidFill>
+                <a:srgbClr val="1A1A2E"/>
+              </a:solidFill>
+            </a:endParaRPr>
           </a:p>
         </p:txBody>
       </p:sp>
@@ -7051,7 +7170,7 @@
 </file>
 
 <file path=ppt/slides/slide4.xml><?xml version="1.0" encoding="utf-8"?>
-<p:sld xmlns:a="http://schemas.openxmlformats.org/drawingml/2006/main" xmlns:p="http://schemas.openxmlformats.org/presentationml/2006/main" xmlns:r="http://schemas.openxmlformats.org/officeDocument/2006/relationships">
+<p:sld xmlns:a="http://schemas.openxmlformats.org/drawingml/2006/main" xmlns:r="http://schemas.openxmlformats.org/officeDocument/2006/relationships" xmlns:p="http://schemas.openxmlformats.org/presentationml/2006/main">
   <p:cSld>
     <p:spTree>
       <p:nvGrpSpPr>
@@ -7059,7 +7178,14 @@
         <p:cNvGrpSpPr/>
         <p:nvPr/>
       </p:nvGrpSpPr>
-      <p:grpSpPr/>
+      <p:grpSpPr>
+        <a:xfrm>
+          <a:off x="0" y="0"/>
+          <a:ext cx="0" cy="0"/>
+          <a:chOff x="0" y="0"/>
+          <a:chExt cx="0" cy="0"/>
+        </a:xfrm>
+      </p:grpSpPr>
       <p:sp>
         <p:nvSpPr>
           <p:cNvPr id="2" name="Rectangle 1"/>
@@ -7100,6 +7226,7 @@
           <a:lstStyle/>
           <a:p>
             <a:pPr algn="ctr"/>
+            <a:endParaRPr/>
           </a:p>
         </p:txBody>
       </p:sp>
@@ -7211,6 +7338,7 @@
           <a:lstStyle/>
           <a:p>
             <a:pPr algn="ctr"/>
+            <a:endParaRPr/>
           </a:p>
         </p:txBody>
       </p:sp>
@@ -7254,6 +7382,7 @@
           <a:lstStyle/>
           <a:p>
             <a:pPr algn="ctr"/>
+            <a:endParaRPr/>
           </a:p>
         </p:txBody>
       </p:sp>
@@ -7331,6 +7460,7 @@
           <a:lstStyle/>
           <a:p>
             <a:pPr algn="ctr"/>
+            <a:endParaRPr/>
           </a:p>
         </p:txBody>
       </p:sp>
@@ -7408,6 +7538,7 @@
           <a:lstStyle/>
           <a:p>
             <a:pPr algn="ctr"/>
+            <a:endParaRPr/>
           </a:p>
         </p:txBody>
       </p:sp>
@@ -7521,6 +7652,7 @@
           <a:lstStyle/>
           <a:p>
             <a:pPr algn="ctr"/>
+            <a:endParaRPr/>
           </a:p>
         </p:txBody>
       </p:sp>
@@ -7634,6 +7766,7 @@
           <a:lstStyle/>
           <a:p>
             <a:pPr algn="ctr"/>
+            <a:endParaRPr/>
           </a:p>
         </p:txBody>
       </p:sp>
@@ -7779,6 +7912,7 @@
           <a:lstStyle/>
           <a:p>
             <a:pPr algn="ctr"/>
+            <a:endParaRPr/>
           </a:p>
         </p:txBody>
       </p:sp>
@@ -7892,6 +8026,7 @@
           <a:lstStyle/>
           <a:p>
             <a:pPr algn="ctr"/>
+            <a:endParaRPr/>
           </a:p>
         </p:txBody>
       </p:sp>
@@ -8007,6 +8142,7 @@
           <a:lstStyle/>
           <a:p>
             <a:pPr algn="ctr"/>
+            <a:endParaRPr/>
           </a:p>
         </p:txBody>
       </p:sp>
@@ -8152,6 +8288,7 @@
           <a:lstStyle/>
           <a:p>
             <a:pPr algn="ctr"/>
+            <a:endParaRPr/>
           </a:p>
         </p:txBody>
       </p:sp>
@@ -8265,6 +8402,7 @@
           <a:lstStyle/>
           <a:p>
             <a:pPr algn="ctr"/>
+            <a:endParaRPr/>
           </a:p>
         </p:txBody>
       </p:sp>
@@ -8378,6 +8516,7 @@
           <a:lstStyle/>
           <a:p>
             <a:pPr algn="ctr"/>
+            <a:endParaRPr/>
           </a:p>
         </p:txBody>
       </p:sp>
@@ -8523,6 +8662,7 @@
           <a:lstStyle/>
           <a:p>
             <a:pPr algn="ctr"/>
+            <a:endParaRPr/>
           </a:p>
         </p:txBody>
       </p:sp>
@@ -8636,6 +8776,7 @@
           <a:lstStyle/>
           <a:p>
             <a:pPr algn="ctr"/>
+            <a:endParaRPr/>
           </a:p>
         </p:txBody>
       </p:sp>
@@ -8749,6 +8890,7 @@
           <a:lstStyle/>
           <a:p>
             <a:pPr algn="ctr"/>
+            <a:endParaRPr/>
           </a:p>
         </p:txBody>
       </p:sp>
@@ -8863,7 +9005,7 @@
 </file>
 
 <file path=ppt/slides/slide5.xml><?xml version="1.0" encoding="utf-8"?>
-<p:sld xmlns:a="http://schemas.openxmlformats.org/drawingml/2006/main" xmlns:p="http://schemas.openxmlformats.org/presentationml/2006/main" xmlns:r="http://schemas.openxmlformats.org/officeDocument/2006/relationships">
+<p:sld xmlns:a="http://schemas.openxmlformats.org/drawingml/2006/main" xmlns:r="http://schemas.openxmlformats.org/officeDocument/2006/relationships" xmlns:p="http://schemas.openxmlformats.org/presentationml/2006/main">
   <p:cSld>
     <p:spTree>
       <p:nvGrpSpPr>
@@ -8871,7 +9013,14 @@
         <p:cNvGrpSpPr/>
         <p:nvPr/>
       </p:nvGrpSpPr>
-      <p:grpSpPr/>
+      <p:grpSpPr>
+        <a:xfrm>
+          <a:off x="0" y="0"/>
+          <a:ext cx="0" cy="0"/>
+          <a:chOff x="0" y="0"/>
+          <a:chExt cx="0" cy="0"/>
+        </a:xfrm>
+      </p:grpSpPr>
       <p:sp>
         <p:nvSpPr>
           <p:cNvPr id="2" name="Rectangle 1"/>
@@ -8912,6 +9061,7 @@
           <a:lstStyle/>
           <a:p>
             <a:pPr algn="ctr"/>
+            <a:endParaRPr/>
           </a:p>
         </p:txBody>
       </p:sp>
@@ -9023,6 +9173,7 @@
           <a:lstStyle/>
           <a:p>
             <a:pPr algn="ctr"/>
+            <a:endParaRPr/>
           </a:p>
         </p:txBody>
       </p:sp>
@@ -9066,6 +9217,7 @@
           <a:lstStyle/>
           <a:p>
             <a:pPr algn="ctr"/>
+            <a:endParaRPr/>
           </a:p>
         </p:txBody>
       </p:sp>
@@ -9145,6 +9297,7 @@
           <a:lstStyle/>
           <a:p>
             <a:pPr algn="ctr"/>
+            <a:endParaRPr/>
           </a:p>
         </p:txBody>
       </p:sp>
@@ -9322,6 +9475,7 @@
           <a:lstStyle/>
           <a:p>
             <a:pPr algn="ctr"/>
+            <a:endParaRPr/>
           </a:p>
         </p:txBody>
       </p:sp>
@@ -9380,7 +9534,9 @@
             <a:spAutoFit/>
           </a:bodyPr>
           <a:lstStyle/>
-          <a:p/>
+          <a:p>
+            <a:endParaRPr/>
+          </a:p>
         </p:txBody>
       </p:sp>
       <p:sp>
@@ -9391,7 +9547,7 @@
         </p:nvSpPr>
         <p:spPr>
           <a:xfrm>
-            <a:off x="640080" y="3520440"/>
+            <a:off x="621665" y="3602736"/>
             <a:ext cx="11064240" cy="274320"/>
           </a:xfrm>
           <a:prstGeom prst="rect">
@@ -9407,12 +9563,20 @@
           <a:p>
             <a:pPr algn="l"/>
             <a:r>
-              <a:rPr sz="1400" b="1" i="0">
+              <a:rPr sz="1400" b="1" i="0" dirty="0" err="1">
                 <a:solidFill>
                   <a:srgbClr val="1A376C"/>
                 </a:solidFill>
               </a:rPr>
-              <a:t>WindyData/</a:t>
+              <a:t>WindyData</a:t>
+            </a:r>
+            <a:r>
+              <a:rPr sz="1400" b="1" i="0" dirty="0">
+                <a:solidFill>
+                  <a:srgbClr val="1A376C"/>
+                </a:solidFill>
+              </a:rPr>
+              <a:t>/</a:t>
             </a:r>
           </a:p>
         </p:txBody>
@@ -9732,7 +9896,7 @@
 </file>
 
 <file path=ppt/slides/slide6.xml><?xml version="1.0" encoding="utf-8"?>
-<p:sld xmlns:a="http://schemas.openxmlformats.org/drawingml/2006/main" xmlns:p="http://schemas.openxmlformats.org/presentationml/2006/main" xmlns:r="http://schemas.openxmlformats.org/officeDocument/2006/relationships">
+<p:sld xmlns:a="http://schemas.openxmlformats.org/drawingml/2006/main" xmlns:r="http://schemas.openxmlformats.org/officeDocument/2006/relationships" xmlns:p="http://schemas.openxmlformats.org/presentationml/2006/main">
   <p:cSld>
     <p:spTree>
       <p:nvGrpSpPr>
@@ -9740,7 +9904,14 @@
         <p:cNvGrpSpPr/>
         <p:nvPr/>
       </p:nvGrpSpPr>
-      <p:grpSpPr/>
+      <p:grpSpPr>
+        <a:xfrm>
+          <a:off x="0" y="0"/>
+          <a:ext cx="0" cy="0"/>
+          <a:chOff x="0" y="0"/>
+          <a:chExt cx="0" cy="0"/>
+        </a:xfrm>
+      </p:grpSpPr>
       <p:sp>
         <p:nvSpPr>
           <p:cNvPr id="2" name="Rectangle 1"/>
@@ -9781,6 +9952,7 @@
           <a:lstStyle/>
           <a:p>
             <a:pPr algn="ctr"/>
+            <a:endParaRPr/>
           </a:p>
         </p:txBody>
       </p:sp>
@@ -9892,6 +10064,7 @@
           <a:lstStyle/>
           <a:p>
             <a:pPr algn="ctr"/>
+            <a:endParaRPr/>
           </a:p>
         </p:txBody>
       </p:sp>
@@ -9935,6 +10108,7 @@
           <a:lstStyle/>
           <a:p>
             <a:pPr algn="ctr"/>
+            <a:endParaRPr/>
           </a:p>
         </p:txBody>
       </p:sp>
@@ -9981,7 +10155,7 @@
         <p:spPr>
           <a:xfrm>
             <a:off x="365760" y="960120"/>
-            <a:ext cx="5486400" cy="5166360"/>
+            <a:ext cx="5486400" cy="4178808"/>
           </a:xfrm>
           <a:prstGeom prst="rect">
             <a:avLst/>
@@ -10014,6 +10188,7 @@
           <a:lstStyle/>
           <a:p>
             <a:pPr algn="ctr"/>
+            <a:endParaRPr/>
           </a:p>
         </p:txBody>
       </p:sp>
@@ -10072,7 +10247,9 @@
             <a:spAutoFit/>
           </a:bodyPr>
           <a:lstStyle/>
-          <a:p/>
+          <a:p>
+            <a:endParaRPr/>
+          </a:p>
         </p:txBody>
       </p:sp>
       <p:sp>
@@ -10115,6 +10292,7 @@
           <a:lstStyle/>
           <a:p>
             <a:pPr algn="ctr"/>
+            <a:endParaRPr/>
           </a:p>
         </p:txBody>
       </p:sp>
@@ -10181,6 +10359,155 @@
                   <a:srgbClr val="1A376C"/>
                 </a:solidFill>
               </a:rPr>
+              <a:t>電圧オフセット計測の確認</a:t>
+            </a:r>
+          </a:p>
+        </p:txBody>
+      </p:sp>
+      <p:sp>
+        <p:nvSpPr>
+          <p:cNvPr id="14" name="TextBox 13"/>
+          <p:cNvSpPr txBox="1"/>
+          <p:nvPr/>
+        </p:nvSpPr>
+        <p:spPr>
+          <a:xfrm>
+            <a:off x="548640" y="1636776"/>
+            <a:ext cx="5029200" cy="1828800"/>
+          </a:xfrm>
+          <a:prstGeom prst="rect">
+            <a:avLst/>
+          </a:prstGeom>
+          <a:noFill/>
+        </p:spPr>
+        <p:txBody>
+          <a:bodyPr wrap="square">
+            <a:spAutoFit/>
+          </a:bodyPr>
+          <a:lstStyle/>
+          <a:p>
+            <a:pPr algn="l"/>
+            <a:r>
+              <a:rPr sz="1100" b="0" i="0">
+                <a:solidFill>
+                  <a:srgbClr val="1A1A2E"/>
+                </a:solidFill>
+              </a:rPr>
+              <a:t>「差圧センサの電圧オフセットを
+今計測しますか？ [y/N]: 」
+→ y を入力：5秒間の無風電圧を自動計測
+→ N を入力：config.json の設定値を使用</a:t>
+            </a:r>
+          </a:p>
+        </p:txBody>
+      </p:sp>
+      <p:sp>
+        <p:nvSpPr>
+          <p:cNvPr id="15" name="Rectangle 14"/>
+          <p:cNvSpPr/>
+          <p:nvPr/>
+        </p:nvSpPr>
+        <p:spPr>
+          <a:xfrm>
+            <a:off x="502920" y="3584448"/>
+            <a:ext cx="640080" cy="256032"/>
+          </a:xfrm>
+          <a:prstGeom prst="rect">
+            <a:avLst/>
+          </a:prstGeom>
+          <a:solidFill>
+            <a:srgbClr val="217A3C"/>
+          </a:solidFill>
+          <a:ln>
+            <a:noFill/>
+          </a:ln>
+        </p:spPr>
+        <p:style>
+          <a:lnRef idx="1">
+            <a:schemeClr val="accent1"/>
+          </a:lnRef>
+          <a:fillRef idx="3">
+            <a:schemeClr val="accent1"/>
+          </a:fillRef>
+          <a:effectRef idx="2">
+            <a:schemeClr val="accent1"/>
+          </a:effectRef>
+          <a:fontRef idx="minor">
+            <a:schemeClr val="lt1"/>
+          </a:fontRef>
+        </p:style>
+        <p:txBody>
+          <a:bodyPr rtlCol="0" anchor="ctr"/>
+          <a:lstStyle/>
+          <a:p>
+            <a:pPr algn="ctr"/>
+            <a:endParaRPr/>
+          </a:p>
+        </p:txBody>
+      </p:sp>
+      <p:sp>
+        <p:nvSpPr>
+          <p:cNvPr id="16" name="TextBox 15"/>
+          <p:cNvSpPr txBox="1"/>
+          <p:nvPr/>
+        </p:nvSpPr>
+        <p:spPr>
+          <a:xfrm>
+            <a:off x="502920" y="3584448"/>
+            <a:ext cx="640080" cy="256032"/>
+          </a:xfrm>
+          <a:prstGeom prst="rect">
+            <a:avLst/>
+          </a:prstGeom>
+          <a:noFill/>
+        </p:spPr>
+        <p:txBody>
+          <a:bodyPr wrap="square">
+            <a:spAutoFit/>
+          </a:bodyPr>
+          <a:lstStyle/>
+          <a:p>
+            <a:pPr algn="ctr"/>
+            <a:r>
+              <a:rPr sz="1000" b="1" i="0">
+                <a:solidFill>
+                  <a:srgbClr val="FFFFFF"/>
+                </a:solidFill>
+              </a:rPr>
+              <a:t>Step 2</a:t>
+            </a:r>
+          </a:p>
+        </p:txBody>
+      </p:sp>
+      <p:sp>
+        <p:nvSpPr>
+          <p:cNvPr id="17" name="TextBox 16"/>
+          <p:cNvSpPr txBox="1"/>
+          <p:nvPr/>
+        </p:nvSpPr>
+        <p:spPr>
+          <a:xfrm>
+            <a:off x="1188720" y="3584448"/>
+            <a:ext cx="4389120" cy="256032"/>
+          </a:xfrm>
+          <a:prstGeom prst="rect">
+            <a:avLst/>
+          </a:prstGeom>
+          <a:noFill/>
+        </p:spPr>
+        <p:txBody>
+          <a:bodyPr wrap="square">
+            <a:spAutoFit/>
+          </a:bodyPr>
+          <a:lstStyle/>
+          <a:p>
+            <a:pPr algn="l"/>
+            <a:r>
+              <a:rPr sz="1200" b="1" i="0">
+                <a:solidFill>
+                  <a:srgbClr val="1A376C"/>
+                </a:solidFill>
+              </a:rPr>
               <a:t>ブロワー停止の確認</a:t>
             </a:r>
           </a:p>
@@ -10188,13 +10515,13 @@
       </p:sp>
       <p:sp>
         <p:nvSpPr>
-          <p:cNvPr id="14" name="TextBox 13"/>
-          <p:cNvSpPr txBox="1"/>
-          <p:nvPr/>
-        </p:nvSpPr>
-        <p:spPr>
-          <a:xfrm>
-            <a:off x="548640" y="1636776"/>
+          <p:cNvPr id="18" name="TextBox 17"/>
+          <p:cNvSpPr txBox="1"/>
+          <p:nvPr/>
+        </p:nvSpPr>
+        <p:spPr>
+          <a:xfrm>
+            <a:off x="548640" y="3877056"/>
             <a:ext cx="5029200" cy="1828800"/>
           </a:xfrm>
           <a:prstGeom prst="rect">
@@ -10218,24 +10545,21 @@
               <a:t>「ブロワーが停止していることを
 確認してください。
 Enter を押してください: 」
-→ ブロワー停止を確認して Enter
-※ Pofst の直前にのみ、差圧センサの
-   電圧オフセットが自動計測されます
-   （ユーザー操作不要）</a:t>
-            </a:r>
-          </a:p>
-        </p:txBody>
-      </p:sp>
-      <p:sp>
-        <p:nvSpPr>
-          <p:cNvPr id="15" name="Rectangle 14"/>
+→ ブロワー停止を確認して Enter</a:t>
+            </a:r>
+          </a:p>
+        </p:txBody>
+      </p:sp>
+      <p:sp>
+        <p:nvSpPr>
+          <p:cNvPr id="19" name="Rectangle 18"/>
           <p:cNvSpPr/>
           <p:nvPr/>
         </p:nvSpPr>
         <p:spPr>
           <a:xfrm>
             <a:off x="6126480" y="960120"/>
-            <a:ext cx="5669280" cy="5166360"/>
+            <a:ext cx="5669280" cy="4178808"/>
           </a:xfrm>
           <a:prstGeom prst="rect">
             <a:avLst/>
@@ -10268,12 +10592,13 @@
           <a:lstStyle/>
           <a:p>
             <a:pPr algn="ctr"/>
-          </a:p>
-        </p:txBody>
-      </p:sp>
-      <p:sp>
-        <p:nvSpPr>
-          <p:cNvPr id="16" name="TextBox 15"/>
+            <a:endParaRPr/>
+          </a:p>
+        </p:txBody>
+      </p:sp>
+      <p:sp>
+        <p:nvSpPr>
+          <p:cNvPr id="20" name="TextBox 19"/>
           <p:cNvSpPr txBox="1"/>
           <p:nvPr/>
         </p:nvSpPr>
@@ -10307,7 +10632,7 @@
       </p:sp>
       <p:sp>
         <p:nvSpPr>
-          <p:cNvPr id="17" name="TextBox 16"/>
+          <p:cNvPr id="21" name="TextBox 20"/>
           <p:cNvSpPr txBox="1"/>
           <p:nvPr/>
         </p:nvSpPr>
@@ -10326,12 +10651,14 @@
             <a:spAutoFit/>
           </a:bodyPr>
           <a:lstStyle/>
-          <a:p/>
-        </p:txBody>
-      </p:sp>
-      <p:sp>
-        <p:nvSpPr>
-          <p:cNvPr id="18" name="Rectangle 17"/>
+          <a:p>
+            <a:endParaRPr/>
+          </a:p>
+        </p:txBody>
+      </p:sp>
+      <p:sp>
+        <p:nvSpPr>
+          <p:cNvPr id="22" name="Rectangle 21"/>
           <p:cNvSpPr/>
           <p:nvPr/>
         </p:nvSpPr>
@@ -10369,12 +10696,13 @@
           <a:lstStyle/>
           <a:p>
             <a:pPr algn="ctr"/>
-          </a:p>
-        </p:txBody>
-      </p:sp>
-      <p:sp>
-        <p:nvSpPr>
-          <p:cNvPr id="19" name="TextBox 18"/>
+            <a:endParaRPr/>
+          </a:p>
+        </p:txBody>
+      </p:sp>
+      <p:sp>
+        <p:nvSpPr>
+          <p:cNvPr id="23" name="TextBox 22"/>
           <p:cNvSpPr txBox="1"/>
           <p:nvPr/>
         </p:nvSpPr>
@@ -10408,7 +10736,7 @@
       </p:sp>
       <p:sp>
         <p:nvSpPr>
-          <p:cNvPr id="20" name="TextBox 19"/>
+          <p:cNvPr id="24" name="TextBox 23"/>
           <p:cNvSpPr txBox="1"/>
           <p:nvPr/>
         </p:nvSpPr>
@@ -10442,7 +10770,7 @@
       </p:sp>
       <p:sp>
         <p:nvSpPr>
-          <p:cNvPr id="21" name="TextBox 20"/>
+          <p:cNvPr id="25" name="TextBox 24"/>
           <p:cNvSpPr txBox="1"/>
           <p:nvPr/>
         </p:nvSpPr>
@@ -10481,14 +10809,14 @@
       </p:sp>
       <p:sp>
         <p:nvSpPr>
-          <p:cNvPr id="22" name="Rectangle 21"/>
+          <p:cNvPr id="26" name="Rectangle 25"/>
           <p:cNvSpPr/>
           <p:nvPr/>
         </p:nvSpPr>
         <p:spPr>
           <a:xfrm>
-            <a:off x="365760" y="6263640"/>
-            <a:ext cx="11430000" cy="713232"/>
+            <a:off x="365760" y="5446796"/>
+            <a:ext cx="11430000" cy="667512"/>
           </a:xfrm>
           <a:prstGeom prst="rect">
             <a:avLst/>
@@ -10521,18 +10849,19 @@
           <a:lstStyle/>
           <a:p>
             <a:pPr algn="ctr"/>
-          </a:p>
-        </p:txBody>
-      </p:sp>
-      <p:sp>
-        <p:nvSpPr>
-          <p:cNvPr id="23" name="TextBox 22"/>
-          <p:cNvSpPr txBox="1"/>
-          <p:nvPr/>
-        </p:nvSpPr>
-        <p:spPr>
-          <a:xfrm>
-            <a:off x="457200" y="6309360"/>
+            <a:endParaRPr/>
+          </a:p>
+        </p:txBody>
+      </p:sp>
+      <p:sp>
+        <p:nvSpPr>
+          <p:cNvPr id="27" name="TextBox 26"/>
+          <p:cNvSpPr txBox="1"/>
+          <p:nvPr/>
+        </p:nvSpPr>
+        <p:spPr>
+          <a:xfrm>
+            <a:off x="365760" y="5449824"/>
             <a:ext cx="11247120" cy="256032"/>
           </a:xfrm>
           <a:prstGeom prst="rect">
@@ -10548,25 +10877,41 @@
           <a:p>
             <a:pPr algn="l"/>
             <a:r>
-              <a:rPr sz="1100" b="1" i="0">
+              <a:rPr sz="1100" b="1" i="0" dirty="0">
                 <a:solidFill>
                   <a:srgbClr val="D96D00"/>
                 </a:solidFill>
               </a:rPr>
-              <a:t>⚠  有風フェーズのブロワー操作は 1回だけ（Pdata開始前のみ）</a:t>
-            </a:r>
-          </a:p>
-        </p:txBody>
-      </p:sp>
-      <p:sp>
-        <p:nvSpPr>
-          <p:cNvPr id="24" name="TextBox 23"/>
-          <p:cNvSpPr txBox="1"/>
-          <p:nvPr/>
-        </p:nvSpPr>
-        <p:spPr>
-          <a:xfrm>
-            <a:off x="502920" y="6556248"/>
+              <a:t>⚠  </a:t>
+            </a:r>
+            <a:r>
+              <a:rPr sz="1100" b="1" i="0" dirty="0" err="1">
+                <a:solidFill>
+                  <a:srgbClr val="D96D00"/>
+                </a:solidFill>
+              </a:rPr>
+              <a:t>有風フェーズのブロワー操作は</a:t>
+            </a:r>
+            <a:r>
+              <a:rPr sz="1100" b="1" i="0" dirty="0">
+                <a:solidFill>
+                  <a:srgbClr val="D96D00"/>
+                </a:solidFill>
+              </a:rPr>
+              <a:t> 1回だけ（Pdata開始前のみ）</a:t>
+            </a:r>
+          </a:p>
+        </p:txBody>
+      </p:sp>
+      <p:sp>
+        <p:nvSpPr>
+          <p:cNvPr id="28" name="TextBox 27"/>
+          <p:cNvSpPr txBox="1"/>
+          <p:nvPr/>
+        </p:nvSpPr>
+        <p:spPr>
+          <a:xfrm>
+            <a:off x="484505" y="5666252"/>
             <a:ext cx="11155680" cy="347472"/>
           </a:xfrm>
           <a:prstGeom prst="rect">
@@ -10586,12 +10931,28 @@
               </a:spcBef>
             </a:pPr>
             <a:r>
-              <a:rPr sz="1100">
-                <a:solidFill>
-                  <a:srgbClr val="1A1A2E"/>
-                </a:solidFill>
-              </a:rPr>
-              <a:t>Mdata はそのまま風を出し続けた状態で自動継続されます。</a:t>
+              <a:rPr sz="1100" dirty="0">
+                <a:solidFill>
+                  <a:srgbClr val="1A1A2E"/>
+                </a:solidFill>
+              </a:rPr>
+              <a:t>Mdata </a:t>
+            </a:r>
+            <a:r>
+              <a:rPr sz="1100" dirty="0" err="1">
+                <a:solidFill>
+                  <a:srgbClr val="1A1A2E"/>
+                </a:solidFill>
+              </a:rPr>
+              <a:t>はそのまま風を出し続けた状態で自動継続されます</a:t>
+            </a:r>
+            <a:r>
+              <a:rPr sz="1100" dirty="0">
+                <a:solidFill>
+                  <a:srgbClr val="1A1A2E"/>
+                </a:solidFill>
+              </a:rPr>
+              <a:t>。</a:t>
             </a:r>
           </a:p>
           <a:p>
@@ -10601,12 +10962,28 @@
               </a:spcBef>
             </a:pPr>
             <a:r>
-              <a:rPr sz="1100">
-                <a:solidFill>
-                  <a:srgbClr val="1A1A2E"/>
-                </a:solidFill>
-              </a:rPr>
-              <a:t>Mdata 終了後のブロワー停止はユーザーが手動で行ってください。</a:t>
+              <a:rPr sz="1100" dirty="0">
+                <a:solidFill>
+                  <a:srgbClr val="1A1A2E"/>
+                </a:solidFill>
+              </a:rPr>
+              <a:t>Mdata </a:t>
+            </a:r>
+            <a:r>
+              <a:rPr sz="1100" dirty="0" err="1">
+                <a:solidFill>
+                  <a:srgbClr val="1A1A2E"/>
+                </a:solidFill>
+              </a:rPr>
+              <a:t>終了後のブロワー停止はユーザーが手動で行ってください</a:t>
+            </a:r>
+            <a:r>
+              <a:rPr sz="1100" dirty="0">
+                <a:solidFill>
+                  <a:srgbClr val="1A1A2E"/>
+                </a:solidFill>
+              </a:rPr>
+              <a:t>。</a:t>
             </a:r>
           </a:p>
         </p:txBody>
@@ -10620,7 +10997,7 @@
 </file>
 
 <file path=ppt/slides/slide7.xml><?xml version="1.0" encoding="utf-8"?>
-<p:sld xmlns:a="http://schemas.openxmlformats.org/drawingml/2006/main" xmlns:p="http://schemas.openxmlformats.org/presentationml/2006/main" xmlns:r="http://schemas.openxmlformats.org/officeDocument/2006/relationships">
+<p:sld xmlns:a="http://schemas.openxmlformats.org/drawingml/2006/main" xmlns:r="http://schemas.openxmlformats.org/officeDocument/2006/relationships" xmlns:p="http://schemas.openxmlformats.org/presentationml/2006/main">
   <p:cSld>
     <p:spTree>
       <p:nvGrpSpPr>
@@ -10628,7 +11005,14 @@
         <p:cNvGrpSpPr/>
         <p:nvPr/>
       </p:nvGrpSpPr>
-      <p:grpSpPr/>
+      <p:grpSpPr>
+        <a:xfrm>
+          <a:off x="0" y="0"/>
+          <a:ext cx="0" cy="0"/>
+          <a:chOff x="0" y="0"/>
+          <a:chExt cx="0" cy="0"/>
+        </a:xfrm>
+      </p:grpSpPr>
       <p:sp>
         <p:nvSpPr>
           <p:cNvPr id="2" name="Rectangle 1"/>
@@ -10669,6 +11053,7 @@
           <a:lstStyle/>
           <a:p>
             <a:pPr algn="ctr"/>
+            <a:endParaRPr/>
           </a:p>
         </p:txBody>
       </p:sp>
@@ -10780,6 +11165,7 @@
           <a:lstStyle/>
           <a:p>
             <a:pPr algn="ctr"/>
+            <a:endParaRPr/>
           </a:p>
         </p:txBody>
       </p:sp>
@@ -10823,6 +11209,7 @@
           <a:lstStyle/>
           <a:p>
             <a:pPr algn="ctr"/>
+            <a:endParaRPr/>
           </a:p>
         </p:txBody>
       </p:sp>
@@ -10902,6 +11289,7 @@
           <a:lstStyle/>
           <a:p>
             <a:pPr algn="ctr"/>
+            <a:endParaRPr/>
           </a:p>
         </p:txBody>
       </p:sp>
@@ -10945,6 +11333,7 @@
           <a:lstStyle/>
           <a:p>
             <a:pPr algn="ctr"/>
+            <a:endParaRPr/>
           </a:p>
         </p:txBody>
       </p:sp>
@@ -11127,6 +11516,7 @@
           <a:lstStyle/>
           <a:p>
             <a:pPr algn="ctr"/>
+            <a:endParaRPr/>
           </a:p>
         </p:txBody>
       </p:sp>
@@ -11170,6 +11560,7 @@
           <a:lstStyle/>
           <a:p>
             <a:pPr algn="ctr"/>
+            <a:endParaRPr/>
           </a:p>
         </p:txBody>
       </p:sp>
@@ -11352,6 +11743,7 @@
           <a:lstStyle/>
           <a:p>
             <a:pPr algn="ctr"/>
+            <a:endParaRPr/>
           </a:p>
         </p:txBody>
       </p:sp>
@@ -11395,6 +11787,7 @@
           <a:lstStyle/>
           <a:p>
             <a:pPr algn="ctr"/>
+            <a:endParaRPr/>
           </a:p>
         </p:txBody>
       </p:sp>
@@ -11578,6 +11971,7 @@
           <a:lstStyle/>
           <a:p>
             <a:pPr algn="ctr"/>
+            <a:endParaRPr/>
           </a:p>
         </p:txBody>
       </p:sp>
@@ -11621,6 +12015,7 @@
           <a:lstStyle/>
           <a:p>
             <a:pPr algn="ctr"/>
+            <a:endParaRPr/>
           </a:p>
         </p:txBody>
       </p:sp>
@@ -11804,6 +12199,7 @@
           <a:lstStyle/>
           <a:p>
             <a:pPr algn="ctr"/>
+            <a:endParaRPr/>
           </a:p>
         </p:txBody>
       </p:sp>
@@ -11847,6 +12243,7 @@
           <a:lstStyle/>
           <a:p>
             <a:pPr algn="ctr"/>
+            <a:endParaRPr/>
           </a:p>
         </p:txBody>
       </p:sp>
@@ -11996,6 +12393,7 @@
           <a:lstStyle/>
           <a:p>
             <a:pPr algn="ctr"/>
+            <a:endParaRPr/>
           </a:p>
         </p:txBody>
       </p:sp>
@@ -12126,7 +12524,7 @@
                   <a:srgbClr val="1A1A2E"/>
                 </a:solidFill>
               </a:rPr>
-              <a:t>・「一時停止」ボタン → 押すと「再開」「停止」の2ボタンが現れる</a:t>
+              <a:t>・「一時停止」ボタン（クリックで計測を一時停止・再開できる）</a:t>
             </a:r>
           </a:p>
         </p:txBody>
@@ -12140,7 +12538,7 @@
 </file>
 
 <file path=ppt/slides/slide8.xml><?xml version="1.0" encoding="utf-8"?>
-<p:sld xmlns:a="http://schemas.openxmlformats.org/drawingml/2006/main" xmlns:p="http://schemas.openxmlformats.org/presentationml/2006/main" xmlns:r="http://schemas.openxmlformats.org/officeDocument/2006/relationships">
+<p:sld xmlns:a="http://schemas.openxmlformats.org/drawingml/2006/main" xmlns:r="http://schemas.openxmlformats.org/officeDocument/2006/relationships" xmlns:p="http://schemas.openxmlformats.org/presentationml/2006/main">
   <p:cSld>
     <p:spTree>
       <p:nvGrpSpPr>
@@ -12148,7 +12546,14 @@
         <p:cNvGrpSpPr/>
         <p:nvPr/>
       </p:nvGrpSpPr>
-      <p:grpSpPr/>
+      <p:grpSpPr>
+        <a:xfrm>
+          <a:off x="0" y="0"/>
+          <a:ext cx="0" cy="0"/>
+          <a:chOff x="0" y="0"/>
+          <a:chExt cx="0" cy="0"/>
+        </a:xfrm>
+      </p:grpSpPr>
       <p:sp>
         <p:nvSpPr>
           <p:cNvPr id="2" name="Rectangle 1"/>
@@ -12189,6 +12594,7 @@
           <a:lstStyle/>
           <a:p>
             <a:pPr algn="ctr"/>
+            <a:endParaRPr/>
           </a:p>
         </p:txBody>
       </p:sp>
@@ -12300,6 +12706,7 @@
           <a:lstStyle/>
           <a:p>
             <a:pPr algn="ctr"/>
+            <a:endParaRPr/>
           </a:p>
         </p:txBody>
       </p:sp>
@@ -12343,6 +12750,7 @@
           <a:lstStyle/>
           <a:p>
             <a:pPr algn="ctr"/>
+            <a:endParaRPr/>
           </a:p>
         </p:txBody>
       </p:sp>
@@ -12388,8 +12796,8 @@
         </p:nvSpPr>
         <p:spPr>
           <a:xfrm>
-            <a:off x="365760" y="960120"/>
-            <a:ext cx="11430000" cy="1005840"/>
+            <a:off x="365760" y="822960"/>
+            <a:ext cx="11430000" cy="1143000"/>
           </a:xfrm>
           <a:prstGeom prst="rect">
             <a:avLst/>
@@ -12422,6 +12830,7 @@
           <a:lstStyle/>
           <a:p>
             <a:pPr algn="ctr"/>
+            <a:endParaRPr/>
           </a:p>
         </p:txBody>
       </p:sp>
@@ -12433,7 +12842,7 @@
         </p:nvSpPr>
         <p:spPr>
           <a:xfrm>
-            <a:off x="548640" y="987552"/>
+            <a:off x="548640" y="877824"/>
             <a:ext cx="10972800" cy="320040"/>
           </a:xfrm>
           <a:prstGeom prst="rect">
@@ -12449,12 +12858,28 @@
           <a:p>
             <a:pPr algn="l"/>
             <a:r>
-              <a:rPr sz="1200" b="1" i="0">
+              <a:rPr sz="1200" b="1" i="0" dirty="0">
                 <a:solidFill>
                   <a:srgbClr val="C0392B"/>
                 </a:solidFill>
               </a:rPr>
-              <a:t>⚠  エラー発生時 または「停止」ボタン押下時にプログラムが表示するメッセージ（例）</a:t>
+              <a:t>⚠  </a:t>
+            </a:r>
+            <a:r>
+              <a:rPr sz="1200" b="1" i="0" dirty="0" err="1">
+                <a:solidFill>
+                  <a:srgbClr val="C0392B"/>
+                </a:solidFill>
+              </a:rPr>
+              <a:t>エラー発生時にプログラムが表示するメッセージ（例</a:t>
+            </a:r>
+            <a:r>
+              <a:rPr sz="1200" b="1" i="0" dirty="0">
+                <a:solidFill>
+                  <a:srgbClr val="C0392B"/>
+                </a:solidFill>
+              </a:rPr>
+              <a:t>）</a:t>
             </a:r>
           </a:p>
         </p:txBody>
@@ -12467,7 +12892,7 @@
         </p:nvSpPr>
         <p:spPr>
           <a:xfrm>
-            <a:off x="548640" y="1298448"/>
+            <a:off x="564494" y="1037844"/>
             <a:ext cx="10972800" cy="594360"/>
           </a:xfrm>
           <a:prstGeom prst="rect">
@@ -12483,17 +12908,206 @@
           <a:p>
             <a:pPr algn="l"/>
             <a:r>
-              <a:rPr sz="1050" b="0" i="0">
+              <a:rPr sz="1050" b="0" i="0" dirty="0">
                 <a:solidFill>
                   <a:srgbClr val="1A1A2E"/>
                 </a:solidFill>
               </a:rPr>
               <a:t>════════════════════════════════════════
-  [エラー] 計測点 5/61 でエラーが発生しました
-  フェーズ: Pdata  内容: Timeout reading from serial port
+  [</a:t>
+            </a:r>
+            <a:r>
+              <a:rPr sz="1050" b="0" i="0" dirty="0" err="1">
+                <a:solidFill>
+                  <a:srgbClr val="1A1A2E"/>
+                </a:solidFill>
+              </a:rPr>
+              <a:t>エラ</a:t>
+            </a:r>
+            <a:r>
+              <a:rPr sz="1050" b="0" i="0" dirty="0">
+                <a:solidFill>
+                  <a:srgbClr val="1A1A2E"/>
+                </a:solidFill>
+              </a:rPr>
+              <a:t>ー] </a:t>
+            </a:r>
+            <a:r>
+              <a:rPr sz="1050" b="0" i="0" dirty="0" err="1">
+                <a:solidFill>
+                  <a:srgbClr val="1A1A2E"/>
+                </a:solidFill>
+              </a:rPr>
+              <a:t>計測点</a:t>
+            </a:r>
+            <a:r>
+              <a:rPr sz="1050" b="0" i="0" dirty="0">
+                <a:solidFill>
+                  <a:srgbClr val="1A1A2E"/>
+                </a:solidFill>
+              </a:rPr>
+              <a:t> 5/61 </a:t>
+            </a:r>
+            <a:r>
+              <a:rPr sz="1050" b="0" i="0" dirty="0" err="1">
+                <a:solidFill>
+                  <a:srgbClr val="1A1A2E"/>
+                </a:solidFill>
+              </a:rPr>
+              <a:t>でエラーが発生しました</a:t>
+            </a:r>
+            <a:r>
+              <a:rPr sz="1050" b="0" i="0" dirty="0">
+                <a:solidFill>
+                  <a:srgbClr val="1A1A2E"/>
+                </a:solidFill>
+              </a:rPr>
+              <a:t>
+  </a:t>
+            </a:r>
+            <a:r>
+              <a:rPr sz="1050" b="0" i="0" dirty="0" err="1">
+                <a:solidFill>
+                  <a:srgbClr val="1A1A2E"/>
+                </a:solidFill>
+              </a:rPr>
+              <a:t>フェーズ</a:t>
+            </a:r>
+            <a:r>
+              <a:rPr sz="1050" b="0" i="0" dirty="0">
+                <a:solidFill>
+                  <a:srgbClr val="1A1A2E"/>
+                </a:solidFill>
+              </a:rPr>
+              <a:t>: </a:t>
+            </a:r>
+            <a:r>
+              <a:rPr sz="1050" b="0" i="0" dirty="0" err="1">
+                <a:solidFill>
+                  <a:srgbClr val="1A1A2E"/>
+                </a:solidFill>
+              </a:rPr>
+              <a:t>Pdata</a:t>
+            </a:r>
+            <a:r>
+              <a:rPr sz="1050" b="0" i="0" dirty="0">
+                <a:solidFill>
+                  <a:srgbClr val="1A1A2E"/>
+                </a:solidFill>
+              </a:rPr>
+              <a:t>  </a:t>
+            </a:r>
+            <a:r>
+              <a:rPr sz="1050" b="0" i="0" dirty="0" err="1">
+                <a:solidFill>
+                  <a:srgbClr val="1A1A2E"/>
+                </a:solidFill>
+              </a:rPr>
+              <a:t>内容</a:t>
+            </a:r>
+            <a:r>
+              <a:rPr sz="1050" b="0" i="0" dirty="0">
+                <a:solidFill>
+                  <a:srgbClr val="1A1A2E"/>
+                </a:solidFill>
+              </a:rPr>
+              <a:t>: Timeout reading from serial port
 ════════════════════════════════════════
-どうしますか？  R: 再試行  S: スキップ  P: フェーズ再開  C: フェーズ選択  Q: 終了</a:t>
-            </a:r>
+</a:t>
+            </a:r>
+            <a:r>
+              <a:rPr sz="1050" b="0" i="0" dirty="0" err="1">
+                <a:solidFill>
+                  <a:srgbClr val="1A1A2E"/>
+                </a:solidFill>
+              </a:rPr>
+              <a:t>どうしますか</a:t>
+            </a:r>
+            <a:r>
+              <a:rPr sz="1050" b="0" i="0" dirty="0">
+                <a:solidFill>
+                  <a:srgbClr val="1A1A2E"/>
+                </a:solidFill>
+              </a:rPr>
+              <a:t>？  R: </a:t>
+            </a:r>
+            <a:r>
+              <a:rPr sz="1050" b="0" i="0" dirty="0" err="1">
+                <a:solidFill>
+                  <a:srgbClr val="1A1A2E"/>
+                </a:solidFill>
+              </a:rPr>
+              <a:t>再試行</a:t>
+            </a:r>
+            <a:r>
+              <a:rPr sz="1050" b="0" i="0" dirty="0">
+                <a:solidFill>
+                  <a:srgbClr val="1A1A2E"/>
+                </a:solidFill>
+              </a:rPr>
+              <a:t>  S: </a:t>
+            </a:r>
+            <a:r>
+              <a:rPr sz="1050" b="0" i="0" dirty="0" err="1">
+                <a:solidFill>
+                  <a:srgbClr val="1A1A2E"/>
+                </a:solidFill>
+              </a:rPr>
+              <a:t>スキップ</a:t>
+            </a:r>
+            <a:r>
+              <a:rPr sz="1050" b="0" i="0" dirty="0">
+                <a:solidFill>
+                  <a:srgbClr val="1A1A2E"/>
+                </a:solidFill>
+              </a:rPr>
+              <a:t>  P: </a:t>
+            </a:r>
+            <a:r>
+              <a:rPr sz="1050" b="0" i="0" dirty="0" err="1">
+                <a:solidFill>
+                  <a:srgbClr val="1A1A2E"/>
+                </a:solidFill>
+              </a:rPr>
+              <a:t>フェーズ再開</a:t>
+            </a:r>
+            <a:r>
+              <a:rPr sz="1050" b="0" i="0" dirty="0">
+                <a:solidFill>
+                  <a:srgbClr val="1A1A2E"/>
+                </a:solidFill>
+              </a:rPr>
+              <a:t>  C: </a:t>
+            </a:r>
+            <a:r>
+              <a:rPr sz="1050" b="0" i="0" dirty="0" err="1">
+                <a:solidFill>
+                  <a:srgbClr val="1A1A2E"/>
+                </a:solidFill>
+              </a:rPr>
+              <a:t>フェーズ選択</a:t>
+            </a:r>
+            <a:r>
+              <a:rPr sz="1050" b="0" i="0" dirty="0">
+                <a:solidFill>
+                  <a:srgbClr val="1A1A2E"/>
+                </a:solidFill>
+              </a:rPr>
+              <a:t>  Q: </a:t>
+            </a:r>
+            <a:r>
+              <a:rPr sz="1050" b="0" i="0" dirty="0" err="1">
+                <a:solidFill>
+                  <a:srgbClr val="1A1A2E"/>
+                </a:solidFill>
+              </a:rPr>
+              <a:t>終了</a:t>
+            </a:r>
+            <a:endParaRPr sz="1050" b="0" i="0" dirty="0">
+              <a:solidFill>
+                <a:srgbClr val="1A1A2E"/>
+              </a:solidFill>
+            </a:endParaRPr>
           </a:p>
         </p:txBody>
       </p:sp>
@@ -12539,6 +13153,7 @@
           <a:lstStyle/>
           <a:p>
             <a:pPr algn="ctr"/>
+            <a:endParaRPr/>
           </a:p>
         </p:txBody>
       </p:sp>
@@ -12582,6 +13197,7 @@
           <a:lstStyle/>
           <a:p>
             <a:pPr algn="ctr"/>
+            <a:endParaRPr/>
           </a:p>
         </p:txBody>
       </p:sp>
@@ -12730,6 +13346,7 @@
           <a:lstStyle/>
           <a:p>
             <a:pPr algn="ctr"/>
+            <a:endParaRPr/>
           </a:p>
         </p:txBody>
       </p:sp>
@@ -12773,6 +13390,7 @@
           <a:lstStyle/>
           <a:p>
             <a:pPr algn="ctr"/>
+            <a:endParaRPr/>
           </a:p>
         </p:txBody>
       </p:sp>
@@ -12921,6 +13539,7 @@
           <a:lstStyle/>
           <a:p>
             <a:pPr algn="ctr"/>
+            <a:endParaRPr/>
           </a:p>
         </p:txBody>
       </p:sp>
@@ -12964,6 +13583,7 @@
           <a:lstStyle/>
           <a:p>
             <a:pPr algn="ctr"/>
+            <a:endParaRPr/>
           </a:p>
         </p:txBody>
       </p:sp>
@@ -13113,6 +13733,7 @@
           <a:lstStyle/>
           <a:p>
             <a:pPr algn="ctr"/>
+            <a:endParaRPr/>
           </a:p>
         </p:txBody>
       </p:sp>
@@ -13156,6 +13777,7 @@
           <a:lstStyle/>
           <a:p>
             <a:pPr algn="ctr"/>
+            <a:endParaRPr/>
           </a:p>
         </p:txBody>
       </p:sp>
@@ -13305,6 +13927,7 @@
           <a:lstStyle/>
           <a:p>
             <a:pPr algn="ctr"/>
+            <a:endParaRPr/>
           </a:p>
         </p:txBody>
       </p:sp>
@@ -13348,6 +13971,7 @@
           <a:lstStyle/>
           <a:p>
             <a:pPr algn="ctr"/>
+            <a:endParaRPr/>
           </a:p>
         </p:txBody>
       </p:sp>
@@ -13496,6 +14120,7 @@
           <a:lstStyle/>
           <a:p>
             <a:pPr algn="ctr"/>
+            <a:endParaRPr/>
           </a:p>
         </p:txBody>
       </p:sp>
@@ -13595,7 +14220,7 @@
 </file>
 
 <file path=ppt/slides/slide9.xml><?xml version="1.0" encoding="utf-8"?>
-<p:sld xmlns:a="http://schemas.openxmlformats.org/drawingml/2006/main" xmlns:p="http://schemas.openxmlformats.org/presentationml/2006/main" xmlns:r="http://schemas.openxmlformats.org/officeDocument/2006/relationships">
+<p:sld xmlns:a="http://schemas.openxmlformats.org/drawingml/2006/main" xmlns:r="http://schemas.openxmlformats.org/officeDocument/2006/relationships" xmlns:p="http://schemas.openxmlformats.org/presentationml/2006/main">
   <p:cSld>
     <p:spTree>
       <p:nvGrpSpPr>
@@ -13603,7 +14228,14 @@
         <p:cNvGrpSpPr/>
         <p:nvPr/>
       </p:nvGrpSpPr>
-      <p:grpSpPr/>
+      <p:grpSpPr>
+        <a:xfrm>
+          <a:off x="0" y="0"/>
+          <a:ext cx="0" cy="0"/>
+          <a:chOff x="0" y="0"/>
+          <a:chExt cx="0" cy="0"/>
+        </a:xfrm>
+      </p:grpSpPr>
       <p:sp>
         <p:nvSpPr>
           <p:cNvPr id="2" name="Rectangle 1"/>
@@ -13644,6 +14276,7 @@
           <a:lstStyle/>
           <a:p>
             <a:pPr algn="ctr"/>
+            <a:endParaRPr/>
           </a:p>
         </p:txBody>
       </p:sp>
@@ -13755,6 +14388,7 @@
           <a:lstStyle/>
           <a:p>
             <a:pPr algn="ctr"/>
+            <a:endParaRPr/>
           </a:p>
         </p:txBody>
       </p:sp>
@@ -13798,6 +14432,7 @@
           <a:lstStyle/>
           <a:p>
             <a:pPr algn="ctr"/>
+            <a:endParaRPr/>
           </a:p>
         </p:txBody>
       </p:sp>
@@ -13844,7 +14479,7 @@
         <p:spPr>
           <a:xfrm>
             <a:off x="365760" y="960120"/>
-            <a:ext cx="11430000" cy="1828800"/>
+            <a:ext cx="11430000" cy="1307592"/>
           </a:xfrm>
           <a:prstGeom prst="rect">
             <a:avLst/>
@@ -13877,6 +14512,7 @@
           <a:lstStyle/>
           <a:p>
             <a:pPr algn="ctr"/>
+            <a:endParaRPr/>
           </a:p>
         </p:txBody>
       </p:sp>
@@ -13942,13 +14578,82 @@
               </a:spcBef>
             </a:pPr>
             <a:r>
-              <a:rPr sz="1300">
-                <a:solidFill>
-                  <a:srgbClr val="1A1A2E"/>
-                </a:solidFill>
-              </a:rPr>
-              <a:t>【初回のみ】post_process/venv/ に 64bit Python 仮想環境を自動作成</a:t>
-            </a:r>
+              <a:rPr sz="1300" dirty="0" err="1">
+                <a:solidFill>
+                  <a:srgbClr val="1A1A2E"/>
+                </a:solidFill>
+              </a:rPr>
+              <a:t>差圧電圧サマリ</a:t>
+            </a:r>
+            <a:r>
+              <a:rPr sz="1300" dirty="0">
+                <a:solidFill>
+                  <a:srgbClr val="1A1A2E"/>
+                </a:solidFill>
+              </a:rPr>
+              <a:t>ー（</a:t>
+            </a:r>
+            <a:r>
+              <a:rPr sz="1300" dirty="0" err="1">
+                <a:solidFill>
+                  <a:srgbClr val="1A1A2E"/>
+                </a:solidFill>
+              </a:rPr>
+              <a:t>Pdata</a:t>
+            </a:r>
+            <a:r>
+              <a:rPr sz="1300" dirty="0">
+                <a:solidFill>
+                  <a:srgbClr val="1A1A2E"/>
+                </a:solidFill>
+              </a:rPr>
+              <a:t> / </a:t>
+            </a:r>
+            <a:r>
+              <a:rPr sz="1300" dirty="0" err="1">
+                <a:solidFill>
+                  <a:srgbClr val="1A1A2E"/>
+                </a:solidFill>
+              </a:rPr>
+              <a:t>Mdata</a:t>
+            </a:r>
+            <a:r>
+              <a:rPr sz="1300" dirty="0">
+                <a:solidFill>
+                  <a:srgbClr val="1A1A2E"/>
+                </a:solidFill>
+              </a:rPr>
+              <a:t> </a:t>
+            </a:r>
+            <a:r>
+              <a:rPr sz="1300" dirty="0" err="1">
+                <a:solidFill>
+                  <a:srgbClr val="1A1A2E"/>
+                </a:solidFill>
+              </a:rPr>
+              <a:t>の</a:t>
+            </a:r>
+            <a:r>
+              <a:rPr sz="1300" dirty="0">
+                <a:solidFill>
+                  <a:srgbClr val="1A1A2E"/>
+                </a:solidFill>
+              </a:rPr>
+              <a:t> </a:t>
+            </a:r>
+            <a:r>
+              <a:rPr sz="1300" dirty="0" err="1">
+                <a:solidFill>
+                  <a:srgbClr val="1A1A2E"/>
+                </a:solidFill>
+              </a:rPr>
+              <a:t>volt_summary.csv）を読み込む</a:t>
+            </a:r>
+            <a:endParaRPr sz="1300" dirty="0">
+              <a:solidFill>
+                <a:srgbClr val="1A1A2E"/>
+              </a:solidFill>
+            </a:endParaRPr>
           </a:p>
           <a:p>
             <a:pPr>
@@ -13957,13 +14662,34 @@
               </a:spcBef>
             </a:pPr>
             <a:r>
-              <a:rPr sz="1300">
-                <a:solidFill>
-                  <a:srgbClr val="1A1A2E"/>
-                </a:solidFill>
-              </a:rPr>
-              <a:t>          requirements.txt から pandas / numpy / scipy 等を pip install</a:t>
-            </a:r>
+              <a:rPr sz="1300" dirty="0" err="1">
+                <a:solidFill>
+                  <a:srgbClr val="1A1A2E"/>
+                </a:solidFill>
+              </a:rPr>
+              <a:t>experiment_log.json</a:t>
+            </a:r>
+            <a:r>
+              <a:rPr sz="1300" dirty="0">
+                <a:solidFill>
+                  <a:srgbClr val="1A1A2E"/>
+                </a:solidFill>
+              </a:rPr>
+              <a:t> </a:t>
+            </a:r>
+            <a:r>
+              <a:rPr sz="1300" dirty="0" err="1">
+                <a:solidFill>
+                  <a:srgbClr val="1A1A2E"/>
+                </a:solidFill>
+              </a:rPr>
+              <a:t>から気温・気圧・校正定数を取得</a:t>
+            </a:r>
+            <a:endParaRPr sz="1300" dirty="0">
+              <a:solidFill>
+                <a:srgbClr val="1A1A2E"/>
+              </a:solidFill>
+            </a:endParaRPr>
           </a:p>
           <a:p>
             <a:pPr>
@@ -13972,13 +14698,66 @@
               </a:spcBef>
             </a:pPr>
             <a:r>
-              <a:rPr sz="1300">
-                <a:solidFill>
-                  <a:srgbClr val="1A1A2E"/>
-                </a:solidFill>
-              </a:rPr>
-              <a:t>差圧電圧サマリー（Pdata / Mdata の volt_summary.csv）を読み込む</a:t>
-            </a:r>
+              <a:rPr sz="1300" dirty="0" err="1">
+                <a:solidFill>
+                  <a:srgbClr val="1A1A2E"/>
+                </a:solidFill>
+              </a:rPr>
+              <a:t>各計測点の差圧電圧</a:t>
+            </a:r>
+            <a:r>
+              <a:rPr sz="1300" dirty="0">
+                <a:solidFill>
+                  <a:srgbClr val="1A1A2E"/>
+                </a:solidFill>
+              </a:rPr>
+              <a:t> → </a:t>
+            </a:r>
+            <a:r>
+              <a:rPr sz="1300" dirty="0" err="1">
+                <a:solidFill>
+                  <a:srgbClr val="1A1A2E"/>
+                </a:solidFill>
+              </a:rPr>
+              <a:t>動圧水柱高さ</a:t>
+            </a:r>
+            <a:r>
+              <a:rPr sz="1300" dirty="0">
+                <a:solidFill>
+                  <a:srgbClr val="1A1A2E"/>
+                </a:solidFill>
+              </a:rPr>
+              <a:t> → </a:t>
+            </a:r>
+            <a:r>
+              <a:rPr sz="1300" dirty="0" err="1">
+                <a:solidFill>
+                  <a:srgbClr val="1A1A2E"/>
+                </a:solidFill>
+              </a:rPr>
+              <a:t>風速</a:t>
+            </a:r>
+            <a:r>
+              <a:rPr sz="1300" dirty="0">
+                <a:solidFill>
+                  <a:srgbClr val="1A1A2E"/>
+                </a:solidFill>
+              </a:rPr>
+              <a:t> U [m/s] </a:t>
+            </a:r>
+            <a:r>
+              <a:rPr sz="1300" dirty="0" err="1">
+                <a:solidFill>
+                  <a:srgbClr val="1A1A2E"/>
+                </a:solidFill>
+              </a:rPr>
+              <a:t>を計算</a:t>
+            </a:r>
+            <a:endParaRPr sz="1300" dirty="0">
+              <a:solidFill>
+                <a:srgbClr val="1A1A2E"/>
+              </a:solidFill>
+            </a:endParaRPr>
           </a:p>
           <a:p>
             <a:pPr>
@@ -13987,43 +14766,34 @@
               </a:spcBef>
             </a:pPr>
             <a:r>
-              <a:rPr sz="1300">
-                <a:solidFill>
-                  <a:srgbClr val="1A1A2E"/>
-                </a:solidFill>
-              </a:rPr>
-              <a:t>experiment_log.json から気温・気圧・校正定数を取得</a:t>
-            </a:r>
-          </a:p>
-          <a:p>
-            <a:pPr>
-              <a:spcBef>
-                <a:spcPts val="200"/>
-              </a:spcBef>
-            </a:pPr>
-            <a:r>
-              <a:rPr sz="1300">
-                <a:solidFill>
-                  <a:srgbClr val="1A1A2E"/>
-                </a:solidFill>
-              </a:rPr>
-              <a:t>各計測点の差圧電圧 → 動圧水柱高さ → 風速 U [m/s] を計算</a:t>
-            </a:r>
-          </a:p>
-          <a:p>
-            <a:pPr>
-              <a:spcBef>
-                <a:spcPts val="200"/>
-              </a:spcBef>
-            </a:pPr>
-            <a:r>
-              <a:rPr sz="1300">
-                <a:solidFill>
-                  <a:srgbClr val="1A1A2E"/>
-                </a:solidFill>
-              </a:rPr>
-              <a:t>windspeed.csv として実験フォルダに保存</a:t>
-            </a:r>
+              <a:rPr sz="1300" dirty="0" err="1">
+                <a:solidFill>
+                  <a:srgbClr val="1A1A2E"/>
+                </a:solidFill>
+              </a:rPr>
+              <a:t>windspeed.csv</a:t>
+            </a:r>
+            <a:r>
+              <a:rPr sz="1300" dirty="0">
+                <a:solidFill>
+                  <a:srgbClr val="1A1A2E"/>
+                </a:solidFill>
+              </a:rPr>
+              <a:t> </a:t>
+            </a:r>
+            <a:r>
+              <a:rPr sz="1300" dirty="0" err="1">
+                <a:solidFill>
+                  <a:srgbClr val="1A1A2E"/>
+                </a:solidFill>
+              </a:rPr>
+              <a:t>として実験フォルダに保存</a:t>
+            </a:r>
+            <a:endParaRPr sz="1300" dirty="0">
+              <a:solidFill>
+                <a:srgbClr val="1A1A2E"/>
+              </a:solidFill>
+            </a:endParaRPr>
           </a:p>
         </p:txBody>
       </p:sp>
@@ -14035,8 +14805,8 @@
         </p:nvSpPr>
         <p:spPr>
           <a:xfrm>
-            <a:off x="365760" y="2926080"/>
-            <a:ext cx="11430000" cy="1828800"/>
+            <a:off x="365760" y="2381299"/>
+            <a:ext cx="11430000" cy="1504901"/>
           </a:xfrm>
           <a:prstGeom prst="rect">
             <a:avLst/>
@@ -14069,6 +14839,7 @@
           <a:lstStyle/>
           <a:p>
             <a:pPr algn="ctr"/>
+            <a:endParaRPr/>
           </a:p>
         </p:txBody>
       </p:sp>
@@ -14080,7 +14851,7 @@
         </p:nvSpPr>
         <p:spPr>
           <a:xfrm>
-            <a:off x="457200" y="2971800"/>
+            <a:off x="457200" y="2459736"/>
             <a:ext cx="11247120" cy="256032"/>
           </a:xfrm>
           <a:prstGeom prst="rect">
@@ -14096,7 +14867,7 @@
           <a:p>
             <a:pPr algn="l"/>
             <a:r>
-              <a:rPr sz="1100" b="1" i="0">
+              <a:rPr sz="1100" b="1" i="0" dirty="0">
                 <a:solidFill>
                   <a:srgbClr val="2E6EB4"/>
                 </a:solidFill>
@@ -14114,7 +14885,7 @@
         </p:nvSpPr>
         <p:spPr>
           <a:xfrm>
-            <a:off x="502920" y="3218688"/>
+            <a:off x="502920" y="2807208"/>
             <a:ext cx="11155680" cy="1463040"/>
           </a:xfrm>
           <a:prstGeom prst="rect">
@@ -14134,13 +14905,66 @@
               </a:spcBef>
             </a:pPr>
             <a:r>
-              <a:rPr sz="1300">
-                <a:solidFill>
-                  <a:srgbClr val="1A1A2E"/>
-                </a:solidFill>
-              </a:rPr>
-              <a:t>windspeed.csv と data/ 内の 6軸センサ CSV を読み込む</a:t>
-            </a:r>
+              <a:rPr sz="1300" dirty="0" err="1">
+                <a:solidFill>
+                  <a:srgbClr val="1A1A2E"/>
+                </a:solidFill>
+              </a:rPr>
+              <a:t>windspeed.csv</a:t>
+            </a:r>
+            <a:r>
+              <a:rPr sz="1300" dirty="0">
+                <a:solidFill>
+                  <a:srgbClr val="1A1A2E"/>
+                </a:solidFill>
+              </a:rPr>
+              <a:t> </a:t>
+            </a:r>
+            <a:r>
+              <a:rPr sz="1300" dirty="0" err="1">
+                <a:solidFill>
+                  <a:srgbClr val="1A1A2E"/>
+                </a:solidFill>
+              </a:rPr>
+              <a:t>と</a:t>
+            </a:r>
+            <a:r>
+              <a:rPr sz="1300" dirty="0">
+                <a:solidFill>
+                  <a:srgbClr val="1A1A2E"/>
+                </a:solidFill>
+              </a:rPr>
+              <a:t> data/ </a:t>
+            </a:r>
+            <a:r>
+              <a:rPr sz="1300" dirty="0" err="1">
+                <a:solidFill>
+                  <a:srgbClr val="1A1A2E"/>
+                </a:solidFill>
+              </a:rPr>
+              <a:t>内の</a:t>
+            </a:r>
+            <a:r>
+              <a:rPr sz="1300" dirty="0">
+                <a:solidFill>
+                  <a:srgbClr val="1A1A2E"/>
+                </a:solidFill>
+              </a:rPr>
+              <a:t> 6軸センサ CSV </a:t>
+            </a:r>
+            <a:r>
+              <a:rPr sz="1300" dirty="0" err="1">
+                <a:solidFill>
+                  <a:srgbClr val="1A1A2E"/>
+                </a:solidFill>
+              </a:rPr>
+              <a:t>を読み込む</a:t>
+            </a:r>
+            <a:endParaRPr sz="1300" dirty="0">
+              <a:solidFill>
+                <a:srgbClr val="1A1A2E"/>
+              </a:solidFill>
+            </a:endParaRPr>
           </a:p>
           <a:p>
             <a:pPr>
@@ -14149,13 +14973,50 @@
               </a:spcBef>
             </a:pPr>
             <a:r>
-              <a:rPr sz="1300">
-                <a:solidFill>
-                  <a:srgbClr val="1A1A2E"/>
-                </a:solidFill>
-              </a:rPr>
-              <a:t>オフセット補正（Pofst / Mofst データを差し引き）を実施</a:t>
-            </a:r>
+              <a:rPr sz="1300" dirty="0" err="1">
+                <a:solidFill>
+                  <a:srgbClr val="1A1A2E"/>
+                </a:solidFill>
+              </a:rPr>
+              <a:t>オフセット補正（Pofst</a:t>
+            </a:r>
+            <a:r>
+              <a:rPr sz="1300" dirty="0">
+                <a:solidFill>
+                  <a:srgbClr val="1A1A2E"/>
+                </a:solidFill>
+              </a:rPr>
+              <a:t> / </a:t>
+            </a:r>
+            <a:r>
+              <a:rPr sz="1300" dirty="0" err="1">
+                <a:solidFill>
+                  <a:srgbClr val="1A1A2E"/>
+                </a:solidFill>
+              </a:rPr>
+              <a:t>Mofst</a:t>
+            </a:r>
+            <a:r>
+              <a:rPr sz="1300" dirty="0">
+                <a:solidFill>
+                  <a:srgbClr val="1A1A2E"/>
+                </a:solidFill>
+              </a:rPr>
+              <a:t> </a:t>
+            </a:r>
+            <a:r>
+              <a:rPr sz="1300" dirty="0" err="1">
+                <a:solidFill>
+                  <a:srgbClr val="1A1A2E"/>
+                </a:solidFill>
+              </a:rPr>
+              <a:t>データを差し引き）を実施</a:t>
+            </a:r>
+            <a:endParaRPr sz="1300" dirty="0">
+              <a:solidFill>
+                <a:srgbClr val="1A1A2E"/>
+              </a:solidFill>
+            </a:endParaRPr>
           </a:p>
           <a:p>
             <a:pPr>
@@ -14164,13 +15025,26 @@
               </a:spcBef>
             </a:pPr>
             <a:r>
-              <a:rPr sz="1300">
-                <a:solidFill>
-                  <a:srgbClr val="1A1A2E"/>
-                </a:solidFill>
-              </a:rPr>
-              <a:t>Cl, Cd, Cm などの空力係数を迎角ごとに計算</a:t>
-            </a:r>
+              <a:rPr sz="1300" dirty="0">
+                <a:solidFill>
+                  <a:srgbClr val="1A1A2E"/>
+                </a:solidFill>
+              </a:rPr>
+              <a:t>Cl, Cd, Cm </a:t>
+            </a:r>
+            <a:r>
+              <a:rPr sz="1300" dirty="0" err="1">
+                <a:solidFill>
+                  <a:srgbClr val="1A1A2E"/>
+                </a:solidFill>
+              </a:rPr>
+              <a:t>などの空力係数を迎角ごとに計算</a:t>
+            </a:r>
+            <a:endParaRPr sz="1300" dirty="0">
+              <a:solidFill>
+                <a:srgbClr val="1A1A2E"/>
+              </a:solidFill>
+            </a:endParaRPr>
           </a:p>
           <a:p>
             <a:pPr>
@@ -14179,13 +15053,18 @@
               </a:spcBef>
             </a:pPr>
             <a:r>
-              <a:rPr sz="1300">
+              <a:rPr sz="1300" dirty="0" err="1">
                 <a:solidFill>
                   <a:srgbClr val="1A1A2E"/>
                 </a:solidFill>
               </a:rPr>
               <a:t>グラフ（PNG）を実験フォルダに自動保存</a:t>
             </a:r>
+            <a:endParaRPr sz="1300" dirty="0">
+              <a:solidFill>
+                <a:srgbClr val="1A1A2E"/>
+              </a:solidFill>
+            </a:endParaRPr>
           </a:p>
         </p:txBody>
       </p:sp>
@@ -14197,7 +15076,7 @@
         </p:nvSpPr>
         <p:spPr>
           <a:xfrm>
-            <a:off x="365760" y="4892040"/>
+            <a:off x="379412" y="4059936"/>
             <a:ext cx="11430000" cy="1508760"/>
           </a:xfrm>
           <a:prstGeom prst="rect">
@@ -14231,6 +15110,7 @@
           <a:lstStyle/>
           <a:p>
             <a:pPr algn="ctr"/>
+            <a:endParaRPr/>
           </a:p>
         </p:txBody>
       </p:sp>
@@ -14242,7 +15122,7 @@
         </p:nvSpPr>
         <p:spPr>
           <a:xfrm>
-            <a:off x="457200" y="4937760"/>
+            <a:off x="457200" y="4142232"/>
             <a:ext cx="11247120" cy="256032"/>
           </a:xfrm>
           <a:prstGeom prst="rect">
@@ -14258,13 +15138,26 @@
           <a:p>
             <a:pPr algn="l"/>
             <a:r>
-              <a:rPr sz="1100" b="1" i="0">
+              <a:rPr sz="1100" b="1" i="0" dirty="0">
                 <a:solidFill>
                   <a:srgbClr val="217A3C"/>
                 </a:solidFill>
               </a:rPr>
-              <a:t>👤 後処理完了後にユーザーがすること</a:t>
-            </a:r>
+              <a:t>👤 </a:t>
+            </a:r>
+            <a:r>
+              <a:rPr sz="1100" b="1" i="0" dirty="0" err="1">
+                <a:solidFill>
+                  <a:srgbClr val="217A3C"/>
+                </a:solidFill>
+              </a:rPr>
+              <a:t>後処理完了後にユーザーがすること</a:t>
+            </a:r>
+            <a:endParaRPr sz="1100" b="1" i="0" dirty="0">
+              <a:solidFill>
+                <a:srgbClr val="217A3C"/>
+              </a:solidFill>
+            </a:endParaRPr>
           </a:p>
         </p:txBody>
       </p:sp>
@@ -14276,7 +15169,7 @@
         </p:nvSpPr>
         <p:spPr>
           <a:xfrm>
-            <a:off x="502920" y="5184648"/>
+            <a:off x="548640" y="4544568"/>
             <a:ext cx="11155680" cy="1143000"/>
           </a:xfrm>
           <a:prstGeom prst="rect">
@@ -14296,13 +15189,106 @@
               </a:spcBef>
             </a:pPr>
             <a:r>
-              <a:rPr sz="1300">
-                <a:solidFill>
-                  <a:srgbClr val="1A1A2E"/>
-                </a:solidFill>
-              </a:rPr>
-              <a:t>① WindyData/&lt;実験フォルダ&gt;/ を開いて Cl.png / Cd.png などを確認</a:t>
-            </a:r>
+              <a:rPr sz="1300" dirty="0">
+                <a:solidFill>
+                  <a:srgbClr val="1A1A2E"/>
+                </a:solidFill>
+              </a:rPr>
+              <a:t>① </a:t>
+            </a:r>
+            <a:r>
+              <a:rPr sz="1300" dirty="0" err="1">
+                <a:solidFill>
+                  <a:srgbClr val="1A1A2E"/>
+                </a:solidFill>
+              </a:rPr>
+              <a:t>WindyData</a:t>
+            </a:r>
+            <a:r>
+              <a:rPr sz="1300" dirty="0">
+                <a:solidFill>
+                  <a:srgbClr val="1A1A2E"/>
+                </a:solidFill>
+              </a:rPr>
+              <a:t>/&lt;</a:t>
+            </a:r>
+            <a:r>
+              <a:rPr sz="1300" dirty="0" err="1">
+                <a:solidFill>
+                  <a:srgbClr val="1A1A2E"/>
+                </a:solidFill>
+              </a:rPr>
+              <a:t>実験フォルダ</a:t>
+            </a:r>
+            <a:r>
+              <a:rPr sz="1300" dirty="0">
+                <a:solidFill>
+                  <a:srgbClr val="1A1A2E"/>
+                </a:solidFill>
+              </a:rPr>
+              <a:t>&gt;/ </a:t>
+            </a:r>
+            <a:r>
+              <a:rPr sz="1300" dirty="0" err="1">
+                <a:solidFill>
+                  <a:srgbClr val="1A1A2E"/>
+                </a:solidFill>
+              </a:rPr>
+              <a:t>を開いて</a:t>
+            </a:r>
+            <a:r>
+              <a:rPr sz="1300" dirty="0">
+                <a:solidFill>
+                  <a:srgbClr val="1A1A2E"/>
+                </a:solidFill>
+              </a:rPr>
+              <a:t> </a:t>
+            </a:r>
+            <a:r>
+              <a:rPr sz="1300" dirty="0" err="1">
+                <a:solidFill>
+                  <a:srgbClr val="1A1A2E"/>
+                </a:solidFill>
+              </a:rPr>
+              <a:t>Cl.png</a:t>
+            </a:r>
+            <a:r>
+              <a:rPr sz="1300" dirty="0">
+                <a:solidFill>
+                  <a:srgbClr val="1A1A2E"/>
+                </a:solidFill>
+              </a:rPr>
+              <a:t> / </a:t>
+            </a:r>
+            <a:r>
+              <a:rPr sz="1300" dirty="0" err="1">
+                <a:solidFill>
+                  <a:srgbClr val="1A1A2E"/>
+                </a:solidFill>
+              </a:rPr>
+              <a:t>Cd.png</a:t>
+            </a:r>
+            <a:r>
+              <a:rPr sz="1300" dirty="0">
+                <a:solidFill>
+                  <a:srgbClr val="1A1A2E"/>
+                </a:solidFill>
+              </a:rPr>
+              <a:t> </a:t>
+            </a:r>
+            <a:r>
+              <a:rPr sz="1300" dirty="0" err="1">
+                <a:solidFill>
+                  <a:srgbClr val="1A1A2E"/>
+                </a:solidFill>
+              </a:rPr>
+              <a:t>などを確認</a:t>
+            </a:r>
+            <a:endParaRPr sz="1300" dirty="0">
+              <a:solidFill>
+                <a:srgbClr val="1A1A2E"/>
+              </a:solidFill>
+            </a:endParaRPr>
           </a:p>
           <a:p>
             <a:pPr>
@@ -14311,12 +15297,28 @@
               </a:spcBef>
             </a:pPr>
             <a:r>
-              <a:rPr sz="1300">
-                <a:solidFill>
-                  <a:srgbClr val="1A1A2E"/>
-                </a:solidFill>
-              </a:rPr>
-              <a:t>② ブロワーを停止する（有風実験の場合）</a:t>
+              <a:rPr sz="1300" dirty="0">
+                <a:solidFill>
+                  <a:srgbClr val="1A1A2E"/>
+                </a:solidFill>
+              </a:rPr>
+              <a:t>② </a:t>
+            </a:r>
+            <a:r>
+              <a:rPr sz="1300" dirty="0" err="1">
+                <a:solidFill>
+                  <a:srgbClr val="1A1A2E"/>
+                </a:solidFill>
+              </a:rPr>
+              <a:t>ブロワーを停止する（有風実験の場合</a:t>
+            </a:r>
+            <a:r>
+              <a:rPr sz="1300" dirty="0">
+                <a:solidFill>
+                  <a:srgbClr val="1A1A2E"/>
+                </a:solidFill>
+              </a:rPr>
+              <a:t>）</a:t>
             </a:r>
           </a:p>
           <a:p>
@@ -14326,13 +15328,26 @@
               </a:spcBef>
             </a:pPr>
             <a:r>
-              <a:rPr sz="1300">
-                <a:solidFill>
-                  <a:srgbClr val="1A1A2E"/>
-                </a:solidFill>
-              </a:rPr>
-              <a:t>③ 迎角ステージは自動でホームポジション（0°）に戻っています</a:t>
-            </a:r>
+              <a:rPr sz="1300" dirty="0">
+                <a:solidFill>
+                  <a:srgbClr val="1A1A2E"/>
+                </a:solidFill>
+              </a:rPr>
+              <a:t>③ 迎角ステージは自動でホームポジション（0°）</a:t>
+            </a:r>
+            <a:r>
+              <a:rPr sz="1300" dirty="0" err="1">
+                <a:solidFill>
+                  <a:srgbClr val="1A1A2E"/>
+                </a:solidFill>
+              </a:rPr>
+              <a:t>に戻っています</a:t>
+            </a:r>
+            <a:endParaRPr sz="1300" dirty="0">
+              <a:solidFill>
+                <a:srgbClr val="1A1A2E"/>
+              </a:solidFill>
+            </a:endParaRPr>
           </a:p>
         </p:txBody>
       </p:sp>
@@ -14344,7 +15359,7 @@
         </p:nvSpPr>
         <p:spPr>
           <a:xfrm>
-            <a:off x="365760" y="6492240"/>
+            <a:off x="379412" y="5729725"/>
             <a:ext cx="11430000" cy="777240"/>
           </a:xfrm>
           <a:prstGeom prst="rect">
@@ -14378,6 +15393,7 @@
           <a:lstStyle/>
           <a:p>
             <a:pPr algn="ctr"/>
+            <a:endParaRPr/>
           </a:p>
         </p:txBody>
       </p:sp>
@@ -14389,7 +15405,7 @@
         </p:nvSpPr>
         <p:spPr>
           <a:xfrm>
-            <a:off x="457200" y="6537960"/>
+            <a:off x="457200" y="5728716"/>
             <a:ext cx="11247120" cy="256032"/>
           </a:xfrm>
           <a:prstGeom prst="rect">
@@ -14405,13 +15421,26 @@
           <a:p>
             <a:pPr algn="l"/>
             <a:r>
-              <a:rPr sz="1100" b="1" i="0">
+              <a:rPr sz="1100" b="1" i="0" dirty="0">
                 <a:solidFill>
                   <a:srgbClr val="D96D00"/>
                 </a:solidFill>
               </a:rPr>
-              <a:t>⚠  後処理がスキップされるケース</a:t>
-            </a:r>
+              <a:t>⚠  </a:t>
+            </a:r>
+            <a:r>
+              <a:rPr sz="1100" b="1" i="0" dirty="0" err="1">
+                <a:solidFill>
+                  <a:srgbClr val="D96D00"/>
+                </a:solidFill>
+              </a:rPr>
+              <a:t>後処理がスキップされるケース</a:t>
+            </a:r>
+            <a:endParaRPr sz="1100" b="1" i="0" dirty="0">
+              <a:solidFill>
+                <a:srgbClr val="D96D00"/>
+              </a:solidFill>
+            </a:endParaRPr>
           </a:p>
         </p:txBody>
       </p:sp>
@@ -14423,7 +15452,7 @@
         </p:nvSpPr>
         <p:spPr>
           <a:xfrm>
-            <a:off x="502920" y="6784848"/>
+            <a:off x="502920" y="6025896"/>
             <a:ext cx="11155680" cy="411480"/>
           </a:xfrm>
           <a:prstGeom prst="rect">
@@ -14443,13 +15472,42 @@
               </a:spcBef>
             </a:pPr>
             <a:r>
-              <a:rPr sz="1100">
-                <a:solidFill>
-                  <a:srgbClr val="1A1A2E"/>
-                </a:solidFill>
-              </a:rPr>
-              <a:t>4フェーズのいずれか volt_summary.csv が欠けている場合は後処理を自動スキップ</a:t>
-            </a:r>
+              <a:rPr sz="1100" dirty="0">
+                <a:solidFill>
+                  <a:srgbClr val="1A1A2E"/>
+                </a:solidFill>
+              </a:rPr>
+              <a:t>4フェーズのいずれか </a:t>
+            </a:r>
+            <a:r>
+              <a:rPr sz="1100" dirty="0" err="1">
+                <a:solidFill>
+                  <a:srgbClr val="1A1A2E"/>
+                </a:solidFill>
+              </a:rPr>
+              <a:t>volt_summary.csv</a:t>
+            </a:r>
+            <a:r>
+              <a:rPr sz="1100" dirty="0">
+                <a:solidFill>
+                  <a:srgbClr val="1A1A2E"/>
+                </a:solidFill>
+              </a:rPr>
+              <a:t> </a:t>
+            </a:r>
+            <a:r>
+              <a:rPr sz="1100" dirty="0" err="1">
+                <a:solidFill>
+                  <a:srgbClr val="1A1A2E"/>
+                </a:solidFill>
+              </a:rPr>
+              <a:t>が欠けている場合は後処理を自動スキップ</a:t>
+            </a:r>
+            <a:endParaRPr sz="1100" dirty="0">
+              <a:solidFill>
+                <a:srgbClr val="1A1A2E"/>
+              </a:solidFill>
+            </a:endParaRPr>
           </a:p>
           <a:p>
             <a:pPr>
@@ -14458,13 +15516,26 @@
               </a:spcBef>
             </a:pPr>
             <a:r>
-              <a:rPr sz="1100">
-                <a:solidFill>
-                  <a:srgbClr val="1A1A2E"/>
-                </a:solidFill>
-              </a:rPr>
-              <a:t>→ 欠けているフェーズを再実行するか、手動で後処理スクリプトを実行してください</a:t>
-            </a:r>
+              <a:rPr sz="1100" dirty="0">
+                <a:solidFill>
+                  <a:srgbClr val="1A1A2E"/>
+                </a:solidFill>
+              </a:rPr>
+              <a:t>→ </a:t>
+            </a:r>
+            <a:r>
+              <a:rPr sz="1100" dirty="0" err="1">
+                <a:solidFill>
+                  <a:srgbClr val="1A1A2E"/>
+                </a:solidFill>
+              </a:rPr>
+              <a:t>欠けているフェーズを再実行するか、手動で後処理スクリプトを実行してください</a:t>
+            </a:r>
+            <a:endParaRPr sz="1100" dirty="0">
+              <a:solidFill>
+                <a:srgbClr val="1A1A2E"/>
+              </a:solidFill>
+            </a:endParaRPr>
           </a:p>
         </p:txBody>
       </p:sp>
